--- a/e2e/results/exports/latest.pptx
+++ b/e2e/results/exports/latest.pptx
@@ -2019,7 +2019,7 @@
       </p:grpSpPr>
       <p:pic>
         <p:nvPicPr>
-          <p:cNvPr id="2" name="Image 0" descr="Photograph for a pitch &amp; investors presentation">    </p:cNvPr>
+          <p:cNvPr id="2" name="pt:VjeSGcijlGi1" descr="Photograph for a pitch &amp; investors presentation">    </p:cNvPr>
           <p:cNvPicPr>
             <a:picLocks noChangeAspect="1"/>
           </p:cNvPicPr>
@@ -2042,7 +2042,7 @@
       </p:pic>
       <p:pic>
         <p:nvPicPr>
-          <p:cNvPr id="3" name="Image 1" descr="preencoded.png">    </p:cNvPr>
+          <p:cNvPr id="3" name="pt:VjeSGcijlGi1" descr="preencoded.png">    </p:cNvPr>
           <p:cNvPicPr>
             <a:picLocks noChangeAspect="1"/>
           </p:cNvPicPr>
@@ -2066,7 +2066,7 @@
       </p:pic>
       <p:sp>
         <p:nvSpPr>
-          <p:cNvPr id="4" name="Shape 0"/>
+          <p:cNvPr id="4" name="pt:WAsJmsX0hJo-"/>
           <p:cNvSpPr/>
           <p:nvPr/>
         </p:nvSpPr>
@@ -2088,7 +2088,7 @@
       </p:sp>
       <p:sp>
         <p:nvSpPr>
-          <p:cNvPr id="5" name="Shape 1"/>
+          <p:cNvPr id="5" name="pt:N7Dme46V95yv"/>
           <p:cNvSpPr/>
           <p:nvPr/>
         </p:nvSpPr>
@@ -2110,7 +2110,7 @@
       </p:sp>
       <p:sp>
         <p:nvSpPr>
-          <p:cNvPr id="6" name="Shape 2"/>
+          <p:cNvPr id="6" name="pt:QA0Y6ARzRj9B"/>
           <p:cNvSpPr/>
           <p:nvPr/>
         </p:nvSpPr>
@@ -2132,7 +2132,7 @@
       </p:sp>
       <p:sp>
         <p:nvSpPr>
-          <p:cNvPr id="7" name="Shape 3"/>
+          <p:cNvPr id="7" name="pt:QKl51LFNfm48"/>
           <p:cNvSpPr/>
           <p:nvPr/>
         </p:nvSpPr>
@@ -2154,7 +2154,7 @@
       </p:sp>
       <p:sp>
         <p:nvSpPr>
-          <p:cNvPr id="8" name="Shape 4"/>
+          <p:cNvPr id="8" name="pt:5V0eCDM7EDdz"/>
           <p:cNvSpPr/>
           <p:nvPr/>
         </p:nvSpPr>
@@ -2176,7 +2176,7 @@
       </p:sp>
       <p:sp>
         <p:nvSpPr>
-          <p:cNvPr id="9" name="Shape 5"/>
+          <p:cNvPr id="9" name="pt:LKLz0q0UjhZ2"/>
           <p:cNvSpPr/>
           <p:nvPr/>
         </p:nvSpPr>
@@ -2198,7 +2198,7 @@
       </p:sp>
       <p:sp>
         <p:nvSpPr>
-          <p:cNvPr id="10" name="Shape 6"/>
+          <p:cNvPr id="10" name="pt:K79lCNtKG_vZ"/>
           <p:cNvSpPr/>
           <p:nvPr/>
         </p:nvSpPr>
@@ -2220,7 +2220,7 @@
       </p:sp>
       <p:sp>
         <p:nvSpPr>
-          <p:cNvPr id="11" name="Shape 7"/>
+          <p:cNvPr id="11" name="pt:-C0L_--pdAFG"/>
           <p:cNvSpPr/>
           <p:nvPr/>
         </p:nvSpPr>
@@ -2242,7 +2242,7 @@
       </p:sp>
       <p:sp>
         <p:nvSpPr>
-          <p:cNvPr id="12" name="Shape 8"/>
+          <p:cNvPr id="12" name="pt:i_q37tsJ-1ga"/>
           <p:cNvSpPr/>
           <p:nvPr/>
         </p:nvSpPr>
@@ -2264,7 +2264,7 @@
       </p:sp>
       <p:sp>
         <p:nvSpPr>
-          <p:cNvPr id="13" name="Shape 9"/>
+          <p:cNvPr id="13" name="pt:9jN7bdp9DQGA"/>
           <p:cNvSpPr/>
           <p:nvPr/>
         </p:nvSpPr>
@@ -2286,7 +2286,7 @@
       </p:sp>
       <p:sp>
         <p:nvSpPr>
-          <p:cNvPr id="14" name="Shape 10"/>
+          <p:cNvPr id="14" name="pt:tleztsaqNVKL"/>
           <p:cNvSpPr/>
           <p:nvPr/>
         </p:nvSpPr>
@@ -2308,7 +2308,7 @@
       </p:sp>
       <p:sp>
         <p:nvSpPr>
-          <p:cNvPr id="15" name="Shape 11"/>
+          <p:cNvPr id="15" name="pt:He_QB5vubJdd"/>
           <p:cNvSpPr/>
           <p:nvPr/>
         </p:nvSpPr>
@@ -2330,7 +2330,7 @@
       </p:sp>
       <p:sp>
         <p:nvSpPr>
-          <p:cNvPr id="16" name="Shape 12"/>
+          <p:cNvPr id="16" name="pt:JbKu9tuSYfXL"/>
           <p:cNvSpPr/>
           <p:nvPr/>
         </p:nvSpPr>
@@ -2352,7 +2352,7 @@
       </p:sp>
       <p:sp>
         <p:nvSpPr>
-          <p:cNvPr id="17" name="Shape 13"/>
+          <p:cNvPr id="17" name="pt:u_AK5n63dx-y"/>
           <p:cNvSpPr/>
           <p:nvPr/>
         </p:nvSpPr>
@@ -2374,7 +2374,7 @@
       </p:sp>
       <p:sp>
         <p:nvSpPr>
-          <p:cNvPr id="18" name="Shape 14"/>
+          <p:cNvPr id="18" name="pt:CZ0CI_zzF_ql"/>
           <p:cNvSpPr/>
           <p:nvPr/>
         </p:nvSpPr>
@@ -2396,7 +2396,7 @@
       </p:sp>
       <p:sp>
         <p:nvSpPr>
-          <p:cNvPr id="19" name="Shape 15"/>
+          <p:cNvPr id="19" name="pt:-mga53H1YJ2B"/>
           <p:cNvSpPr/>
           <p:nvPr/>
         </p:nvSpPr>
@@ -2418,7 +2418,7 @@
       </p:sp>
       <p:sp>
         <p:nvSpPr>
-          <p:cNvPr id="20" name="Shape 16"/>
+          <p:cNvPr id="20" name="pt:sIKrjqOHroxz"/>
           <p:cNvSpPr/>
           <p:nvPr/>
         </p:nvSpPr>
@@ -2440,7 +2440,7 @@
       </p:sp>
       <p:sp>
         <p:nvSpPr>
-          <p:cNvPr id="21" name="Shape 17"/>
+          <p:cNvPr id="21" name="pt:5xV7jeeEQARH"/>
           <p:cNvSpPr/>
           <p:nvPr/>
         </p:nvSpPr>
@@ -2462,7 +2462,7 @@
       </p:sp>
       <p:sp>
         <p:nvSpPr>
-          <p:cNvPr id="22" name="Shape 18"/>
+          <p:cNvPr id="22" name="pt:d6a5BOvMByQ0"/>
           <p:cNvSpPr/>
           <p:nvPr/>
         </p:nvSpPr>
@@ -2484,7 +2484,7 @@
       </p:sp>
       <p:sp>
         <p:nvSpPr>
-          <p:cNvPr id="23" name="Shape 19"/>
+          <p:cNvPr id="23" name="pt:spQopN-9YHBJ"/>
           <p:cNvSpPr/>
           <p:nvPr/>
         </p:nvSpPr>
@@ -2506,7 +2506,7 @@
       </p:sp>
       <p:sp>
         <p:nvSpPr>
-          <p:cNvPr id="24" name="Shape 20"/>
+          <p:cNvPr id="24" name="pt:v1R3NnK6zRxN"/>
           <p:cNvSpPr/>
           <p:nvPr/>
         </p:nvSpPr>
@@ -2528,7 +2528,7 @@
       </p:sp>
       <p:sp>
         <p:nvSpPr>
-          <p:cNvPr id="25" name="Text 21"/>
+          <p:cNvPr id="25" name="pt:iV0WE6Y1p3tY"/>
           <p:cNvSpPr/>
           <p:nvPr/>
         </p:nvSpPr>
@@ -2570,7 +2570,7 @@
       </p:sp>
       <p:sp>
         <p:nvSpPr>
-          <p:cNvPr id="26" name="Text 22"/>
+          <p:cNvPr id="26" name="pt:Gbl41_8LJz-S"/>
           <p:cNvSpPr/>
           <p:nvPr/>
         </p:nvSpPr>
@@ -2615,6 +2615,185 @@
   <p:clrMapOvr>
     <a:masterClrMapping/>
   </p:clrMapOvr>
+  <p:transition spd="fast">
+    <p:zoom dir="in"/>
+  </p:transition>
+  <p:timing>
+    <p:tnLst>
+      <p:par>
+        <p:cTn id="1" dur="indefinite" restart="never" nodeType="tmRoot">
+          <p:childTnLst>
+            <p:seq concurrent="1" nextAc="seek">
+              <p:cTn id="2" dur="indefinite" nodeType="mainSeq">
+                <p:childTnLst>
+                  <p:par>
+                    <p:cTn id="3" fill="hold">
+                      <p:stCondLst>
+                        <p:cond delay="indefinite"/>
+                        <p:cond evt="onBegin" delay="0">
+                          <p:tn val="2"/>
+                        </p:cond>
+                      </p:stCondLst>
+                      <p:childTnLst>
+                        <p:par>
+                          <p:cTn id="4" fill="hold">
+                            <p:stCondLst>
+                              <p:cond delay="0"/>
+                            </p:stCondLst>
+                            <p:childTnLst>
+                              <p:par>
+                                <p:cTn id="7" presetID="22" presetClass="entr" presetSubtype="8" fill="hold" decel="100000" nodeType="afterEffect">
+                                  <p:stCondLst>
+                                    <p:cond delay="0"/>
+                                  </p:stCondLst>
+                                  <p:childTnLst>
+                                    <p:set>
+                                      <p:cBhvr>
+                                        <p:cTn id="5" dur="1" fill="hold">
+                                          <p:stCondLst>
+                                            <p:cond delay="0"/>
+                                          </p:stCondLst>
+                                        </p:cTn>
+                                        <p:tgtEl>
+                                          <p:spTgt spid="24"/>
+                                        </p:tgtEl>
+                                        <p:attrNameLst>
+                                          <p:attrName>style.visibility</p:attrName>
+                                        </p:attrNameLst>
+                                      </p:cBhvr>
+                                      <p:to>
+                                        <p:strVal val="visible"/>
+                                      </p:to>
+                                    </p:set>
+                                    <p:animEffect transition="in" filter="wipe(left)">
+                                      <p:cBhvr>
+                                        <p:cTn id="6" dur="450"/>
+                                        <p:tgtEl>
+                                          <p:spTgt spid="24"/>
+                                        </p:tgtEl>
+                                      </p:cBhvr>
+                                    </p:animEffect>
+                                  </p:childTnLst>
+                                </p:cTn>
+                              </p:par>
+                              <p:par>
+                                <p:cTn id="11" presetID="53" presetClass="entr" presetSubtype="16" fill="hold" decel="100000" nodeType="withEffect">
+                                  <p:stCondLst>
+                                    <p:cond delay="100"/>
+                                  </p:stCondLst>
+                                  <p:childTnLst>
+                                    <p:set>
+                                      <p:cBhvr>
+                                        <p:cTn id="8" dur="1" fill="hold">
+                                          <p:stCondLst>
+                                            <p:cond delay="0"/>
+                                          </p:stCondLst>
+                                        </p:cTn>
+                                        <p:tgtEl>
+                                          <p:spTgt spid="25"/>
+                                        </p:tgtEl>
+                                        <p:attrNameLst>
+                                          <p:attrName>style.visibility</p:attrName>
+                                        </p:attrNameLst>
+                                      </p:cBhvr>
+                                      <p:to>
+                                        <p:strVal val="visible"/>
+                                      </p:to>
+                                    </p:set>
+                                    <p:animEffect transition="in" filter="fade">
+                                      <p:cBhvr>
+                                        <p:cTn id="9" dur="450"/>
+                                        <p:tgtEl>
+                                          <p:spTgt spid="25"/>
+                                        </p:tgtEl>
+                                      </p:cBhvr>
+                                    </p:animEffect>
+                                    <p:animScale>
+                                      <p:cBhvr>
+                                        <p:cTn id="10" dur="450" fill="hold"/>
+                                        <p:tgtEl>
+                                          <p:spTgt spid="25"/>
+                                        </p:tgtEl>
+                                      </p:cBhvr>
+                                      <p:from x="88000" y="88000"/>
+                                      <p:to x="100000" y="100000"/>
+                                    </p:animScale>
+                                  </p:childTnLst>
+                                </p:cTn>
+                              </p:par>
+                              <p:par>
+                                <p:cTn id="15" presetID="53" presetClass="entr" presetSubtype="16" fill="hold" decel="100000" nodeType="withEffect">
+                                  <p:stCondLst>
+                                    <p:cond delay="200"/>
+                                  </p:stCondLst>
+                                  <p:childTnLst>
+                                    <p:set>
+                                      <p:cBhvr>
+                                        <p:cTn id="12" dur="1" fill="hold">
+                                          <p:stCondLst>
+                                            <p:cond delay="0"/>
+                                          </p:stCondLst>
+                                        </p:cTn>
+                                        <p:tgtEl>
+                                          <p:spTgt spid="26"/>
+                                        </p:tgtEl>
+                                        <p:attrNameLst>
+                                          <p:attrName>style.visibility</p:attrName>
+                                        </p:attrNameLst>
+                                      </p:cBhvr>
+                                      <p:to>
+                                        <p:strVal val="visible"/>
+                                      </p:to>
+                                    </p:set>
+                                    <p:animEffect transition="in" filter="fade">
+                                      <p:cBhvr>
+                                        <p:cTn id="13" dur="450"/>
+                                        <p:tgtEl>
+                                          <p:spTgt spid="26"/>
+                                        </p:tgtEl>
+                                      </p:cBhvr>
+                                    </p:animEffect>
+                                    <p:animScale>
+                                      <p:cBhvr>
+                                        <p:cTn id="14" dur="450" fill="hold"/>
+                                        <p:tgtEl>
+                                          <p:spTgt spid="26"/>
+                                        </p:tgtEl>
+                                      </p:cBhvr>
+                                      <p:from x="88000" y="88000"/>
+                                      <p:to x="100000" y="100000"/>
+                                    </p:animScale>
+                                  </p:childTnLst>
+                                </p:cTn>
+                              </p:par>
+                            </p:childTnLst>
+                          </p:cTn>
+                        </p:par>
+                      </p:childTnLst>
+                    </p:cTn>
+                  </p:par>
+                </p:childTnLst>
+              </p:cTn>
+              <p:prevCondLst>
+                <p:cond evt="onPrev" delay="0">
+                  <p:tgtEl>
+                    <p:sldTgt/>
+                  </p:tgtEl>
+                </p:cond>
+              </p:prevCondLst>
+              <p:nextCondLst>
+                <p:cond evt="onNext" delay="0">
+                  <p:tgtEl>
+                    <p:sldTgt/>
+                  </p:tgtEl>
+                </p:cond>
+              </p:nextCondLst>
+            </p:seq>
+          </p:childTnLst>
+        </p:cTn>
+      </p:par>
+    </p:tnLst>
+  </p:timing>
 </p:sld>
 </file>
 
@@ -2644,7 +2823,7 @@
       </p:grpSpPr>
       <p:sp>
         <p:nvSpPr>
-          <p:cNvPr id="2" name="Shape 0"/>
+          <p:cNvPr id="2" name="pt:1XXBAUYL9qxm"/>
           <p:cNvSpPr/>
           <p:nvPr/>
         </p:nvSpPr>
@@ -2664,7 +2843,7 @@
       </p:sp>
       <p:sp>
         <p:nvSpPr>
-          <p:cNvPr id="3" name="Text 1"/>
+          <p:cNvPr id="3" name="pt:rjBzJPS88IgU"/>
           <p:cNvSpPr/>
           <p:nvPr/>
         </p:nvSpPr>
@@ -2706,7 +2885,7 @@
       </p:sp>
       <p:sp>
         <p:nvSpPr>
-          <p:cNvPr id="4" name="Text 2"/>
+          <p:cNvPr id="4" name="pt:K2ARchUeQ5TM"/>
           <p:cNvSpPr/>
           <p:nvPr/>
         </p:nvSpPr>
@@ -2748,7 +2927,7 @@
       </p:sp>
       <p:sp>
         <p:nvSpPr>
-          <p:cNvPr id="5" name="Text 3"/>
+          <p:cNvPr id="5" name="pt:OWvfSNqeKYSa"/>
           <p:cNvSpPr/>
           <p:nvPr/>
         </p:nvSpPr>
@@ -2813,7 +2992,7 @@
       </p:sp>
       <p:sp>
         <p:nvSpPr>
-          <p:cNvPr id="6" name="Shape 4"/>
+          <p:cNvPr id="6" name="pt:iviTHIoSc2a0"/>
           <p:cNvSpPr/>
           <p:nvPr/>
         </p:nvSpPr>
@@ -2835,7 +3014,7 @@
       </p:sp>
       <p:sp>
         <p:nvSpPr>
-          <p:cNvPr id="7" name="Text 5"/>
+          <p:cNvPr id="7" name="pt:hqhPI1dMf2_K"/>
           <p:cNvSpPr/>
           <p:nvPr/>
         </p:nvSpPr>
@@ -2880,6 +3059,220 @@
   <p:clrMapOvr>
     <a:masterClrMapping/>
   </p:clrMapOvr>
+  <p:transition spd="fast">
+    <p:zoom dir="in"/>
+  </p:transition>
+  <p:timing>
+    <p:tnLst>
+      <p:par>
+        <p:cTn id="1" dur="indefinite" restart="never" nodeType="tmRoot">
+          <p:childTnLst>
+            <p:seq concurrent="1" nextAc="seek">
+              <p:cTn id="2" dur="indefinite" nodeType="mainSeq">
+                <p:childTnLst>
+                  <p:par>
+                    <p:cTn id="3" fill="hold">
+                      <p:stCondLst>
+                        <p:cond delay="indefinite"/>
+                        <p:cond evt="onBegin" delay="0">
+                          <p:tn val="2"/>
+                        </p:cond>
+                      </p:stCondLst>
+                      <p:childTnLst>
+                        <p:par>
+                          <p:cTn id="4" fill="hold">
+                            <p:stCondLst>
+                              <p:cond delay="0"/>
+                            </p:stCondLst>
+                            <p:childTnLst>
+                              <p:par>
+                                <p:cTn id="8" presetID="53" presetClass="entr" presetSubtype="16" fill="hold" decel="100000" nodeType="afterEffect">
+                                  <p:stCondLst>
+                                    <p:cond delay="0"/>
+                                  </p:stCondLst>
+                                  <p:childTnLst>
+                                    <p:set>
+                                      <p:cBhvr>
+                                        <p:cTn id="5" dur="1" fill="hold">
+                                          <p:stCondLst>
+                                            <p:cond delay="0"/>
+                                          </p:stCondLst>
+                                        </p:cTn>
+                                        <p:tgtEl>
+                                          <p:spTgt spid="3"/>
+                                        </p:tgtEl>
+                                        <p:attrNameLst>
+                                          <p:attrName>style.visibility</p:attrName>
+                                        </p:attrNameLst>
+                                      </p:cBhvr>
+                                      <p:to>
+                                        <p:strVal val="visible"/>
+                                      </p:to>
+                                    </p:set>
+                                    <p:animEffect transition="in" filter="fade">
+                                      <p:cBhvr>
+                                        <p:cTn id="6" dur="450"/>
+                                        <p:tgtEl>
+                                          <p:spTgt spid="3"/>
+                                        </p:tgtEl>
+                                      </p:cBhvr>
+                                    </p:animEffect>
+                                    <p:animScale>
+                                      <p:cBhvr>
+                                        <p:cTn id="7" dur="450" fill="hold"/>
+                                        <p:tgtEl>
+                                          <p:spTgt spid="3"/>
+                                        </p:tgtEl>
+                                      </p:cBhvr>
+                                      <p:from x="88000" y="88000"/>
+                                      <p:to x="100000" y="100000"/>
+                                    </p:animScale>
+                                  </p:childTnLst>
+                                </p:cTn>
+                              </p:par>
+                              <p:par>
+                                <p:cTn id="11" presetID="10" presetClass="entr" presetSubtype="0" fill="hold" decel="100000" nodeType="withEffect">
+                                  <p:stCondLst>
+                                    <p:cond delay="100"/>
+                                  </p:stCondLst>
+                                  <p:childTnLst>
+                                    <p:set>
+                                      <p:cBhvr>
+                                        <p:cTn id="9" dur="1" fill="hold">
+                                          <p:stCondLst>
+                                            <p:cond delay="0"/>
+                                          </p:stCondLst>
+                                        </p:cTn>
+                                        <p:tgtEl>
+                                          <p:spTgt spid="4"/>
+                                        </p:tgtEl>
+                                        <p:attrNameLst>
+                                          <p:attrName>style.visibility</p:attrName>
+                                        </p:attrNameLst>
+                                      </p:cBhvr>
+                                      <p:to>
+                                        <p:strVal val="visible"/>
+                                      </p:to>
+                                    </p:set>
+                                    <p:animEffect transition="in" filter="fade">
+                                      <p:cBhvr>
+                                        <p:cTn id="10" dur="450"/>
+                                        <p:tgtEl>
+                                          <p:spTgt spid="4"/>
+                                        </p:tgtEl>
+                                      </p:cBhvr>
+                                    </p:animEffect>
+                                  </p:childTnLst>
+                                </p:cTn>
+                              </p:par>
+                              <p:par>
+                                <p:cTn id="14" presetID="22" presetClass="entr" presetSubtype="8" fill="hold" decel="100000" nodeType="withEffect">
+                                  <p:stCondLst>
+                                    <p:cond delay="200"/>
+                                  </p:stCondLst>
+                                  <p:childTnLst>
+                                    <p:set>
+                                      <p:cBhvr>
+                                        <p:cTn id="12" dur="1" fill="hold">
+                                          <p:stCondLst>
+                                            <p:cond delay="0"/>
+                                          </p:stCondLst>
+                                        </p:cTn>
+                                        <p:tgtEl>
+                                          <p:spTgt spid="6"/>
+                                        </p:tgtEl>
+                                        <p:attrNameLst>
+                                          <p:attrName>style.visibility</p:attrName>
+                                        </p:attrNameLst>
+                                      </p:cBhvr>
+                                      <p:to>
+                                        <p:strVal val="visible"/>
+                                      </p:to>
+                                    </p:set>
+                                    <p:animEffect transition="in" filter="wipe(left)">
+                                      <p:cBhvr>
+                                        <p:cTn id="13" dur="450"/>
+                                        <p:tgtEl>
+                                          <p:spTgt spid="6"/>
+                                        </p:tgtEl>
+                                      </p:cBhvr>
+                                    </p:animEffect>
+                                  </p:childTnLst>
+                                </p:cTn>
+                              </p:par>
+                              <p:par>
+                                <p:cTn id="18" presetID="53" presetClass="entr" presetSubtype="16" fill="hold" decel="100000" nodeType="withEffect">
+                                  <p:stCondLst>
+                                    <p:cond delay="300"/>
+                                  </p:stCondLst>
+                                  <p:childTnLst>
+                                    <p:set>
+                                      <p:cBhvr>
+                                        <p:cTn id="15" dur="1" fill="hold">
+                                          <p:stCondLst>
+                                            <p:cond delay="0"/>
+                                          </p:stCondLst>
+                                        </p:cTn>
+                                        <p:tgtEl>
+                                          <p:spTgt spid="7"/>
+                                        </p:tgtEl>
+                                        <p:attrNameLst>
+                                          <p:attrName>style.visibility</p:attrName>
+                                        </p:attrNameLst>
+                                      </p:cBhvr>
+                                      <p:to>
+                                        <p:strVal val="visible"/>
+                                      </p:to>
+                                    </p:set>
+                                    <p:animEffect transition="in" filter="fade">
+                                      <p:cBhvr>
+                                        <p:cTn id="16" dur="450"/>
+                                        <p:tgtEl>
+                                          <p:spTgt spid="7"/>
+                                        </p:tgtEl>
+                                      </p:cBhvr>
+                                    </p:animEffect>
+                                    <p:animScale>
+                                      <p:cBhvr>
+                                        <p:cTn id="17" dur="450" fill="hold"/>
+                                        <p:tgtEl>
+                                          <p:spTgt spid="7"/>
+                                        </p:tgtEl>
+                                      </p:cBhvr>
+                                      <p:from x="88000" y="88000"/>
+                                      <p:to x="100000" y="100000"/>
+                                    </p:animScale>
+                                  </p:childTnLst>
+                                </p:cTn>
+                              </p:par>
+                            </p:childTnLst>
+                          </p:cTn>
+                        </p:par>
+                      </p:childTnLst>
+                    </p:cTn>
+                  </p:par>
+                </p:childTnLst>
+              </p:cTn>
+              <p:prevCondLst>
+                <p:cond evt="onPrev" delay="0">
+                  <p:tgtEl>
+                    <p:sldTgt/>
+                  </p:tgtEl>
+                </p:cond>
+              </p:prevCondLst>
+              <p:nextCondLst>
+                <p:cond evt="onNext" delay="0">
+                  <p:tgtEl>
+                    <p:sldTgt/>
+                  </p:tgtEl>
+                </p:cond>
+              </p:nextCondLst>
+            </p:seq>
+          </p:childTnLst>
+        </p:cTn>
+      </p:par>
+    </p:tnLst>
+  </p:timing>
 </p:sld>
 </file>
 
@@ -2909,7 +3302,7 @@
       </p:grpSpPr>
       <p:pic>
         <p:nvPicPr>
-          <p:cNvPr id="2" name="Image 0" descr="Photograph for a pitch &amp; investors presentation">    </p:cNvPr>
+          <p:cNvPr id="2" name="pt:XVnbGlr7lddW" descr="Photograph for a pitch &amp; investors presentation">    </p:cNvPr>
           <p:cNvPicPr>
             <a:picLocks noChangeAspect="1"/>
           </p:cNvPicPr>
@@ -2932,7 +3325,7 @@
       </p:pic>
       <p:pic>
         <p:nvPicPr>
-          <p:cNvPr id="3" name="Image 1" descr="preencoded.png">    </p:cNvPr>
+          <p:cNvPr id="3" name="pt:XVnbGlr7lddW" descr="preencoded.png">    </p:cNvPr>
           <p:cNvPicPr>
             <a:picLocks noChangeAspect="1"/>
           </p:cNvPicPr>
@@ -2956,7 +3349,7 @@
       </p:pic>
       <p:sp>
         <p:nvSpPr>
-          <p:cNvPr id="4" name="Shape 0"/>
+          <p:cNvPr id="4" name="pt:r2A3FNQ5Lvm5"/>
           <p:cNvSpPr/>
           <p:nvPr/>
         </p:nvSpPr>
@@ -2978,7 +3371,7 @@
       </p:sp>
       <p:sp>
         <p:nvSpPr>
-          <p:cNvPr id="5" name="Shape 1"/>
+          <p:cNvPr id="5" name="pt:6vKByEk6_AfZ"/>
           <p:cNvSpPr/>
           <p:nvPr/>
         </p:nvSpPr>
@@ -3000,7 +3393,7 @@
       </p:sp>
       <p:sp>
         <p:nvSpPr>
-          <p:cNvPr id="6" name="Shape 2"/>
+          <p:cNvPr id="6" name="pt:Qf8yX7xINNER"/>
           <p:cNvSpPr/>
           <p:nvPr/>
         </p:nvSpPr>
@@ -3022,7 +3415,7 @@
       </p:sp>
       <p:sp>
         <p:nvSpPr>
-          <p:cNvPr id="7" name="Shape 3"/>
+          <p:cNvPr id="7" name="pt:pXVNUqkNK1-Q"/>
           <p:cNvSpPr/>
           <p:nvPr/>
         </p:nvSpPr>
@@ -3044,7 +3437,7 @@
       </p:sp>
       <p:sp>
         <p:nvSpPr>
-          <p:cNvPr id="8" name="Shape 4"/>
+          <p:cNvPr id="8" name="pt:0cNdgwXPo_dc"/>
           <p:cNvSpPr/>
           <p:nvPr/>
         </p:nvSpPr>
@@ -3066,7 +3459,7 @@
       </p:sp>
       <p:sp>
         <p:nvSpPr>
-          <p:cNvPr id="9" name="Shape 5"/>
+          <p:cNvPr id="9" name="pt:GQh2A9kZbr05"/>
           <p:cNvSpPr/>
           <p:nvPr/>
         </p:nvSpPr>
@@ -3088,7 +3481,7 @@
       </p:sp>
       <p:sp>
         <p:nvSpPr>
-          <p:cNvPr id="10" name="Shape 6"/>
+          <p:cNvPr id="10" name="pt:kabiml_oAGDt"/>
           <p:cNvSpPr/>
           <p:nvPr/>
         </p:nvSpPr>
@@ -3110,7 +3503,7 @@
       </p:sp>
       <p:sp>
         <p:nvSpPr>
-          <p:cNvPr id="11" name="Shape 7"/>
+          <p:cNvPr id="11" name="pt:wDptP5P3dWCz"/>
           <p:cNvSpPr/>
           <p:nvPr/>
         </p:nvSpPr>
@@ -3132,7 +3525,7 @@
       </p:sp>
       <p:sp>
         <p:nvSpPr>
-          <p:cNvPr id="12" name="Shape 8"/>
+          <p:cNvPr id="12" name="pt:dzQnSKYS2wlZ"/>
           <p:cNvSpPr/>
           <p:nvPr/>
         </p:nvSpPr>
@@ -3154,7 +3547,7 @@
       </p:sp>
       <p:sp>
         <p:nvSpPr>
-          <p:cNvPr id="13" name="Shape 9"/>
+          <p:cNvPr id="13" name="pt:QK8TrMdH-kNf"/>
           <p:cNvSpPr/>
           <p:nvPr/>
         </p:nvSpPr>
@@ -3176,7 +3569,7 @@
       </p:sp>
       <p:sp>
         <p:nvSpPr>
-          <p:cNvPr id="14" name="Shape 10"/>
+          <p:cNvPr id="14" name="pt:ZlG_Fwr1MTI3"/>
           <p:cNvSpPr/>
           <p:nvPr/>
         </p:nvSpPr>
@@ -3198,7 +3591,7 @@
       </p:sp>
       <p:sp>
         <p:nvSpPr>
-          <p:cNvPr id="15" name="Shape 11"/>
+          <p:cNvPr id="15" name="pt:uopU-DotqOnX"/>
           <p:cNvSpPr/>
           <p:nvPr/>
         </p:nvSpPr>
@@ -3220,7 +3613,7 @@
       </p:sp>
       <p:sp>
         <p:nvSpPr>
-          <p:cNvPr id="16" name="Shape 12"/>
+          <p:cNvPr id="16" name="pt:xt81iAc7HoCo"/>
           <p:cNvSpPr/>
           <p:nvPr/>
         </p:nvSpPr>
@@ -3242,7 +3635,7 @@
       </p:sp>
       <p:sp>
         <p:nvSpPr>
-          <p:cNvPr id="17" name="Shape 13"/>
+          <p:cNvPr id="17" name="pt:xi7CYea21cWW"/>
           <p:cNvSpPr/>
           <p:nvPr/>
         </p:nvSpPr>
@@ -3264,7 +3657,7 @@
       </p:sp>
       <p:sp>
         <p:nvSpPr>
-          <p:cNvPr id="18" name="Shape 14"/>
+          <p:cNvPr id="18" name="pt:KeOUF6o5fYRF"/>
           <p:cNvSpPr/>
           <p:nvPr/>
         </p:nvSpPr>
@@ -3286,7 +3679,7 @@
       </p:sp>
       <p:sp>
         <p:nvSpPr>
-          <p:cNvPr id="19" name="Shape 15"/>
+          <p:cNvPr id="19" name="pt:658uuZDmcOSu"/>
           <p:cNvSpPr/>
           <p:nvPr/>
         </p:nvSpPr>
@@ -3308,7 +3701,7 @@
       </p:sp>
       <p:sp>
         <p:nvSpPr>
-          <p:cNvPr id="20" name="Shape 16"/>
+          <p:cNvPr id="20" name="pt:8N9X8sIziM9Z"/>
           <p:cNvSpPr/>
           <p:nvPr/>
         </p:nvSpPr>
@@ -3330,7 +3723,7 @@
       </p:sp>
       <p:sp>
         <p:nvSpPr>
-          <p:cNvPr id="21" name="Shape 17"/>
+          <p:cNvPr id="21" name="pt:8OT5-2voxaW9"/>
           <p:cNvSpPr/>
           <p:nvPr/>
         </p:nvSpPr>
@@ -3352,7 +3745,7 @@
       </p:sp>
       <p:sp>
         <p:nvSpPr>
-          <p:cNvPr id="22" name="Shape 18"/>
+          <p:cNvPr id="22" name="pt:hFuNDeof1o9N"/>
           <p:cNvSpPr/>
           <p:nvPr/>
         </p:nvSpPr>
@@ -3374,7 +3767,7 @@
       </p:sp>
       <p:sp>
         <p:nvSpPr>
-          <p:cNvPr id="23" name="Shape 19"/>
+          <p:cNvPr id="23" name="pt:xvH4mm-n8kNl"/>
           <p:cNvSpPr/>
           <p:nvPr/>
         </p:nvSpPr>
@@ -3396,7 +3789,7 @@
       </p:sp>
       <p:sp>
         <p:nvSpPr>
-          <p:cNvPr id="24" name="Shape 20"/>
+          <p:cNvPr id="24" name="pt:IS8f45wFfJOx"/>
           <p:cNvSpPr/>
           <p:nvPr/>
         </p:nvSpPr>
@@ -3418,7 +3811,7 @@
       </p:sp>
       <p:sp>
         <p:nvSpPr>
-          <p:cNvPr id="25" name="Text 21"/>
+          <p:cNvPr id="25" name="pt:zOMMrAXsboLJ"/>
           <p:cNvSpPr/>
           <p:nvPr/>
         </p:nvSpPr>
@@ -3460,7 +3853,7 @@
       </p:sp>
       <p:sp>
         <p:nvSpPr>
-          <p:cNvPr id="26" name="Text 22"/>
+          <p:cNvPr id="26" name="pt:S4i_XkZWRiW9"/>
           <p:cNvSpPr/>
           <p:nvPr/>
         </p:nvSpPr>
@@ -3505,6 +3898,185 @@
   <p:clrMapOvr>
     <a:masterClrMapping/>
   </p:clrMapOvr>
+  <p:transition spd="fast">
+    <p:zoom dir="in"/>
+  </p:transition>
+  <p:timing>
+    <p:tnLst>
+      <p:par>
+        <p:cTn id="1" dur="indefinite" restart="never" nodeType="tmRoot">
+          <p:childTnLst>
+            <p:seq concurrent="1" nextAc="seek">
+              <p:cTn id="2" dur="indefinite" nodeType="mainSeq">
+                <p:childTnLst>
+                  <p:par>
+                    <p:cTn id="3" fill="hold">
+                      <p:stCondLst>
+                        <p:cond delay="indefinite"/>
+                        <p:cond evt="onBegin" delay="0">
+                          <p:tn val="2"/>
+                        </p:cond>
+                      </p:stCondLst>
+                      <p:childTnLst>
+                        <p:par>
+                          <p:cTn id="4" fill="hold">
+                            <p:stCondLst>
+                              <p:cond delay="0"/>
+                            </p:stCondLst>
+                            <p:childTnLst>
+                              <p:par>
+                                <p:cTn id="7" presetID="22" presetClass="entr" presetSubtype="8" fill="hold" decel="100000" nodeType="afterEffect">
+                                  <p:stCondLst>
+                                    <p:cond delay="0"/>
+                                  </p:stCondLst>
+                                  <p:childTnLst>
+                                    <p:set>
+                                      <p:cBhvr>
+                                        <p:cTn id="5" dur="1" fill="hold">
+                                          <p:stCondLst>
+                                            <p:cond delay="0"/>
+                                          </p:stCondLst>
+                                        </p:cTn>
+                                        <p:tgtEl>
+                                          <p:spTgt spid="24"/>
+                                        </p:tgtEl>
+                                        <p:attrNameLst>
+                                          <p:attrName>style.visibility</p:attrName>
+                                        </p:attrNameLst>
+                                      </p:cBhvr>
+                                      <p:to>
+                                        <p:strVal val="visible"/>
+                                      </p:to>
+                                    </p:set>
+                                    <p:animEffect transition="in" filter="wipe(left)">
+                                      <p:cBhvr>
+                                        <p:cTn id="6" dur="450"/>
+                                        <p:tgtEl>
+                                          <p:spTgt spid="24"/>
+                                        </p:tgtEl>
+                                      </p:cBhvr>
+                                    </p:animEffect>
+                                  </p:childTnLst>
+                                </p:cTn>
+                              </p:par>
+                              <p:par>
+                                <p:cTn id="11" presetID="53" presetClass="entr" presetSubtype="16" fill="hold" decel="100000" nodeType="withEffect">
+                                  <p:stCondLst>
+                                    <p:cond delay="100"/>
+                                  </p:stCondLst>
+                                  <p:childTnLst>
+                                    <p:set>
+                                      <p:cBhvr>
+                                        <p:cTn id="8" dur="1" fill="hold">
+                                          <p:stCondLst>
+                                            <p:cond delay="0"/>
+                                          </p:stCondLst>
+                                        </p:cTn>
+                                        <p:tgtEl>
+                                          <p:spTgt spid="25"/>
+                                        </p:tgtEl>
+                                        <p:attrNameLst>
+                                          <p:attrName>style.visibility</p:attrName>
+                                        </p:attrNameLst>
+                                      </p:cBhvr>
+                                      <p:to>
+                                        <p:strVal val="visible"/>
+                                      </p:to>
+                                    </p:set>
+                                    <p:animEffect transition="in" filter="fade">
+                                      <p:cBhvr>
+                                        <p:cTn id="9" dur="450"/>
+                                        <p:tgtEl>
+                                          <p:spTgt spid="25"/>
+                                        </p:tgtEl>
+                                      </p:cBhvr>
+                                    </p:animEffect>
+                                    <p:animScale>
+                                      <p:cBhvr>
+                                        <p:cTn id="10" dur="450" fill="hold"/>
+                                        <p:tgtEl>
+                                          <p:spTgt spid="25"/>
+                                        </p:tgtEl>
+                                      </p:cBhvr>
+                                      <p:from x="88000" y="88000"/>
+                                      <p:to x="100000" y="100000"/>
+                                    </p:animScale>
+                                  </p:childTnLst>
+                                </p:cTn>
+                              </p:par>
+                              <p:par>
+                                <p:cTn id="15" presetID="53" presetClass="entr" presetSubtype="16" fill="hold" decel="100000" nodeType="withEffect">
+                                  <p:stCondLst>
+                                    <p:cond delay="200"/>
+                                  </p:stCondLst>
+                                  <p:childTnLst>
+                                    <p:set>
+                                      <p:cBhvr>
+                                        <p:cTn id="12" dur="1" fill="hold">
+                                          <p:stCondLst>
+                                            <p:cond delay="0"/>
+                                          </p:stCondLst>
+                                        </p:cTn>
+                                        <p:tgtEl>
+                                          <p:spTgt spid="26"/>
+                                        </p:tgtEl>
+                                        <p:attrNameLst>
+                                          <p:attrName>style.visibility</p:attrName>
+                                        </p:attrNameLst>
+                                      </p:cBhvr>
+                                      <p:to>
+                                        <p:strVal val="visible"/>
+                                      </p:to>
+                                    </p:set>
+                                    <p:animEffect transition="in" filter="fade">
+                                      <p:cBhvr>
+                                        <p:cTn id="13" dur="450"/>
+                                        <p:tgtEl>
+                                          <p:spTgt spid="26"/>
+                                        </p:tgtEl>
+                                      </p:cBhvr>
+                                    </p:animEffect>
+                                    <p:animScale>
+                                      <p:cBhvr>
+                                        <p:cTn id="14" dur="450" fill="hold"/>
+                                        <p:tgtEl>
+                                          <p:spTgt spid="26"/>
+                                        </p:tgtEl>
+                                      </p:cBhvr>
+                                      <p:from x="88000" y="88000"/>
+                                      <p:to x="100000" y="100000"/>
+                                    </p:animScale>
+                                  </p:childTnLst>
+                                </p:cTn>
+                              </p:par>
+                            </p:childTnLst>
+                          </p:cTn>
+                        </p:par>
+                      </p:childTnLst>
+                    </p:cTn>
+                  </p:par>
+                </p:childTnLst>
+              </p:cTn>
+              <p:prevCondLst>
+                <p:cond evt="onPrev" delay="0">
+                  <p:tgtEl>
+                    <p:sldTgt/>
+                  </p:tgtEl>
+                </p:cond>
+              </p:prevCondLst>
+              <p:nextCondLst>
+                <p:cond evt="onNext" delay="0">
+                  <p:tgtEl>
+                    <p:sldTgt/>
+                  </p:tgtEl>
+                </p:cond>
+              </p:nextCondLst>
+            </p:seq>
+          </p:childTnLst>
+        </p:cTn>
+      </p:par>
+    </p:tnLst>
+  </p:timing>
 </p:sld>
 </file>
 
@@ -3534,7 +4106,7 @@
       </p:grpSpPr>
       <p:pic>
         <p:nvPicPr>
-          <p:cNvPr id="2" name="Image 0" descr="Photograph for a pitch &amp; investors presentation">    </p:cNvPr>
+          <p:cNvPr id="2" name="pt:-bJ66GnRC_2q" descr="Photograph for a pitch &amp; investors presentation">    </p:cNvPr>
           <p:cNvPicPr>
             <a:picLocks noChangeAspect="1"/>
           </p:cNvPicPr>
@@ -3557,7 +4129,7 @@
       </p:pic>
       <p:sp>
         <p:nvSpPr>
-          <p:cNvPr id="3" name="Text 0"/>
+          <p:cNvPr id="3" name="pt:HbmgLz0trrir"/>
           <p:cNvSpPr/>
           <p:nvPr/>
         </p:nvSpPr>
@@ -3599,7 +4171,7 @@
       </p:sp>
       <p:sp>
         <p:nvSpPr>
-          <p:cNvPr id="4" name="Text 1"/>
+          <p:cNvPr id="4" name="pt:gZFuSCFMSash"/>
           <p:cNvSpPr/>
           <p:nvPr/>
         </p:nvSpPr>
@@ -3641,7 +4213,7 @@
       </p:sp>
       <p:sp>
         <p:nvSpPr>
-          <p:cNvPr id="5" name="Text 2"/>
+          <p:cNvPr id="5" name="pt:stj2btUkUxbS"/>
           <p:cNvSpPr/>
           <p:nvPr/>
         </p:nvSpPr>
@@ -3683,7 +4255,7 @@
       </p:sp>
       <p:sp>
         <p:nvSpPr>
-          <p:cNvPr id="6" name="Text 3"/>
+          <p:cNvPr id="6" name="pt:md3Sq5nokl6O"/>
           <p:cNvSpPr/>
           <p:nvPr/>
         </p:nvSpPr>
@@ -3777,6 +4349,230 @@
   <p:clrMapOvr>
     <a:masterClrMapping/>
   </p:clrMapOvr>
+  <p:transition spd="fast">
+    <p:zoom dir="in"/>
+  </p:transition>
+  <p:timing>
+    <p:tnLst>
+      <p:par>
+        <p:cTn id="1" dur="indefinite" restart="never" nodeType="tmRoot">
+          <p:childTnLst>
+            <p:seq concurrent="1" nextAc="seek">
+              <p:cTn id="2" dur="indefinite" nodeType="mainSeq">
+                <p:childTnLst>
+                  <p:par>
+                    <p:cTn id="3" fill="hold">
+                      <p:stCondLst>
+                        <p:cond delay="indefinite"/>
+                        <p:cond evt="onBegin" delay="0">
+                          <p:tn val="2"/>
+                        </p:cond>
+                      </p:stCondLst>
+                      <p:childTnLst>
+                        <p:par>
+                          <p:cTn id="4" fill="hold">
+                            <p:stCondLst>
+                              <p:cond delay="0"/>
+                            </p:stCondLst>
+                            <p:childTnLst>
+                              <p:par>
+                                <p:cTn id="8" presetID="53" presetClass="entr" presetSubtype="16" fill="hold" decel="100000" nodeType="afterEffect">
+                                  <p:stCondLst>
+                                    <p:cond delay="0"/>
+                                  </p:stCondLst>
+                                  <p:childTnLst>
+                                    <p:set>
+                                      <p:cBhvr>
+                                        <p:cTn id="5" dur="1" fill="hold">
+                                          <p:stCondLst>
+                                            <p:cond delay="0"/>
+                                          </p:stCondLst>
+                                        </p:cTn>
+                                        <p:tgtEl>
+                                          <p:spTgt spid="3"/>
+                                        </p:tgtEl>
+                                        <p:attrNameLst>
+                                          <p:attrName>style.visibility</p:attrName>
+                                        </p:attrNameLst>
+                                      </p:cBhvr>
+                                      <p:to>
+                                        <p:strVal val="visible"/>
+                                      </p:to>
+                                    </p:set>
+                                    <p:animEffect transition="in" filter="fade">
+                                      <p:cBhvr>
+                                        <p:cTn id="6" dur="450"/>
+                                        <p:tgtEl>
+                                          <p:spTgt spid="3"/>
+                                        </p:tgtEl>
+                                      </p:cBhvr>
+                                    </p:animEffect>
+                                    <p:animScale>
+                                      <p:cBhvr>
+                                        <p:cTn id="7" dur="450" fill="hold"/>
+                                        <p:tgtEl>
+                                          <p:spTgt spid="3"/>
+                                        </p:tgtEl>
+                                      </p:cBhvr>
+                                      <p:from x="88000" y="88000"/>
+                                      <p:to x="100000" y="100000"/>
+                                    </p:animScale>
+                                  </p:childTnLst>
+                                </p:cTn>
+                              </p:par>
+                              <p:par>
+                                <p:cTn id="11" presetID="10" presetClass="entr" presetSubtype="0" fill="hold" decel="100000" nodeType="withEffect">
+                                  <p:stCondLst>
+                                    <p:cond delay="100"/>
+                                  </p:stCondLst>
+                                  <p:childTnLst>
+                                    <p:set>
+                                      <p:cBhvr>
+                                        <p:cTn id="9" dur="1" fill="hold">
+                                          <p:stCondLst>
+                                            <p:cond delay="0"/>
+                                          </p:stCondLst>
+                                        </p:cTn>
+                                        <p:tgtEl>
+                                          <p:spTgt spid="4"/>
+                                        </p:tgtEl>
+                                        <p:attrNameLst>
+                                          <p:attrName>style.visibility</p:attrName>
+                                        </p:attrNameLst>
+                                      </p:cBhvr>
+                                      <p:to>
+                                        <p:strVal val="visible"/>
+                                      </p:to>
+                                    </p:set>
+                                    <p:animEffect transition="in" filter="fade">
+                                      <p:cBhvr>
+                                        <p:cTn id="10" dur="450"/>
+                                        <p:tgtEl>
+                                          <p:spTgt spid="4"/>
+                                        </p:tgtEl>
+                                      </p:cBhvr>
+                                    </p:animEffect>
+                                  </p:childTnLst>
+                                </p:cTn>
+                              </p:par>
+                              <p:par>
+                                <p:cTn id="15" presetID="53" presetClass="entr" presetSubtype="16" fill="hold" decel="100000" nodeType="withEffect">
+                                  <p:stCondLst>
+                                    <p:cond delay="200"/>
+                                  </p:stCondLst>
+                                  <p:childTnLst>
+                                    <p:set>
+                                      <p:cBhvr>
+                                        <p:cTn id="12" dur="1" fill="hold">
+                                          <p:stCondLst>
+                                            <p:cond delay="0"/>
+                                          </p:stCondLst>
+                                        </p:cTn>
+                                        <p:tgtEl>
+                                          <p:spTgt spid="5"/>
+                                        </p:tgtEl>
+                                        <p:attrNameLst>
+                                          <p:attrName>style.visibility</p:attrName>
+                                        </p:attrNameLst>
+                                      </p:cBhvr>
+                                      <p:to>
+                                        <p:strVal val="visible"/>
+                                      </p:to>
+                                    </p:set>
+                                    <p:animEffect transition="in" filter="fade">
+                                      <p:cBhvr>
+                                        <p:cTn id="13" dur="450"/>
+                                        <p:tgtEl>
+                                          <p:spTgt spid="5"/>
+                                        </p:tgtEl>
+                                      </p:cBhvr>
+                                    </p:animEffect>
+                                    <p:animScale>
+                                      <p:cBhvr>
+                                        <p:cTn id="14" dur="450" fill="hold"/>
+                                        <p:tgtEl>
+                                          <p:spTgt spid="5"/>
+                                        </p:tgtEl>
+                                      </p:cBhvr>
+                                      <p:from x="88000" y="88000"/>
+                                      <p:to x="100000" y="100000"/>
+                                    </p:animScale>
+                                  </p:childTnLst>
+                                </p:cTn>
+                              </p:par>
+                              <p:par>
+                                <p:cTn id="19" presetID="53" presetClass="entr" presetSubtype="16" fill="hold" decel="100000" nodeType="withEffect">
+                                  <p:stCondLst>
+                                    <p:cond delay="300"/>
+                                  </p:stCondLst>
+                                  <p:childTnLst>
+                                    <p:set>
+                                      <p:cBhvr>
+                                        <p:cTn id="16" dur="1" fill="hold">
+                                          <p:stCondLst>
+                                            <p:cond delay="0"/>
+                                          </p:stCondLst>
+                                        </p:cTn>
+                                        <p:tgtEl>
+                                          <p:spTgt spid="6"/>
+                                        </p:tgtEl>
+                                        <p:attrNameLst>
+                                          <p:attrName>style.visibility</p:attrName>
+                                        </p:attrNameLst>
+                                      </p:cBhvr>
+                                      <p:to>
+                                        <p:strVal val="visible"/>
+                                      </p:to>
+                                    </p:set>
+                                    <p:animEffect transition="in" filter="fade">
+                                      <p:cBhvr>
+                                        <p:cTn id="17" dur="450"/>
+                                        <p:tgtEl>
+                                          <p:spTgt spid="6"/>
+                                        </p:tgtEl>
+                                      </p:cBhvr>
+                                    </p:animEffect>
+                                    <p:animScale>
+                                      <p:cBhvr>
+                                        <p:cTn id="18" dur="450" fill="hold"/>
+                                        <p:tgtEl>
+                                          <p:spTgt spid="6"/>
+                                        </p:tgtEl>
+                                      </p:cBhvr>
+                                      <p:from x="88000" y="88000"/>
+                                      <p:to x="100000" y="100000"/>
+                                    </p:animScale>
+                                  </p:childTnLst>
+                                </p:cTn>
+                              </p:par>
+                            </p:childTnLst>
+                          </p:cTn>
+                        </p:par>
+                      </p:childTnLst>
+                    </p:cTn>
+                  </p:par>
+                </p:childTnLst>
+              </p:cTn>
+              <p:prevCondLst>
+                <p:cond evt="onPrev" delay="0">
+                  <p:tgtEl>
+                    <p:sldTgt/>
+                  </p:tgtEl>
+                </p:cond>
+              </p:prevCondLst>
+              <p:nextCondLst>
+                <p:cond evt="onNext" delay="0">
+                  <p:tgtEl>
+                    <p:sldTgt/>
+                  </p:tgtEl>
+                </p:cond>
+              </p:nextCondLst>
+            </p:seq>
+          </p:childTnLst>
+        </p:cTn>
+      </p:par>
+    </p:tnLst>
+  </p:timing>
 </p:sld>
 </file>
 
@@ -3806,7 +4602,7 @@
       </p:grpSpPr>
       <p:sp>
         <p:nvSpPr>
-          <p:cNvPr id="2" name="Shape 0"/>
+          <p:cNvPr id="2" name="pt:SW1BRNzkWMEB"/>
           <p:cNvSpPr/>
           <p:nvPr/>
         </p:nvSpPr>
@@ -3826,7 +4622,7 @@
       </p:sp>
       <p:sp>
         <p:nvSpPr>
-          <p:cNvPr id="3" name="Text 1"/>
+          <p:cNvPr id="3" name="pt:3pK_fdqdVYmJ"/>
           <p:cNvSpPr/>
           <p:nvPr/>
         </p:nvSpPr>
@@ -3868,7 +4664,7 @@
       </p:sp>
       <p:sp>
         <p:nvSpPr>
-          <p:cNvPr id="4" name="Text 2"/>
+          <p:cNvPr id="4" name="pt:dlgLV7eMYSpi"/>
           <p:cNvSpPr/>
           <p:nvPr/>
         </p:nvSpPr>
@@ -3959,7 +4755,7 @@
       </p:sp>
       <p:pic>
         <p:nvPicPr>
-          <p:cNvPr id="5" name="Image 0" descr="Delivery van in a city">    </p:cNvPr>
+          <p:cNvPr id="5" name="pt:2-XdjOHA1Ngc" descr="Delivery van in a city">    </p:cNvPr>
           <p:cNvPicPr>
             <a:picLocks noChangeAspect="1"/>
           </p:cNvPicPr>
@@ -3985,6 +4781,279 @@
   <p:clrMapOvr>
     <a:masterClrMapping/>
   </p:clrMapOvr>
+  <p:transition spd="fast">
+    <p:zoom dir="in"/>
+  </p:transition>
+  <p:timing>
+    <p:tnLst>
+      <p:par>
+        <p:cTn id="1" dur="indefinite" restart="never" nodeType="tmRoot">
+          <p:childTnLst>
+            <p:seq concurrent="1" nextAc="seek">
+              <p:cTn id="2" dur="indefinite" nodeType="mainSeq">
+                <p:childTnLst>
+                  <p:par>
+                    <p:cTn id="3" fill="hold">
+                      <p:stCondLst>
+                        <p:cond delay="indefinite"/>
+                        <p:cond evt="onBegin" delay="0">
+                          <p:tn val="2"/>
+                        </p:cond>
+                      </p:stCondLst>
+                      <p:childTnLst>
+                        <p:par>
+                          <p:cTn id="4" fill="hold">
+                            <p:stCondLst>
+                              <p:cond delay="0"/>
+                            </p:stCondLst>
+                            <p:childTnLst>
+                              <p:par>
+                                <p:cTn id="8" presetID="53" presetClass="entr" presetSubtype="16" fill="hold" decel="100000" nodeType="afterEffect">
+                                  <p:stCondLst>
+                                    <p:cond delay="0"/>
+                                  </p:stCondLst>
+                                  <p:childTnLst>
+                                    <p:set>
+                                      <p:cBhvr>
+                                        <p:cTn id="5" dur="1" fill="hold">
+                                          <p:stCondLst>
+                                            <p:cond delay="0"/>
+                                          </p:stCondLst>
+                                        </p:cTn>
+                                        <p:tgtEl>
+                                          <p:spTgt spid="3"/>
+                                        </p:tgtEl>
+                                        <p:attrNameLst>
+                                          <p:attrName>style.visibility</p:attrName>
+                                        </p:attrNameLst>
+                                      </p:cBhvr>
+                                      <p:to>
+                                        <p:strVal val="visible"/>
+                                      </p:to>
+                                    </p:set>
+                                    <p:animEffect transition="in" filter="fade">
+                                      <p:cBhvr>
+                                        <p:cTn id="6" dur="450"/>
+                                        <p:tgtEl>
+                                          <p:spTgt spid="3"/>
+                                        </p:tgtEl>
+                                      </p:cBhvr>
+                                    </p:animEffect>
+                                    <p:animScale>
+                                      <p:cBhvr>
+                                        <p:cTn id="7" dur="450" fill="hold"/>
+                                        <p:tgtEl>
+                                          <p:spTgt spid="3"/>
+                                        </p:tgtEl>
+                                      </p:cBhvr>
+                                      <p:from x="88000" y="88000"/>
+                                      <p:to x="100000" y="100000"/>
+                                    </p:animScale>
+                                  </p:childTnLst>
+                                </p:cTn>
+                              </p:par>
+                              <p:par>
+                                <p:cTn id="12" presetID="53" presetClass="entr" presetSubtype="16" fill="hold" decel="100000" grpId="0" nodeType="withEffect">
+                                  <p:stCondLst>
+                                    <p:cond delay="100"/>
+                                  </p:stCondLst>
+                                  <p:childTnLst>
+                                    <p:set>
+                                      <p:cBhvr>
+                                        <p:cTn id="9" dur="1" fill="hold">
+                                          <p:stCondLst>
+                                            <p:cond delay="0"/>
+                                          </p:stCondLst>
+                                        </p:cTn>
+                                        <p:tgtEl>
+                                          <p:spTgt spid="4">
+                                            <p:txEl>
+                                              <p:pRg st="0" end="0"/>
+                                            </p:txEl>
+                                          </p:spTgt>
+                                        </p:tgtEl>
+                                        <p:attrNameLst>
+                                          <p:attrName>style.visibility</p:attrName>
+                                        </p:attrNameLst>
+                                      </p:cBhvr>
+                                      <p:to>
+                                        <p:strVal val="visible"/>
+                                      </p:to>
+                                    </p:set>
+                                    <p:animEffect transition="in" filter="fade">
+                                      <p:cBhvr>
+                                        <p:cTn id="10" dur="450"/>
+                                        <p:tgtEl>
+                                          <p:spTgt spid="4">
+                                            <p:txEl>
+                                              <p:pRg st="0" end="0"/>
+                                            </p:txEl>
+                                          </p:spTgt>
+                                        </p:tgtEl>
+                                      </p:cBhvr>
+                                    </p:animEffect>
+                                    <p:animScale>
+                                      <p:cBhvr>
+                                        <p:cTn id="11" dur="450" fill="hold"/>
+                                        <p:tgtEl>
+                                          <p:spTgt spid="4">
+                                            <p:txEl>
+                                              <p:pRg st="0" end="0"/>
+                                            </p:txEl>
+                                          </p:spTgt>
+                                        </p:tgtEl>
+                                      </p:cBhvr>
+                                      <p:from x="88000" y="88000"/>
+                                      <p:to x="100000" y="100000"/>
+                                    </p:animScale>
+                                  </p:childTnLst>
+                                </p:cTn>
+                              </p:par>
+                              <p:par>
+                                <p:cTn id="16" presetID="53" presetClass="entr" presetSubtype="16" fill="hold" decel="100000" grpId="0" nodeType="withEffect">
+                                  <p:stCondLst>
+                                    <p:cond delay="180"/>
+                                  </p:stCondLst>
+                                  <p:childTnLst>
+                                    <p:set>
+                                      <p:cBhvr>
+                                        <p:cTn id="13" dur="1" fill="hold">
+                                          <p:stCondLst>
+                                            <p:cond delay="0"/>
+                                          </p:stCondLst>
+                                        </p:cTn>
+                                        <p:tgtEl>
+                                          <p:spTgt spid="4">
+                                            <p:txEl>
+                                              <p:pRg st="1" end="1"/>
+                                            </p:txEl>
+                                          </p:spTgt>
+                                        </p:tgtEl>
+                                        <p:attrNameLst>
+                                          <p:attrName>style.visibility</p:attrName>
+                                        </p:attrNameLst>
+                                      </p:cBhvr>
+                                      <p:to>
+                                        <p:strVal val="visible"/>
+                                      </p:to>
+                                    </p:set>
+                                    <p:animEffect transition="in" filter="fade">
+                                      <p:cBhvr>
+                                        <p:cTn id="14" dur="450"/>
+                                        <p:tgtEl>
+                                          <p:spTgt spid="4">
+                                            <p:txEl>
+                                              <p:pRg st="1" end="1"/>
+                                            </p:txEl>
+                                          </p:spTgt>
+                                        </p:tgtEl>
+                                      </p:cBhvr>
+                                    </p:animEffect>
+                                    <p:animScale>
+                                      <p:cBhvr>
+                                        <p:cTn id="15" dur="450" fill="hold"/>
+                                        <p:tgtEl>
+                                          <p:spTgt spid="4">
+                                            <p:txEl>
+                                              <p:pRg st="1" end="1"/>
+                                            </p:txEl>
+                                          </p:spTgt>
+                                        </p:tgtEl>
+                                      </p:cBhvr>
+                                      <p:from x="88000" y="88000"/>
+                                      <p:to x="100000" y="100000"/>
+                                    </p:animScale>
+                                  </p:childTnLst>
+                                </p:cTn>
+                              </p:par>
+                              <p:par>
+                                <p:cTn id="20" presetID="53" presetClass="entr" presetSubtype="16" fill="hold" decel="100000" grpId="0" nodeType="withEffect">
+                                  <p:stCondLst>
+                                    <p:cond delay="260"/>
+                                  </p:stCondLst>
+                                  <p:childTnLst>
+                                    <p:set>
+                                      <p:cBhvr>
+                                        <p:cTn id="17" dur="1" fill="hold">
+                                          <p:stCondLst>
+                                            <p:cond delay="0"/>
+                                          </p:stCondLst>
+                                        </p:cTn>
+                                        <p:tgtEl>
+                                          <p:spTgt spid="4">
+                                            <p:txEl>
+                                              <p:pRg st="2" end="2"/>
+                                            </p:txEl>
+                                          </p:spTgt>
+                                        </p:tgtEl>
+                                        <p:attrNameLst>
+                                          <p:attrName>style.visibility</p:attrName>
+                                        </p:attrNameLst>
+                                      </p:cBhvr>
+                                      <p:to>
+                                        <p:strVal val="visible"/>
+                                      </p:to>
+                                    </p:set>
+                                    <p:animEffect transition="in" filter="fade">
+                                      <p:cBhvr>
+                                        <p:cTn id="18" dur="450"/>
+                                        <p:tgtEl>
+                                          <p:spTgt spid="4">
+                                            <p:txEl>
+                                              <p:pRg st="2" end="2"/>
+                                            </p:txEl>
+                                          </p:spTgt>
+                                        </p:tgtEl>
+                                      </p:cBhvr>
+                                    </p:animEffect>
+                                    <p:animScale>
+                                      <p:cBhvr>
+                                        <p:cTn id="19" dur="450" fill="hold"/>
+                                        <p:tgtEl>
+                                          <p:spTgt spid="4">
+                                            <p:txEl>
+                                              <p:pRg st="2" end="2"/>
+                                            </p:txEl>
+                                          </p:spTgt>
+                                        </p:tgtEl>
+                                      </p:cBhvr>
+                                      <p:from x="88000" y="88000"/>
+                                      <p:to x="100000" y="100000"/>
+                                    </p:animScale>
+                                  </p:childTnLst>
+                                </p:cTn>
+                              </p:par>
+                            </p:childTnLst>
+                          </p:cTn>
+                        </p:par>
+                      </p:childTnLst>
+                    </p:cTn>
+                  </p:par>
+                </p:childTnLst>
+              </p:cTn>
+              <p:prevCondLst>
+                <p:cond evt="onPrev" delay="0">
+                  <p:tgtEl>
+                    <p:sldTgt/>
+                  </p:tgtEl>
+                </p:cond>
+              </p:prevCondLst>
+              <p:nextCondLst>
+                <p:cond evt="onNext" delay="0">
+                  <p:tgtEl>
+                    <p:sldTgt/>
+                  </p:tgtEl>
+                </p:cond>
+              </p:nextCondLst>
+            </p:seq>
+          </p:childTnLst>
+        </p:cTn>
+      </p:par>
+    </p:tnLst>
+    <p:bldLst>
+      <p:bldP spid="4" grpId="0" build="p"/>
+    </p:bldLst>
+  </p:timing>
 </p:sld>
 </file>
 
@@ -4014,7 +5083,7 @@
       </p:grpSpPr>
       <p:sp>
         <p:nvSpPr>
-          <p:cNvPr id="2" name="Shape 0"/>
+          <p:cNvPr id="2" name="pt:Kltbb4SqTDNl"/>
           <p:cNvSpPr/>
           <p:nvPr/>
         </p:nvSpPr>
@@ -4034,7 +5103,7 @@
       </p:sp>
       <p:sp>
         <p:nvSpPr>
-          <p:cNvPr id="3" name="Text 1"/>
+          <p:cNvPr id="3" name="pt:Iz36X-v_-cBR"/>
           <p:cNvSpPr/>
           <p:nvPr/>
         </p:nvSpPr>
@@ -4093,7 +5162,7 @@
       </p:sp>
       <p:graphicFrame>
         <p:nvGraphicFramePr>
-          <p:cNvPr id="4" name="Chart 0" descr=""/>
+          <p:cNvPr id="4" name="pt:UKcbLcqodpHV" descr=""/>
           <p:cNvGraphicFramePr/>
           <p:nvPr/>
         </p:nvGraphicFramePr>
@@ -4109,7 +5178,7 @@
       </p:graphicFrame>
       <p:sp>
         <p:nvSpPr>
-          <p:cNvPr id="5" name="Shape 2"/>
+          <p:cNvPr id="5" name="pt:3MGoSSDXsKbU"/>
           <p:cNvSpPr/>
           <p:nvPr/>
         </p:nvSpPr>
@@ -4133,7 +5202,7 @@
       </p:sp>
       <p:sp>
         <p:nvSpPr>
-          <p:cNvPr id="6" name="Shape 3"/>
+          <p:cNvPr id="6" name="pt:Spf59N6asWVy"/>
           <p:cNvSpPr/>
           <p:nvPr/>
         </p:nvSpPr>
@@ -4160,7 +5229,7 @@
       </p:sp>
       <p:sp>
         <p:nvSpPr>
-          <p:cNvPr id="7" name="Text 4"/>
+          <p:cNvPr id="7" name="pt:a38KqGk-j4Jo"/>
           <p:cNvSpPr/>
           <p:nvPr/>
         </p:nvSpPr>
@@ -4205,6 +5274,240 @@
   <p:clrMapOvr>
     <a:masterClrMapping/>
   </p:clrMapOvr>
+  <p:transition spd="fast">
+    <p:zoom dir="in"/>
+  </p:transition>
+  <p:timing>
+    <p:tnLst>
+      <p:par>
+        <p:cTn id="1" dur="indefinite" restart="never" nodeType="tmRoot">
+          <p:childTnLst>
+            <p:seq concurrent="1" nextAc="seek">
+              <p:cTn id="2" dur="indefinite" nodeType="mainSeq">
+                <p:childTnLst>
+                  <p:par>
+                    <p:cTn id="3" fill="hold">
+                      <p:stCondLst>
+                        <p:cond delay="indefinite"/>
+                        <p:cond evt="onBegin" delay="0">
+                          <p:tn val="2"/>
+                        </p:cond>
+                      </p:stCondLst>
+                      <p:childTnLst>
+                        <p:par>
+                          <p:cTn id="4" fill="hold">
+                            <p:stCondLst>
+                              <p:cond delay="0"/>
+                            </p:stCondLst>
+                            <p:childTnLst>
+                              <p:par>
+                                <p:cTn id="8" presetID="53" presetClass="entr" presetSubtype="16" fill="hold" decel="100000" nodeType="afterEffect">
+                                  <p:stCondLst>
+                                    <p:cond delay="0"/>
+                                  </p:stCondLst>
+                                  <p:childTnLst>
+                                    <p:set>
+                                      <p:cBhvr>
+                                        <p:cTn id="5" dur="1" fill="hold">
+                                          <p:stCondLst>
+                                            <p:cond delay="0"/>
+                                          </p:stCondLst>
+                                        </p:cTn>
+                                        <p:tgtEl>
+                                          <p:spTgt spid="3"/>
+                                        </p:tgtEl>
+                                        <p:attrNameLst>
+                                          <p:attrName>style.visibility</p:attrName>
+                                        </p:attrNameLst>
+                                      </p:cBhvr>
+                                      <p:to>
+                                        <p:strVal val="visible"/>
+                                      </p:to>
+                                    </p:set>
+                                    <p:animEffect transition="in" filter="fade">
+                                      <p:cBhvr>
+                                        <p:cTn id="6" dur="450"/>
+                                        <p:tgtEl>
+                                          <p:spTgt spid="3"/>
+                                        </p:tgtEl>
+                                      </p:cBhvr>
+                                    </p:animEffect>
+                                    <p:animScale>
+                                      <p:cBhvr>
+                                        <p:cTn id="7" dur="450" fill="hold"/>
+                                        <p:tgtEl>
+                                          <p:spTgt spid="3"/>
+                                        </p:tgtEl>
+                                      </p:cBhvr>
+                                      <p:from x="88000" y="88000"/>
+                                      <p:to x="100000" y="100000"/>
+                                    </p:animScale>
+                                  </p:childTnLst>
+                                </p:cTn>
+                              </p:par>
+                              <p:par>
+                                <p:cTn id="12" presetID="53" presetClass="entr" presetSubtype="16" fill="hold" decel="100000" nodeType="withEffect">
+                                  <p:stCondLst>
+                                    <p:cond delay="100"/>
+                                  </p:stCondLst>
+                                  <p:childTnLst>
+                                    <p:set>
+                                      <p:cBhvr>
+                                        <p:cTn id="9" dur="1" fill="hold">
+                                          <p:stCondLst>
+                                            <p:cond delay="0"/>
+                                          </p:stCondLst>
+                                        </p:cTn>
+                                        <p:tgtEl>
+                                          <p:spTgt spid="4"/>
+                                        </p:tgtEl>
+                                        <p:attrNameLst>
+                                          <p:attrName>style.visibility</p:attrName>
+                                        </p:attrNameLst>
+                                      </p:cBhvr>
+                                      <p:to>
+                                        <p:strVal val="visible"/>
+                                      </p:to>
+                                    </p:set>
+                                    <p:animEffect transition="in" filter="fade">
+                                      <p:cBhvr>
+                                        <p:cTn id="10" dur="450"/>
+                                        <p:tgtEl>
+                                          <p:spTgt spid="4"/>
+                                        </p:tgtEl>
+                                      </p:cBhvr>
+                                    </p:animEffect>
+                                    <p:animScale>
+                                      <p:cBhvr>
+                                        <p:cTn id="11" dur="450" fill="hold"/>
+                                        <p:tgtEl>
+                                          <p:spTgt spid="4"/>
+                                        </p:tgtEl>
+                                      </p:cBhvr>
+                                      <p:from x="88000" y="88000"/>
+                                      <p:to x="100000" y="100000"/>
+                                    </p:animScale>
+                                  </p:childTnLst>
+                                </p:cTn>
+                              </p:par>
+                              <p:par>
+                                <p:cTn id="16" presetID="53" presetClass="entr" presetSubtype="16" fill="hold" decel="100000" nodeType="withEffect">
+                                  <p:stCondLst>
+                                    <p:cond delay="200"/>
+                                  </p:stCondLst>
+                                  <p:childTnLst>
+                                    <p:set>
+                                      <p:cBhvr>
+                                        <p:cTn id="13" dur="1" fill="hold">
+                                          <p:stCondLst>
+                                            <p:cond delay="0"/>
+                                          </p:stCondLst>
+                                        </p:cTn>
+                                        <p:tgtEl>
+                                          <p:spTgt spid="6"/>
+                                        </p:tgtEl>
+                                        <p:attrNameLst>
+                                          <p:attrName>style.visibility</p:attrName>
+                                        </p:attrNameLst>
+                                      </p:cBhvr>
+                                      <p:to>
+                                        <p:strVal val="visible"/>
+                                      </p:to>
+                                    </p:set>
+                                    <p:animEffect transition="in" filter="fade">
+                                      <p:cBhvr>
+                                        <p:cTn id="14" dur="450"/>
+                                        <p:tgtEl>
+                                          <p:spTgt spid="6"/>
+                                        </p:tgtEl>
+                                      </p:cBhvr>
+                                    </p:animEffect>
+                                    <p:animScale>
+                                      <p:cBhvr>
+                                        <p:cTn id="15" dur="450" fill="hold"/>
+                                        <p:tgtEl>
+                                          <p:spTgt spid="6"/>
+                                        </p:tgtEl>
+                                      </p:cBhvr>
+                                      <p:from x="88000" y="88000"/>
+                                      <p:to x="100000" y="100000"/>
+                                    </p:animScale>
+                                  </p:childTnLst>
+                                </p:cTn>
+                              </p:par>
+                              <p:par>
+                                <p:cTn id="20" presetID="53" presetClass="entr" presetSubtype="16" fill="hold" decel="100000" nodeType="withEffect">
+                                  <p:stCondLst>
+                                    <p:cond delay="300"/>
+                                  </p:stCondLst>
+                                  <p:childTnLst>
+                                    <p:set>
+                                      <p:cBhvr>
+                                        <p:cTn id="17" dur="1" fill="hold">
+                                          <p:stCondLst>
+                                            <p:cond delay="0"/>
+                                          </p:stCondLst>
+                                        </p:cTn>
+                                        <p:tgtEl>
+                                          <p:spTgt spid="7"/>
+                                        </p:tgtEl>
+                                        <p:attrNameLst>
+                                          <p:attrName>style.visibility</p:attrName>
+                                        </p:attrNameLst>
+                                      </p:cBhvr>
+                                      <p:to>
+                                        <p:strVal val="visible"/>
+                                      </p:to>
+                                    </p:set>
+                                    <p:animEffect transition="in" filter="fade">
+                                      <p:cBhvr>
+                                        <p:cTn id="18" dur="450"/>
+                                        <p:tgtEl>
+                                          <p:spTgt spid="7"/>
+                                        </p:tgtEl>
+                                      </p:cBhvr>
+                                    </p:animEffect>
+                                    <p:animScale>
+                                      <p:cBhvr>
+                                        <p:cTn id="19" dur="450" fill="hold"/>
+                                        <p:tgtEl>
+                                          <p:spTgt spid="7"/>
+                                        </p:tgtEl>
+                                      </p:cBhvr>
+                                      <p:from x="88000" y="88000"/>
+                                      <p:to x="100000" y="100000"/>
+                                    </p:animScale>
+                                  </p:childTnLst>
+                                </p:cTn>
+                              </p:par>
+                            </p:childTnLst>
+                          </p:cTn>
+                        </p:par>
+                      </p:childTnLst>
+                    </p:cTn>
+                  </p:par>
+                </p:childTnLst>
+              </p:cTn>
+              <p:prevCondLst>
+                <p:cond evt="onPrev" delay="0">
+                  <p:tgtEl>
+                    <p:sldTgt/>
+                  </p:tgtEl>
+                </p:cond>
+              </p:prevCondLst>
+              <p:nextCondLst>
+                <p:cond evt="onNext" delay="0">
+                  <p:tgtEl>
+                    <p:sldTgt/>
+                  </p:tgtEl>
+                </p:cond>
+              </p:nextCondLst>
+            </p:seq>
+          </p:childTnLst>
+        </p:cTn>
+      </p:par>
+    </p:tnLst>
+  </p:timing>
 </p:sld>
 </file>
 
@@ -4234,7 +5537,7 @@
       </p:grpSpPr>
       <p:sp>
         <p:nvSpPr>
-          <p:cNvPr id="2" name="Shape 0"/>
+          <p:cNvPr id="2" name="pt:Zf0tvskkTYv_"/>
           <p:cNvSpPr/>
           <p:nvPr/>
         </p:nvSpPr>
@@ -4254,7 +5557,7 @@
       </p:sp>
       <p:sp>
         <p:nvSpPr>
-          <p:cNvPr id="3" name="Text 1"/>
+          <p:cNvPr id="3" name="pt:xkvHRaFxVlx2"/>
           <p:cNvSpPr/>
           <p:nvPr/>
         </p:nvSpPr>
@@ -4313,7 +5616,7 @@
       </p:sp>
       <p:sp>
         <p:nvSpPr>
-          <p:cNvPr id="4" name="Shape 2"/>
+          <p:cNvPr id="4" name="pt:aw0RwQpyMvGv"/>
           <p:cNvSpPr/>
           <p:nvPr/>
         </p:nvSpPr>
@@ -4326,14 +5629,14 @@
             <a:avLst/>
           </a:prstGeom>
           <a:solidFill>
-            <a:srgbClr val="7474F3"/>
+            <a:srgbClr val="404087"/>
           </a:solidFill>
           <a:ln/>
         </p:spPr>
       </p:sp>
       <p:sp>
         <p:nvSpPr>
-          <p:cNvPr id="5" name="Shape 3"/>
+          <p:cNvPr id="5" name="pt:oCOLilloRCZ5"/>
           <p:cNvSpPr/>
           <p:nvPr/>
         </p:nvSpPr>
@@ -4346,14 +5649,14 @@
             <a:avLst/>
           </a:prstGeom>
           <a:solidFill>
-            <a:srgbClr val="6767D9"/>
+            <a:srgbClr val="3A3A7A"/>
           </a:solidFill>
           <a:ln/>
         </p:spPr>
       </p:sp>
       <p:sp>
         <p:nvSpPr>
-          <p:cNvPr id="6" name="Shape 4"/>
+          <p:cNvPr id="6" name="pt:XyR66U7zZ8RB"/>
           <p:cNvSpPr/>
           <p:nvPr/>
         </p:nvSpPr>
@@ -4366,14 +5669,14 @@
             <a:avLst/>
           </a:prstGeom>
           <a:solidFill>
-            <a:srgbClr val="5555B2"/>
+            <a:srgbClr val="303067"/>
           </a:solidFill>
           <a:ln/>
         </p:spPr>
       </p:sp>
       <p:sp>
         <p:nvSpPr>
-          <p:cNvPr id="7" name="Shape 5"/>
+          <p:cNvPr id="7" name="pt:DlwIxX7Q137N"/>
           <p:cNvSpPr/>
           <p:nvPr/>
         </p:nvSpPr>
@@ -4393,7 +5696,7 @@
       </p:sp>
       <p:sp>
         <p:nvSpPr>
-          <p:cNvPr id="8" name="Text 6"/>
+          <p:cNvPr id="8" name="pt:x9-zE-JiIPQ6"/>
           <p:cNvSpPr/>
           <p:nvPr/>
         </p:nvSpPr>
@@ -4435,7 +5738,7 @@
       </p:sp>
       <p:sp>
         <p:nvSpPr>
-          <p:cNvPr id="9" name="Text 7"/>
+          <p:cNvPr id="9" name="pt:aJ3ptBgaww0R"/>
           <p:cNvSpPr/>
           <p:nvPr/>
         </p:nvSpPr>
@@ -4477,7 +5780,7 @@
       </p:sp>
       <p:sp>
         <p:nvSpPr>
-          <p:cNvPr id="10" name="Shape 8"/>
+          <p:cNvPr id="10" name="pt:7m_h90KBVUmH"/>
           <p:cNvSpPr/>
           <p:nvPr/>
         </p:nvSpPr>
@@ -4490,14 +5793,14 @@
             <a:avLst/>
           </a:prstGeom>
           <a:solidFill>
-            <a:srgbClr val="5994F1"/>
+            <a:srgbClr val="5151AB"/>
           </a:solidFill>
           <a:ln/>
         </p:spPr>
       </p:sp>
       <p:sp>
         <p:nvSpPr>
-          <p:cNvPr id="11" name="Shape 9"/>
+          <p:cNvPr id="11" name="pt:EFcoPy_ak_in"/>
           <p:cNvSpPr/>
           <p:nvPr/>
         </p:nvSpPr>
@@ -4510,14 +5813,14 @@
             <a:avLst/>
           </a:prstGeom>
           <a:solidFill>
-            <a:srgbClr val="5084D7"/>
+            <a:srgbClr val="49499A"/>
           </a:solidFill>
           <a:ln/>
         </p:spPr>
       </p:sp>
       <p:sp>
         <p:nvSpPr>
-          <p:cNvPr id="12" name="Shape 10"/>
+          <p:cNvPr id="12" name="pt:ofX7rQ5wz9nx"/>
           <p:cNvSpPr/>
           <p:nvPr/>
         </p:nvSpPr>
@@ -4530,14 +5833,14 @@
             <a:avLst/>
           </a:prstGeom>
           <a:solidFill>
-            <a:srgbClr val="426BB1"/>
+            <a:srgbClr val="3C3C80"/>
           </a:solidFill>
           <a:ln/>
         </p:spPr>
       </p:sp>
       <p:sp>
         <p:nvSpPr>
-          <p:cNvPr id="13" name="Shape 11"/>
+          <p:cNvPr id="13" name="pt:jT8BIXnVh6eG"/>
           <p:cNvSpPr/>
           <p:nvPr/>
         </p:nvSpPr>
@@ -4557,7 +5860,7 @@
       </p:sp>
       <p:sp>
         <p:nvSpPr>
-          <p:cNvPr id="14" name="Text 12"/>
+          <p:cNvPr id="14" name="pt:7JLM4qFbGbRv"/>
           <p:cNvSpPr/>
           <p:nvPr/>
         </p:nvSpPr>
@@ -4599,7 +5902,7 @@
       </p:sp>
       <p:sp>
         <p:nvSpPr>
-          <p:cNvPr id="15" name="Text 13"/>
+          <p:cNvPr id="15" name="pt:lPsbH--lAsHU"/>
           <p:cNvSpPr/>
           <p:nvPr/>
         </p:nvSpPr>
@@ -4641,7 +5944,7 @@
       </p:sp>
       <p:sp>
         <p:nvSpPr>
-          <p:cNvPr id="16" name="Shape 14"/>
+          <p:cNvPr id="16" name="pt:Wu7Om2FhnsKZ"/>
           <p:cNvSpPr/>
           <p:nvPr/>
         </p:nvSpPr>
@@ -4654,14 +5957,14 @@
             <a:avLst/>
           </a:prstGeom>
           <a:solidFill>
-            <a:srgbClr val="3DB3F0"/>
+            <a:srgbClr val="6363CF"/>
           </a:solidFill>
           <a:ln/>
         </p:spPr>
       </p:sp>
       <p:sp>
         <p:nvSpPr>
-          <p:cNvPr id="17" name="Shape 15"/>
+          <p:cNvPr id="17" name="pt:Bd_xqn7QyJkw"/>
           <p:cNvSpPr/>
           <p:nvPr/>
         </p:nvSpPr>
@@ -4674,14 +5977,14 @@
             <a:avLst/>
           </a:prstGeom>
           <a:solidFill>
-            <a:srgbClr val="379FD6"/>
+            <a:srgbClr val="5858B9"/>
           </a:solidFill>
           <a:ln/>
         </p:spPr>
       </p:sp>
       <p:sp>
         <p:nvSpPr>
-          <p:cNvPr id="18" name="Shape 16"/>
+          <p:cNvPr id="18" name="pt:9Xrh1y0BojR4"/>
           <p:cNvSpPr/>
           <p:nvPr/>
         </p:nvSpPr>
@@ -4694,14 +5997,14 @@
             <a:avLst/>
           </a:prstGeom>
           <a:solidFill>
-            <a:srgbClr val="2E81B0"/>
+            <a:srgbClr val="494999"/>
           </a:solidFill>
           <a:ln/>
         </p:spPr>
       </p:sp>
       <p:sp>
         <p:nvSpPr>
-          <p:cNvPr id="19" name="Shape 17"/>
+          <p:cNvPr id="19" name="pt:2qIKjS7T7GC_"/>
           <p:cNvSpPr/>
           <p:nvPr/>
         </p:nvSpPr>
@@ -4721,7 +6024,7 @@
       </p:sp>
       <p:sp>
         <p:nvSpPr>
-          <p:cNvPr id="20" name="Text 18"/>
+          <p:cNvPr id="20" name="pt:cmNJYshP5EIZ"/>
           <p:cNvSpPr/>
           <p:nvPr/>
         </p:nvSpPr>
@@ -4763,7 +6066,7 @@
       </p:sp>
       <p:sp>
         <p:nvSpPr>
-          <p:cNvPr id="21" name="Text 19"/>
+          <p:cNvPr id="21" name="pt:naheiCY1TEfT"/>
           <p:cNvSpPr/>
           <p:nvPr/>
         </p:nvSpPr>
@@ -4805,7 +6108,7 @@
       </p:sp>
       <p:sp>
         <p:nvSpPr>
-          <p:cNvPr id="22" name="Shape 20"/>
+          <p:cNvPr id="22" name="pt:exg80xfH4TQw"/>
           <p:cNvSpPr/>
           <p:nvPr/>
         </p:nvSpPr>
@@ -4818,14 +6121,14 @@
             <a:avLst/>
           </a:prstGeom>
           <a:solidFill>
-            <a:srgbClr val="22D3EE"/>
+            <a:srgbClr val="7474F3"/>
           </a:solidFill>
           <a:ln/>
         </p:spPr>
       </p:sp>
       <p:sp>
         <p:nvSpPr>
-          <p:cNvPr id="23" name="Shape 21"/>
+          <p:cNvPr id="23" name="pt:LgvrhFHMSaRN"/>
           <p:cNvSpPr/>
           <p:nvPr/>
         </p:nvSpPr>
@@ -4838,14 +6141,14 @@
             <a:avLst/>
           </a:prstGeom>
           <a:solidFill>
-            <a:srgbClr val="1FBBD5"/>
+            <a:srgbClr val="6767D9"/>
           </a:solidFill>
           <a:ln/>
         </p:spPr>
       </p:sp>
       <p:sp>
         <p:nvSpPr>
-          <p:cNvPr id="24" name="Shape 22"/>
+          <p:cNvPr id="24" name="pt:3VsUGK2K5n8-"/>
           <p:cNvSpPr/>
           <p:nvPr/>
         </p:nvSpPr>
@@ -4858,14 +6161,14 @@
             <a:avLst/>
           </a:prstGeom>
           <a:solidFill>
-            <a:srgbClr val="1B97AF"/>
+            <a:srgbClr val="5555B2"/>
           </a:solidFill>
           <a:ln/>
         </p:spPr>
       </p:sp>
       <p:sp>
         <p:nvSpPr>
-          <p:cNvPr id="25" name="Shape 23"/>
+          <p:cNvPr id="25" name="pt:LWODg-un2WDO"/>
           <p:cNvSpPr/>
           <p:nvPr/>
         </p:nvSpPr>
@@ -4885,7 +6188,7 @@
       </p:sp>
       <p:sp>
         <p:nvSpPr>
-          <p:cNvPr id="26" name="Text 24"/>
+          <p:cNvPr id="26" name="pt:d1ix8I74nSgD"/>
           <p:cNvSpPr/>
           <p:nvPr/>
         </p:nvSpPr>
@@ -4927,7 +6230,7 @@
       </p:sp>
       <p:sp>
         <p:nvSpPr>
-          <p:cNvPr id="27" name="Text 25"/>
+          <p:cNvPr id="27" name="pt:1jTCBLzN4ag-"/>
           <p:cNvSpPr/>
           <p:nvPr/>
         </p:nvSpPr>
@@ -4972,6 +6275,330 @@
   <p:clrMapOvr>
     <a:masterClrMapping/>
   </p:clrMapOvr>
+  <p:transition spd="fast">
+    <p:zoom dir="in"/>
+  </p:transition>
+  <p:timing>
+    <p:tnLst>
+      <p:par>
+        <p:cTn id="1" dur="indefinite" restart="never" nodeType="tmRoot">
+          <p:childTnLst>
+            <p:seq concurrent="1" nextAc="seek">
+              <p:cTn id="2" dur="indefinite" nodeType="mainSeq">
+                <p:childTnLst>
+                  <p:par>
+                    <p:cTn id="3" fill="hold">
+                      <p:stCondLst>
+                        <p:cond delay="indefinite"/>
+                        <p:cond evt="onBegin" delay="0">
+                          <p:tn val="2"/>
+                        </p:cond>
+                      </p:stCondLst>
+                      <p:childTnLst>
+                        <p:par>
+                          <p:cTn id="4" fill="hold">
+                            <p:stCondLst>
+                              <p:cond delay="0"/>
+                            </p:stCondLst>
+                            <p:childTnLst>
+                              <p:par>
+                                <p:cTn id="8" presetID="53" presetClass="entr" presetSubtype="16" fill="hold" decel="100000" nodeType="afterEffect">
+                                  <p:stCondLst>
+                                    <p:cond delay="0"/>
+                                  </p:stCondLst>
+                                  <p:childTnLst>
+                                    <p:set>
+                                      <p:cBhvr>
+                                        <p:cTn id="5" dur="1" fill="hold">
+                                          <p:stCondLst>
+                                            <p:cond delay="0"/>
+                                          </p:stCondLst>
+                                        </p:cTn>
+                                        <p:tgtEl>
+                                          <p:spTgt spid="3"/>
+                                        </p:tgtEl>
+                                        <p:attrNameLst>
+                                          <p:attrName>style.visibility</p:attrName>
+                                        </p:attrNameLst>
+                                      </p:cBhvr>
+                                      <p:to>
+                                        <p:strVal val="visible"/>
+                                      </p:to>
+                                    </p:set>
+                                    <p:animEffect transition="in" filter="fade">
+                                      <p:cBhvr>
+                                        <p:cTn id="6" dur="450"/>
+                                        <p:tgtEl>
+                                          <p:spTgt spid="3"/>
+                                        </p:tgtEl>
+                                      </p:cBhvr>
+                                    </p:animEffect>
+                                    <p:animScale>
+                                      <p:cBhvr>
+                                        <p:cTn id="7" dur="450" fill="hold"/>
+                                        <p:tgtEl>
+                                          <p:spTgt spid="3"/>
+                                        </p:tgtEl>
+                                      </p:cBhvr>
+                                      <p:from x="88000" y="88000"/>
+                                      <p:to x="100000" y="100000"/>
+                                    </p:animScale>
+                                  </p:childTnLst>
+                                </p:cTn>
+                              </p:par>
+                              <p:par>
+                                <p:cTn id="12" presetID="53" presetClass="entr" presetSubtype="16" fill="hold" decel="100000" nodeType="withEffect">
+                                  <p:stCondLst>
+                                    <p:cond delay="100"/>
+                                  </p:stCondLst>
+                                  <p:childTnLst>
+                                    <p:set>
+                                      <p:cBhvr>
+                                        <p:cTn id="9" dur="1" fill="hold">
+                                          <p:stCondLst>
+                                            <p:cond delay="0"/>
+                                          </p:stCondLst>
+                                        </p:cTn>
+                                        <p:tgtEl>
+                                          <p:spTgt spid="4"/>
+                                        </p:tgtEl>
+                                        <p:attrNameLst>
+                                          <p:attrName>style.visibility</p:attrName>
+                                        </p:attrNameLst>
+                                      </p:cBhvr>
+                                      <p:to>
+                                        <p:strVal val="visible"/>
+                                      </p:to>
+                                    </p:set>
+                                    <p:animEffect transition="in" filter="fade">
+                                      <p:cBhvr>
+                                        <p:cTn id="10" dur="450"/>
+                                        <p:tgtEl>
+                                          <p:spTgt spid="4"/>
+                                        </p:tgtEl>
+                                      </p:cBhvr>
+                                    </p:animEffect>
+                                    <p:animScale>
+                                      <p:cBhvr>
+                                        <p:cTn id="11" dur="450" fill="hold"/>
+                                        <p:tgtEl>
+                                          <p:spTgt spid="4"/>
+                                        </p:tgtEl>
+                                      </p:cBhvr>
+                                      <p:from x="88000" y="88000"/>
+                                      <p:to x="100000" y="100000"/>
+                                    </p:animScale>
+                                  </p:childTnLst>
+                                </p:cTn>
+                              </p:par>
+                              <p:par>
+                                <p:cTn id="16" presetID="53" presetClass="entr" presetSubtype="16" fill="hold" decel="100000" nodeType="withEffect">
+                                  <p:stCondLst>
+                                    <p:cond delay="200"/>
+                                  </p:stCondLst>
+                                  <p:childTnLst>
+                                    <p:set>
+                                      <p:cBhvr>
+                                        <p:cTn id="13" dur="1" fill="hold">
+                                          <p:stCondLst>
+                                            <p:cond delay="0"/>
+                                          </p:stCondLst>
+                                        </p:cTn>
+                                        <p:tgtEl>
+                                          <p:spTgt spid="8"/>
+                                        </p:tgtEl>
+                                        <p:attrNameLst>
+                                          <p:attrName>style.visibility</p:attrName>
+                                        </p:attrNameLst>
+                                      </p:cBhvr>
+                                      <p:to>
+                                        <p:strVal val="visible"/>
+                                      </p:to>
+                                    </p:set>
+                                    <p:animEffect transition="in" filter="fade">
+                                      <p:cBhvr>
+                                        <p:cTn id="14" dur="450"/>
+                                        <p:tgtEl>
+                                          <p:spTgt spid="8"/>
+                                        </p:tgtEl>
+                                      </p:cBhvr>
+                                    </p:animEffect>
+                                    <p:animScale>
+                                      <p:cBhvr>
+                                        <p:cTn id="15" dur="450" fill="hold"/>
+                                        <p:tgtEl>
+                                          <p:spTgt spid="8"/>
+                                        </p:tgtEl>
+                                      </p:cBhvr>
+                                      <p:from x="88000" y="88000"/>
+                                      <p:to x="100000" y="100000"/>
+                                    </p:animScale>
+                                  </p:childTnLst>
+                                </p:cTn>
+                              </p:par>
+                              <p:par>
+                                <p:cTn id="20" presetID="53" presetClass="entr" presetSubtype="16" fill="hold" decel="100000" nodeType="withEffect">
+                                  <p:stCondLst>
+                                    <p:cond delay="300"/>
+                                  </p:stCondLst>
+                                  <p:childTnLst>
+                                    <p:set>
+                                      <p:cBhvr>
+                                        <p:cTn id="17" dur="1" fill="hold">
+                                          <p:stCondLst>
+                                            <p:cond delay="0"/>
+                                          </p:stCondLst>
+                                        </p:cTn>
+                                        <p:tgtEl>
+                                          <p:spTgt spid="14"/>
+                                        </p:tgtEl>
+                                        <p:attrNameLst>
+                                          <p:attrName>style.visibility</p:attrName>
+                                        </p:attrNameLst>
+                                      </p:cBhvr>
+                                      <p:to>
+                                        <p:strVal val="visible"/>
+                                      </p:to>
+                                    </p:set>
+                                    <p:animEffect transition="in" filter="fade">
+                                      <p:cBhvr>
+                                        <p:cTn id="18" dur="450"/>
+                                        <p:tgtEl>
+                                          <p:spTgt spid="14"/>
+                                        </p:tgtEl>
+                                      </p:cBhvr>
+                                    </p:animEffect>
+                                    <p:animScale>
+                                      <p:cBhvr>
+                                        <p:cTn id="19" dur="450" fill="hold"/>
+                                        <p:tgtEl>
+                                          <p:spTgt spid="14"/>
+                                        </p:tgtEl>
+                                      </p:cBhvr>
+                                      <p:from x="88000" y="88000"/>
+                                      <p:to x="100000" y="100000"/>
+                                    </p:animScale>
+                                  </p:childTnLst>
+                                </p:cTn>
+                              </p:par>
+                              <p:par>
+                                <p:cTn id="24" presetID="53" presetClass="entr" presetSubtype="16" fill="hold" decel="100000" nodeType="withEffect">
+                                  <p:stCondLst>
+                                    <p:cond delay="400"/>
+                                  </p:stCondLst>
+                                  <p:childTnLst>
+                                    <p:set>
+                                      <p:cBhvr>
+                                        <p:cTn id="21" dur="1" fill="hold">
+                                          <p:stCondLst>
+                                            <p:cond delay="0"/>
+                                          </p:stCondLst>
+                                        </p:cTn>
+                                        <p:tgtEl>
+                                          <p:spTgt spid="20"/>
+                                        </p:tgtEl>
+                                        <p:attrNameLst>
+                                          <p:attrName>style.visibility</p:attrName>
+                                        </p:attrNameLst>
+                                      </p:cBhvr>
+                                      <p:to>
+                                        <p:strVal val="visible"/>
+                                      </p:to>
+                                    </p:set>
+                                    <p:animEffect transition="in" filter="fade">
+                                      <p:cBhvr>
+                                        <p:cTn id="22" dur="450"/>
+                                        <p:tgtEl>
+                                          <p:spTgt spid="20"/>
+                                        </p:tgtEl>
+                                      </p:cBhvr>
+                                    </p:animEffect>
+                                    <p:animScale>
+                                      <p:cBhvr>
+                                        <p:cTn id="23" dur="450" fill="hold"/>
+                                        <p:tgtEl>
+                                          <p:spTgt spid="20"/>
+                                        </p:tgtEl>
+                                      </p:cBhvr>
+                                      <p:from x="88000" y="88000"/>
+                                      <p:to x="100000" y="100000"/>
+                                    </p:animScale>
+                                  </p:childTnLst>
+                                </p:cTn>
+                              </p:par>
+                              <p:par>
+                                <p:cTn id="28" presetID="53" presetClass="entr" presetSubtype="16" fill="hold" decel="100000" nodeType="withEffect">
+                                  <p:stCondLst>
+                                    <p:cond delay="500"/>
+                                  </p:stCondLst>
+                                  <p:childTnLst>
+                                    <p:set>
+                                      <p:cBhvr>
+                                        <p:cTn id="25" dur="1" fill="hold">
+                                          <p:stCondLst>
+                                            <p:cond delay="0"/>
+                                          </p:stCondLst>
+                                        </p:cTn>
+                                        <p:tgtEl>
+                                          <p:spTgt spid="26"/>
+                                        </p:tgtEl>
+                                        <p:attrNameLst>
+                                          <p:attrName>style.visibility</p:attrName>
+                                        </p:attrNameLst>
+                                      </p:cBhvr>
+                                      <p:to>
+                                        <p:strVal val="visible"/>
+                                      </p:to>
+                                    </p:set>
+                                    <p:animEffect transition="in" filter="fade">
+                                      <p:cBhvr>
+                                        <p:cTn id="26" dur="450"/>
+                                        <p:tgtEl>
+                                          <p:spTgt spid="26"/>
+                                        </p:tgtEl>
+                                      </p:cBhvr>
+                                    </p:animEffect>
+                                    <p:animScale>
+                                      <p:cBhvr>
+                                        <p:cTn id="27" dur="450" fill="hold"/>
+                                        <p:tgtEl>
+                                          <p:spTgt spid="26"/>
+                                        </p:tgtEl>
+                                      </p:cBhvr>
+                                      <p:from x="88000" y="88000"/>
+                                      <p:to x="100000" y="100000"/>
+                                    </p:animScale>
+                                  </p:childTnLst>
+                                </p:cTn>
+                              </p:par>
+                            </p:childTnLst>
+                          </p:cTn>
+                        </p:par>
+                      </p:childTnLst>
+                    </p:cTn>
+                  </p:par>
+                </p:childTnLst>
+              </p:cTn>
+              <p:prevCondLst>
+                <p:cond evt="onPrev" delay="0">
+                  <p:tgtEl>
+                    <p:sldTgt/>
+                  </p:tgtEl>
+                </p:cond>
+              </p:prevCondLst>
+              <p:nextCondLst>
+                <p:cond evt="onNext" delay="0">
+                  <p:tgtEl>
+                    <p:sldTgt/>
+                  </p:tgtEl>
+                </p:cond>
+              </p:nextCondLst>
+            </p:seq>
+          </p:childTnLst>
+        </p:cTn>
+      </p:par>
+    </p:tnLst>
+  </p:timing>
 </p:sld>
 </file>
 
@@ -5001,7 +6628,7 @@
       </p:grpSpPr>
       <p:sp>
         <p:nvSpPr>
-          <p:cNvPr id="2" name="Shape 0"/>
+          <p:cNvPr id="2" name="pt:cIbOin5eCVQo"/>
           <p:cNvSpPr/>
           <p:nvPr/>
         </p:nvSpPr>
@@ -5021,7 +6648,7 @@
       </p:sp>
       <p:sp>
         <p:nvSpPr>
-          <p:cNvPr id="3" name="Text 1"/>
+          <p:cNvPr id="3" name="pt:Edd_BaxNeqHi"/>
           <p:cNvSpPr/>
           <p:nvPr/>
         </p:nvSpPr>
@@ -5080,7 +6707,7 @@
       </p:sp>
       <p:pic>
         <p:nvPicPr>
-          <p:cNvPr id="4" name="Image 0" descr="preencoded.png">    </p:cNvPr>
+          <p:cNvPr id="4" name="pt:nkJN_K04tObz" descr="preencoded.png">    </p:cNvPr>
           <p:cNvPicPr>
             <a:picLocks noChangeAspect="1"/>
           </p:cNvPicPr>
@@ -5104,7 +6731,7 @@
       </p:pic>
       <p:sp>
         <p:nvSpPr>
-          <p:cNvPr id="5" name="Shape 2"/>
+          <p:cNvPr id="5" name="pt:4lgR5-d9UdB2"/>
           <p:cNvSpPr/>
           <p:nvPr/>
         </p:nvSpPr>
@@ -5126,7 +6753,7 @@
       </p:sp>
       <p:sp>
         <p:nvSpPr>
-          <p:cNvPr id="6" name="Text 3"/>
+          <p:cNvPr id="6" name="pt:qUmNqBqN05BI"/>
           <p:cNvSpPr/>
           <p:nvPr/>
         </p:nvSpPr>
@@ -5168,7 +6795,7 @@
       </p:sp>
       <p:sp>
         <p:nvSpPr>
-          <p:cNvPr id="7" name="Text 4"/>
+          <p:cNvPr id="7" name="pt:Lq2o2tp3j8vR"/>
           <p:cNvSpPr/>
           <p:nvPr/>
         </p:nvSpPr>
@@ -5210,7 +6837,7 @@
       </p:sp>
       <p:sp>
         <p:nvSpPr>
-          <p:cNvPr id="8" name="Text 5"/>
+          <p:cNvPr id="8" name="pt:XVk3573tPaJC"/>
           <p:cNvSpPr/>
           <p:nvPr/>
         </p:nvSpPr>
@@ -5252,7 +6879,7 @@
       </p:sp>
       <p:pic>
         <p:nvPicPr>
-          <p:cNvPr id="9" name="Image 1" descr="preencoded.png">    </p:cNvPr>
+          <p:cNvPr id="9" name="pt:VCAnNInarZwG" descr="preencoded.png">    </p:cNvPr>
           <p:cNvPicPr>
             <a:picLocks noChangeAspect="1"/>
           </p:cNvPicPr>
@@ -5276,7 +6903,7 @@
       </p:pic>
       <p:sp>
         <p:nvSpPr>
-          <p:cNvPr id="10" name="Shape 6"/>
+          <p:cNvPr id="10" name="pt:VT6Py8D-3qh2"/>
           <p:cNvSpPr/>
           <p:nvPr/>
         </p:nvSpPr>
@@ -5298,7 +6925,7 @@
       </p:sp>
       <p:sp>
         <p:nvSpPr>
-          <p:cNvPr id="11" name="Text 7"/>
+          <p:cNvPr id="11" name="pt:dsh2zefYqpmd"/>
           <p:cNvSpPr/>
           <p:nvPr/>
         </p:nvSpPr>
@@ -5340,7 +6967,7 @@
       </p:sp>
       <p:sp>
         <p:nvSpPr>
-          <p:cNvPr id="12" name="Text 8"/>
+          <p:cNvPr id="12" name="pt:0rlvmeaRfZpM"/>
           <p:cNvSpPr/>
           <p:nvPr/>
         </p:nvSpPr>
@@ -5382,7 +7009,7 @@
       </p:sp>
       <p:pic>
         <p:nvPicPr>
-          <p:cNvPr id="13" name="Image 2" descr="preencoded.png">    </p:cNvPr>
+          <p:cNvPr id="13" name="pt:2jHFbhIaOaMp" descr="preencoded.png">    </p:cNvPr>
           <p:cNvPicPr>
             <a:picLocks noChangeAspect="1"/>
           </p:cNvPicPr>
@@ -5406,7 +7033,7 @@
       </p:pic>
       <p:sp>
         <p:nvSpPr>
-          <p:cNvPr id="14" name="Shape 9"/>
+          <p:cNvPr id="14" name="pt:MnTg_Gxp6U_U"/>
           <p:cNvSpPr/>
           <p:nvPr/>
         </p:nvSpPr>
@@ -5428,7 +7055,7 @@
       </p:sp>
       <p:sp>
         <p:nvSpPr>
-          <p:cNvPr id="15" name="Text 10"/>
+          <p:cNvPr id="15" name="pt:SmXXlG5NALIi"/>
           <p:cNvSpPr/>
           <p:nvPr/>
         </p:nvSpPr>
@@ -5470,7 +7097,7 @@
       </p:sp>
       <p:sp>
         <p:nvSpPr>
-          <p:cNvPr id="16" name="Text 11"/>
+          <p:cNvPr id="16" name="pt:uoqhUHfGDVaD"/>
           <p:cNvSpPr/>
           <p:nvPr/>
         </p:nvSpPr>
@@ -5512,7 +7139,7 @@
       </p:sp>
       <p:pic>
         <p:nvPicPr>
-          <p:cNvPr id="17" name="Image 3" descr="preencoded.png">    </p:cNvPr>
+          <p:cNvPr id="17" name="pt:FSQE1UGw10io" descr="preencoded.png">    </p:cNvPr>
           <p:cNvPicPr>
             <a:picLocks noChangeAspect="1"/>
           </p:cNvPicPr>
@@ -5536,7 +7163,7 @@
       </p:pic>
       <p:sp>
         <p:nvSpPr>
-          <p:cNvPr id="18" name="Shape 12"/>
+          <p:cNvPr id="18" name="pt:idmdGlP4Q-p8"/>
           <p:cNvSpPr/>
           <p:nvPr/>
         </p:nvSpPr>
@@ -5558,7 +7185,7 @@
       </p:sp>
       <p:sp>
         <p:nvSpPr>
-          <p:cNvPr id="19" name="Text 13"/>
+          <p:cNvPr id="19" name="pt:4zXqDTJ3u898"/>
           <p:cNvSpPr/>
           <p:nvPr/>
         </p:nvSpPr>
@@ -5600,7 +7227,7 @@
       </p:sp>
       <p:sp>
         <p:nvSpPr>
-          <p:cNvPr id="20" name="Text 14"/>
+          <p:cNvPr id="20" name="pt:dA3KXQcvCl7C"/>
           <p:cNvSpPr/>
           <p:nvPr/>
         </p:nvSpPr>
@@ -5645,6 +7272,605 @@
   <p:clrMapOvr>
     <a:masterClrMapping/>
   </p:clrMapOvr>
+  <p:transition spd="fast">
+    <p:zoom dir="in"/>
+  </p:transition>
+  <p:timing>
+    <p:tnLst>
+      <p:par>
+        <p:cTn id="1" dur="indefinite" restart="never" nodeType="tmRoot">
+          <p:childTnLst>
+            <p:seq concurrent="1" nextAc="seek">
+              <p:cTn id="2" dur="indefinite" nodeType="mainSeq">
+                <p:childTnLst>
+                  <p:par>
+                    <p:cTn id="3" fill="hold">
+                      <p:stCondLst>
+                        <p:cond delay="indefinite"/>
+                        <p:cond evt="onBegin" delay="0">
+                          <p:tn val="2"/>
+                        </p:cond>
+                      </p:stCondLst>
+                      <p:childTnLst>
+                        <p:par>
+                          <p:cTn id="4" fill="hold">
+                            <p:stCondLst>
+                              <p:cond delay="0"/>
+                            </p:stCondLst>
+                            <p:childTnLst>
+                              <p:par>
+                                <p:cTn id="8" presetID="53" presetClass="entr" presetSubtype="16" fill="hold" decel="100000" nodeType="afterEffect">
+                                  <p:stCondLst>
+                                    <p:cond delay="0"/>
+                                  </p:stCondLst>
+                                  <p:childTnLst>
+                                    <p:set>
+                                      <p:cBhvr>
+                                        <p:cTn id="5" dur="1" fill="hold">
+                                          <p:stCondLst>
+                                            <p:cond delay="0"/>
+                                          </p:stCondLst>
+                                        </p:cTn>
+                                        <p:tgtEl>
+                                          <p:spTgt spid="3"/>
+                                        </p:tgtEl>
+                                        <p:attrNameLst>
+                                          <p:attrName>style.visibility</p:attrName>
+                                        </p:attrNameLst>
+                                      </p:cBhvr>
+                                      <p:to>
+                                        <p:strVal val="visible"/>
+                                      </p:to>
+                                    </p:set>
+                                    <p:animEffect transition="in" filter="fade">
+                                      <p:cBhvr>
+                                        <p:cTn id="6" dur="450"/>
+                                        <p:tgtEl>
+                                          <p:spTgt spid="3"/>
+                                        </p:tgtEl>
+                                      </p:cBhvr>
+                                    </p:animEffect>
+                                    <p:animScale>
+                                      <p:cBhvr>
+                                        <p:cTn id="7" dur="450" fill="hold"/>
+                                        <p:tgtEl>
+                                          <p:spTgt spid="3"/>
+                                        </p:tgtEl>
+                                      </p:cBhvr>
+                                      <p:from x="88000" y="88000"/>
+                                      <p:to x="100000" y="100000"/>
+                                    </p:animScale>
+                                  </p:childTnLst>
+                                </p:cTn>
+                              </p:par>
+                              <p:par>
+                                <p:cTn id="12" presetID="53" presetClass="entr" presetSubtype="16" fill="hold" decel="100000" nodeType="withEffect">
+                                  <p:stCondLst>
+                                    <p:cond delay="58"/>
+                                  </p:stCondLst>
+                                  <p:childTnLst>
+                                    <p:set>
+                                      <p:cBhvr>
+                                        <p:cTn id="9" dur="1" fill="hold">
+                                          <p:stCondLst>
+                                            <p:cond delay="0"/>
+                                          </p:stCondLst>
+                                        </p:cTn>
+                                        <p:tgtEl>
+                                          <p:spTgt spid="4"/>
+                                        </p:tgtEl>
+                                        <p:attrNameLst>
+                                          <p:attrName>style.visibility</p:attrName>
+                                        </p:attrNameLst>
+                                      </p:cBhvr>
+                                      <p:to>
+                                        <p:strVal val="visible"/>
+                                      </p:to>
+                                    </p:set>
+                                    <p:animEffect transition="in" filter="fade">
+                                      <p:cBhvr>
+                                        <p:cTn id="10" dur="450"/>
+                                        <p:tgtEl>
+                                          <p:spTgt spid="4"/>
+                                        </p:tgtEl>
+                                      </p:cBhvr>
+                                    </p:animEffect>
+                                    <p:animScale>
+                                      <p:cBhvr>
+                                        <p:cTn id="11" dur="450" fill="hold"/>
+                                        <p:tgtEl>
+                                          <p:spTgt spid="4"/>
+                                        </p:tgtEl>
+                                      </p:cBhvr>
+                                      <p:from x="88000" y="88000"/>
+                                      <p:to x="100000" y="100000"/>
+                                    </p:animScale>
+                                  </p:childTnLst>
+                                </p:cTn>
+                              </p:par>
+                              <p:par>
+                                <p:cTn id="15" presetID="10" presetClass="entr" presetSubtype="0" fill="hold" decel="100000" nodeType="withEffect">
+                                  <p:stCondLst>
+                                    <p:cond delay="117"/>
+                                  </p:stCondLst>
+                                  <p:childTnLst>
+                                    <p:set>
+                                      <p:cBhvr>
+                                        <p:cTn id="13" dur="1" fill="hold">
+                                          <p:stCondLst>
+                                            <p:cond delay="0"/>
+                                          </p:stCondLst>
+                                        </p:cTn>
+                                        <p:tgtEl>
+                                          <p:spTgt spid="6"/>
+                                        </p:tgtEl>
+                                        <p:attrNameLst>
+                                          <p:attrName>style.visibility</p:attrName>
+                                        </p:attrNameLst>
+                                      </p:cBhvr>
+                                      <p:to>
+                                        <p:strVal val="visible"/>
+                                      </p:to>
+                                    </p:set>
+                                    <p:animEffect transition="in" filter="fade">
+                                      <p:cBhvr>
+                                        <p:cTn id="14" dur="450"/>
+                                        <p:tgtEl>
+                                          <p:spTgt spid="6"/>
+                                        </p:tgtEl>
+                                      </p:cBhvr>
+                                    </p:animEffect>
+                                  </p:childTnLst>
+                                </p:cTn>
+                              </p:par>
+                              <p:par>
+                                <p:cTn id="19" presetID="53" presetClass="entr" presetSubtype="16" fill="hold" decel="100000" nodeType="withEffect">
+                                  <p:stCondLst>
+                                    <p:cond delay="175"/>
+                                  </p:stCondLst>
+                                  <p:childTnLst>
+                                    <p:set>
+                                      <p:cBhvr>
+                                        <p:cTn id="16" dur="1" fill="hold">
+                                          <p:stCondLst>
+                                            <p:cond delay="0"/>
+                                          </p:stCondLst>
+                                        </p:cTn>
+                                        <p:tgtEl>
+                                          <p:spTgt spid="7"/>
+                                        </p:tgtEl>
+                                        <p:attrNameLst>
+                                          <p:attrName>style.visibility</p:attrName>
+                                        </p:attrNameLst>
+                                      </p:cBhvr>
+                                      <p:to>
+                                        <p:strVal val="visible"/>
+                                      </p:to>
+                                    </p:set>
+                                    <p:animEffect transition="in" filter="fade">
+                                      <p:cBhvr>
+                                        <p:cTn id="17" dur="450"/>
+                                        <p:tgtEl>
+                                          <p:spTgt spid="7"/>
+                                        </p:tgtEl>
+                                      </p:cBhvr>
+                                    </p:animEffect>
+                                    <p:animScale>
+                                      <p:cBhvr>
+                                        <p:cTn id="18" dur="450" fill="hold"/>
+                                        <p:tgtEl>
+                                          <p:spTgt spid="7"/>
+                                        </p:tgtEl>
+                                      </p:cBhvr>
+                                      <p:from x="88000" y="88000"/>
+                                      <p:to x="100000" y="100000"/>
+                                    </p:animScale>
+                                  </p:childTnLst>
+                                </p:cTn>
+                              </p:par>
+                              <p:par>
+                                <p:cTn id="23" presetID="53" presetClass="entr" presetSubtype="16" fill="hold" decel="100000" nodeType="withEffect">
+                                  <p:stCondLst>
+                                    <p:cond delay="233"/>
+                                  </p:stCondLst>
+                                  <p:childTnLst>
+                                    <p:set>
+                                      <p:cBhvr>
+                                        <p:cTn id="20" dur="1" fill="hold">
+                                          <p:stCondLst>
+                                            <p:cond delay="0"/>
+                                          </p:stCondLst>
+                                        </p:cTn>
+                                        <p:tgtEl>
+                                          <p:spTgt spid="9"/>
+                                        </p:tgtEl>
+                                        <p:attrNameLst>
+                                          <p:attrName>style.visibility</p:attrName>
+                                        </p:attrNameLst>
+                                      </p:cBhvr>
+                                      <p:to>
+                                        <p:strVal val="visible"/>
+                                      </p:to>
+                                    </p:set>
+                                    <p:animEffect transition="in" filter="fade">
+                                      <p:cBhvr>
+                                        <p:cTn id="21" dur="450"/>
+                                        <p:tgtEl>
+                                          <p:spTgt spid="9"/>
+                                        </p:tgtEl>
+                                      </p:cBhvr>
+                                    </p:animEffect>
+                                    <p:animScale>
+                                      <p:cBhvr>
+                                        <p:cTn id="22" dur="450" fill="hold"/>
+                                        <p:tgtEl>
+                                          <p:spTgt spid="9"/>
+                                        </p:tgtEl>
+                                      </p:cBhvr>
+                                      <p:from x="88000" y="88000"/>
+                                      <p:to x="100000" y="100000"/>
+                                    </p:animScale>
+                                  </p:childTnLst>
+                                </p:cTn>
+                              </p:par>
+                              <p:par>
+                                <p:cTn id="26" presetID="10" presetClass="entr" presetSubtype="0" fill="hold" decel="100000" nodeType="withEffect">
+                                  <p:stCondLst>
+                                    <p:cond delay="292"/>
+                                  </p:stCondLst>
+                                  <p:childTnLst>
+                                    <p:set>
+                                      <p:cBhvr>
+                                        <p:cTn id="24" dur="1" fill="hold">
+                                          <p:stCondLst>
+                                            <p:cond delay="0"/>
+                                          </p:stCondLst>
+                                        </p:cTn>
+                                        <p:tgtEl>
+                                          <p:spTgt spid="11"/>
+                                        </p:tgtEl>
+                                        <p:attrNameLst>
+                                          <p:attrName>style.visibility</p:attrName>
+                                        </p:attrNameLst>
+                                      </p:cBhvr>
+                                      <p:to>
+                                        <p:strVal val="visible"/>
+                                      </p:to>
+                                    </p:set>
+                                    <p:animEffect transition="in" filter="fade">
+                                      <p:cBhvr>
+                                        <p:cTn id="25" dur="450"/>
+                                        <p:tgtEl>
+                                          <p:spTgt spid="11"/>
+                                        </p:tgtEl>
+                                      </p:cBhvr>
+                                    </p:animEffect>
+                                  </p:childTnLst>
+                                </p:cTn>
+                              </p:par>
+                              <p:par>
+                                <p:cTn id="30" presetID="53" presetClass="entr" presetSubtype="16" fill="hold" decel="100000" nodeType="withEffect">
+                                  <p:stCondLst>
+                                    <p:cond delay="350"/>
+                                  </p:stCondLst>
+                                  <p:childTnLst>
+                                    <p:set>
+                                      <p:cBhvr>
+                                        <p:cTn id="27" dur="1" fill="hold">
+                                          <p:stCondLst>
+                                            <p:cond delay="0"/>
+                                          </p:stCondLst>
+                                        </p:cTn>
+                                        <p:tgtEl>
+                                          <p:spTgt spid="12"/>
+                                        </p:tgtEl>
+                                        <p:attrNameLst>
+                                          <p:attrName>style.visibility</p:attrName>
+                                        </p:attrNameLst>
+                                      </p:cBhvr>
+                                      <p:to>
+                                        <p:strVal val="visible"/>
+                                      </p:to>
+                                    </p:set>
+                                    <p:animEffect transition="in" filter="fade">
+                                      <p:cBhvr>
+                                        <p:cTn id="28" dur="450"/>
+                                        <p:tgtEl>
+                                          <p:spTgt spid="12"/>
+                                        </p:tgtEl>
+                                      </p:cBhvr>
+                                    </p:animEffect>
+                                    <p:animScale>
+                                      <p:cBhvr>
+                                        <p:cTn id="29" dur="450" fill="hold"/>
+                                        <p:tgtEl>
+                                          <p:spTgt spid="12"/>
+                                        </p:tgtEl>
+                                      </p:cBhvr>
+                                      <p:from x="88000" y="88000"/>
+                                      <p:to x="100000" y="100000"/>
+                                    </p:animScale>
+                                  </p:childTnLst>
+                                </p:cTn>
+                              </p:par>
+                              <p:par>
+                                <p:cTn id="34" presetID="53" presetClass="entr" presetSubtype="16" fill="hold" decel="100000" nodeType="withEffect">
+                                  <p:stCondLst>
+                                    <p:cond delay="408"/>
+                                  </p:stCondLst>
+                                  <p:childTnLst>
+                                    <p:set>
+                                      <p:cBhvr>
+                                        <p:cTn id="31" dur="1" fill="hold">
+                                          <p:stCondLst>
+                                            <p:cond delay="0"/>
+                                          </p:stCondLst>
+                                        </p:cTn>
+                                        <p:tgtEl>
+                                          <p:spTgt spid="13"/>
+                                        </p:tgtEl>
+                                        <p:attrNameLst>
+                                          <p:attrName>style.visibility</p:attrName>
+                                        </p:attrNameLst>
+                                      </p:cBhvr>
+                                      <p:to>
+                                        <p:strVal val="visible"/>
+                                      </p:to>
+                                    </p:set>
+                                    <p:animEffect transition="in" filter="fade">
+                                      <p:cBhvr>
+                                        <p:cTn id="32" dur="450"/>
+                                        <p:tgtEl>
+                                          <p:spTgt spid="13"/>
+                                        </p:tgtEl>
+                                      </p:cBhvr>
+                                    </p:animEffect>
+                                    <p:animScale>
+                                      <p:cBhvr>
+                                        <p:cTn id="33" dur="450" fill="hold"/>
+                                        <p:tgtEl>
+                                          <p:spTgt spid="13"/>
+                                        </p:tgtEl>
+                                      </p:cBhvr>
+                                      <p:from x="88000" y="88000"/>
+                                      <p:to x="100000" y="100000"/>
+                                    </p:animScale>
+                                  </p:childTnLst>
+                                </p:cTn>
+                              </p:par>
+                              <p:par>
+                                <p:cTn id="37" presetID="10" presetClass="entr" presetSubtype="0" fill="hold" decel="100000" nodeType="withEffect">
+                                  <p:stCondLst>
+                                    <p:cond delay="467"/>
+                                  </p:stCondLst>
+                                  <p:childTnLst>
+                                    <p:set>
+                                      <p:cBhvr>
+                                        <p:cTn id="35" dur="1" fill="hold">
+                                          <p:stCondLst>
+                                            <p:cond delay="0"/>
+                                          </p:stCondLst>
+                                        </p:cTn>
+                                        <p:tgtEl>
+                                          <p:spTgt spid="15"/>
+                                        </p:tgtEl>
+                                        <p:attrNameLst>
+                                          <p:attrName>style.visibility</p:attrName>
+                                        </p:attrNameLst>
+                                      </p:cBhvr>
+                                      <p:to>
+                                        <p:strVal val="visible"/>
+                                      </p:to>
+                                    </p:set>
+                                    <p:animEffect transition="in" filter="fade">
+                                      <p:cBhvr>
+                                        <p:cTn id="36" dur="450"/>
+                                        <p:tgtEl>
+                                          <p:spTgt spid="15"/>
+                                        </p:tgtEl>
+                                      </p:cBhvr>
+                                    </p:animEffect>
+                                  </p:childTnLst>
+                                </p:cTn>
+                              </p:par>
+                              <p:par>
+                                <p:cTn id="41" presetID="53" presetClass="entr" presetSubtype="16" fill="hold" decel="100000" nodeType="withEffect">
+                                  <p:stCondLst>
+                                    <p:cond delay="525"/>
+                                  </p:stCondLst>
+                                  <p:childTnLst>
+                                    <p:set>
+                                      <p:cBhvr>
+                                        <p:cTn id="38" dur="1" fill="hold">
+                                          <p:stCondLst>
+                                            <p:cond delay="0"/>
+                                          </p:stCondLst>
+                                        </p:cTn>
+                                        <p:tgtEl>
+                                          <p:spTgt spid="16"/>
+                                        </p:tgtEl>
+                                        <p:attrNameLst>
+                                          <p:attrName>style.visibility</p:attrName>
+                                        </p:attrNameLst>
+                                      </p:cBhvr>
+                                      <p:to>
+                                        <p:strVal val="visible"/>
+                                      </p:to>
+                                    </p:set>
+                                    <p:animEffect transition="in" filter="fade">
+                                      <p:cBhvr>
+                                        <p:cTn id="39" dur="450"/>
+                                        <p:tgtEl>
+                                          <p:spTgt spid="16"/>
+                                        </p:tgtEl>
+                                      </p:cBhvr>
+                                    </p:animEffect>
+                                    <p:animScale>
+                                      <p:cBhvr>
+                                        <p:cTn id="40" dur="450" fill="hold"/>
+                                        <p:tgtEl>
+                                          <p:spTgt spid="16"/>
+                                        </p:tgtEl>
+                                      </p:cBhvr>
+                                      <p:from x="88000" y="88000"/>
+                                      <p:to x="100000" y="100000"/>
+                                    </p:animScale>
+                                  </p:childTnLst>
+                                </p:cTn>
+                              </p:par>
+                              <p:par>
+                                <p:cTn id="45" presetID="53" presetClass="entr" presetSubtype="16" fill="hold" decel="100000" nodeType="withEffect">
+                                  <p:stCondLst>
+                                    <p:cond delay="583"/>
+                                  </p:stCondLst>
+                                  <p:childTnLst>
+                                    <p:set>
+                                      <p:cBhvr>
+                                        <p:cTn id="42" dur="1" fill="hold">
+                                          <p:stCondLst>
+                                            <p:cond delay="0"/>
+                                          </p:stCondLst>
+                                        </p:cTn>
+                                        <p:tgtEl>
+                                          <p:spTgt spid="17"/>
+                                        </p:tgtEl>
+                                        <p:attrNameLst>
+                                          <p:attrName>style.visibility</p:attrName>
+                                        </p:attrNameLst>
+                                      </p:cBhvr>
+                                      <p:to>
+                                        <p:strVal val="visible"/>
+                                      </p:to>
+                                    </p:set>
+                                    <p:animEffect transition="in" filter="fade">
+                                      <p:cBhvr>
+                                        <p:cTn id="43" dur="450"/>
+                                        <p:tgtEl>
+                                          <p:spTgt spid="17"/>
+                                        </p:tgtEl>
+                                      </p:cBhvr>
+                                    </p:animEffect>
+                                    <p:animScale>
+                                      <p:cBhvr>
+                                        <p:cTn id="44" dur="450" fill="hold"/>
+                                        <p:tgtEl>
+                                          <p:spTgt spid="17"/>
+                                        </p:tgtEl>
+                                      </p:cBhvr>
+                                      <p:from x="88000" y="88000"/>
+                                      <p:to x="100000" y="100000"/>
+                                    </p:animScale>
+                                  </p:childTnLst>
+                                </p:cTn>
+                              </p:par>
+                              <p:par>
+                                <p:cTn id="48" presetID="10" presetClass="entr" presetSubtype="0" fill="hold" decel="100000" nodeType="withEffect">
+                                  <p:stCondLst>
+                                    <p:cond delay="642"/>
+                                  </p:stCondLst>
+                                  <p:childTnLst>
+                                    <p:set>
+                                      <p:cBhvr>
+                                        <p:cTn id="46" dur="1" fill="hold">
+                                          <p:stCondLst>
+                                            <p:cond delay="0"/>
+                                          </p:stCondLst>
+                                        </p:cTn>
+                                        <p:tgtEl>
+                                          <p:spTgt spid="19"/>
+                                        </p:tgtEl>
+                                        <p:attrNameLst>
+                                          <p:attrName>style.visibility</p:attrName>
+                                        </p:attrNameLst>
+                                      </p:cBhvr>
+                                      <p:to>
+                                        <p:strVal val="visible"/>
+                                      </p:to>
+                                    </p:set>
+                                    <p:animEffect transition="in" filter="fade">
+                                      <p:cBhvr>
+                                        <p:cTn id="47" dur="450"/>
+                                        <p:tgtEl>
+                                          <p:spTgt spid="19"/>
+                                        </p:tgtEl>
+                                      </p:cBhvr>
+                                    </p:animEffect>
+                                  </p:childTnLst>
+                                </p:cTn>
+                              </p:par>
+                              <p:par>
+                                <p:cTn id="52" presetID="53" presetClass="entr" presetSubtype="16" fill="hold" decel="100000" nodeType="withEffect">
+                                  <p:stCondLst>
+                                    <p:cond delay="700"/>
+                                  </p:stCondLst>
+                                  <p:childTnLst>
+                                    <p:set>
+                                      <p:cBhvr>
+                                        <p:cTn id="49" dur="1" fill="hold">
+                                          <p:stCondLst>
+                                            <p:cond delay="0"/>
+                                          </p:stCondLst>
+                                        </p:cTn>
+                                        <p:tgtEl>
+                                          <p:spTgt spid="20"/>
+                                        </p:tgtEl>
+                                        <p:attrNameLst>
+                                          <p:attrName>style.visibility</p:attrName>
+                                        </p:attrNameLst>
+                                      </p:cBhvr>
+                                      <p:to>
+                                        <p:strVal val="visible"/>
+                                      </p:to>
+                                    </p:set>
+                                    <p:animEffect transition="in" filter="fade">
+                                      <p:cBhvr>
+                                        <p:cTn id="50" dur="450"/>
+                                        <p:tgtEl>
+                                          <p:spTgt spid="20"/>
+                                        </p:tgtEl>
+                                      </p:cBhvr>
+                                    </p:animEffect>
+                                    <p:animScale>
+                                      <p:cBhvr>
+                                        <p:cTn id="51" dur="450" fill="hold"/>
+                                        <p:tgtEl>
+                                          <p:spTgt spid="20"/>
+                                        </p:tgtEl>
+                                      </p:cBhvr>
+                                      <p:from x="88000" y="88000"/>
+                                      <p:to x="100000" y="100000"/>
+                                    </p:animScale>
+                                  </p:childTnLst>
+                                </p:cTn>
+                              </p:par>
+                            </p:childTnLst>
+                          </p:cTn>
+                        </p:par>
+                      </p:childTnLst>
+                    </p:cTn>
+                  </p:par>
+                </p:childTnLst>
+              </p:cTn>
+              <p:prevCondLst>
+                <p:cond evt="onPrev" delay="0">
+                  <p:tgtEl>
+                    <p:sldTgt/>
+                  </p:tgtEl>
+                </p:cond>
+              </p:prevCondLst>
+              <p:nextCondLst>
+                <p:cond evt="onNext" delay="0">
+                  <p:tgtEl>
+                    <p:sldTgt/>
+                  </p:tgtEl>
+                </p:cond>
+              </p:nextCondLst>
+            </p:seq>
+          </p:childTnLst>
+        </p:cTn>
+      </p:par>
+    </p:tnLst>
+  </p:timing>
 </p:sld>
 </file>
 
@@ -5674,7 +7900,7 @@
       </p:grpSpPr>
       <p:sp>
         <p:nvSpPr>
-          <p:cNvPr id="2" name="Shape 0"/>
+          <p:cNvPr id="2" name="pt:XaC91kKAub3r"/>
           <p:cNvSpPr/>
           <p:nvPr/>
         </p:nvSpPr>
@@ -5694,7 +7920,7 @@
       </p:sp>
       <p:sp>
         <p:nvSpPr>
-          <p:cNvPr id="3" name="Text 1"/>
+          <p:cNvPr id="3" name="pt:jd4ZxBjKkvoS"/>
           <p:cNvSpPr/>
           <p:nvPr/>
         </p:nvSpPr>
@@ -5753,7 +7979,7 @@
       </p:sp>
       <p:sp>
         <p:nvSpPr>
-          <p:cNvPr id="4" name="Shape 2"/>
+          <p:cNvPr id="4" name="pt:zGf6EsOKg-8B"/>
           <p:cNvSpPr/>
           <p:nvPr/>
         </p:nvSpPr>
@@ -5777,7 +8003,7 @@
       </p:sp>
       <p:sp>
         <p:nvSpPr>
-          <p:cNvPr id="5" name="Shape 3"/>
+          <p:cNvPr id="5" name="pt:4XH9t1BG71uj"/>
           <p:cNvSpPr/>
           <p:nvPr/>
         </p:nvSpPr>
@@ -5804,7 +8030,7 @@
       </p:sp>
       <p:sp>
         <p:nvSpPr>
-          <p:cNvPr id="6" name="Text 4"/>
+          <p:cNvPr id="6" name="pt:SukCVCyFGKZp"/>
           <p:cNvSpPr/>
           <p:nvPr/>
         </p:nvSpPr>
@@ -5846,7 +8072,7 @@
       </p:sp>
       <p:sp>
         <p:nvSpPr>
-          <p:cNvPr id="7" name="Text 5"/>
+          <p:cNvPr id="7" name="pt:HlEYPDxApZAq"/>
           <p:cNvSpPr/>
           <p:nvPr/>
         </p:nvSpPr>
@@ -5937,7 +8163,7 @@
       </p:sp>
       <p:sp>
         <p:nvSpPr>
-          <p:cNvPr id="8" name="Shape 6"/>
+          <p:cNvPr id="8" name="pt:eDyAVCatSt_s"/>
           <p:cNvSpPr/>
           <p:nvPr/>
         </p:nvSpPr>
@@ -5961,7 +8187,7 @@
       </p:sp>
       <p:sp>
         <p:nvSpPr>
-          <p:cNvPr id="9" name="Shape 7"/>
+          <p:cNvPr id="9" name="pt:XIINGi6_c-i0"/>
           <p:cNvSpPr/>
           <p:nvPr/>
         </p:nvSpPr>
@@ -5988,7 +8214,7 @@
       </p:sp>
       <p:sp>
         <p:nvSpPr>
-          <p:cNvPr id="10" name="Text 8"/>
+          <p:cNvPr id="10" name="pt:HfTjtCINalC5"/>
           <p:cNvSpPr/>
           <p:nvPr/>
         </p:nvSpPr>
@@ -6030,7 +8256,7 @@
       </p:sp>
       <p:sp>
         <p:nvSpPr>
-          <p:cNvPr id="11" name="Text 9"/>
+          <p:cNvPr id="11" name="pt:dU_BVizP0juT"/>
           <p:cNvSpPr/>
           <p:nvPr/>
         </p:nvSpPr>
@@ -6124,6 +8350,541 @@
   <p:clrMapOvr>
     <a:masterClrMapping/>
   </p:clrMapOvr>
+  <p:transition spd="fast">
+    <p:zoom dir="in"/>
+  </p:transition>
+  <p:timing>
+    <p:tnLst>
+      <p:par>
+        <p:cTn id="1" dur="indefinite" restart="never" nodeType="tmRoot">
+          <p:childTnLst>
+            <p:seq concurrent="1" nextAc="seek">
+              <p:cTn id="2" dur="indefinite" nodeType="mainSeq">
+                <p:childTnLst>
+                  <p:par>
+                    <p:cTn id="3" fill="hold">
+                      <p:stCondLst>
+                        <p:cond delay="indefinite"/>
+                        <p:cond evt="onBegin" delay="0">
+                          <p:tn val="2"/>
+                        </p:cond>
+                      </p:stCondLst>
+                      <p:childTnLst>
+                        <p:par>
+                          <p:cTn id="4" fill="hold">
+                            <p:stCondLst>
+                              <p:cond delay="0"/>
+                            </p:stCondLst>
+                            <p:childTnLst>
+                              <p:par>
+                                <p:cTn id="8" presetID="53" presetClass="entr" presetSubtype="16" fill="hold" decel="100000" nodeType="afterEffect">
+                                  <p:stCondLst>
+                                    <p:cond delay="0"/>
+                                  </p:stCondLst>
+                                  <p:childTnLst>
+                                    <p:set>
+                                      <p:cBhvr>
+                                        <p:cTn id="5" dur="1" fill="hold">
+                                          <p:stCondLst>
+                                            <p:cond delay="0"/>
+                                          </p:stCondLst>
+                                        </p:cTn>
+                                        <p:tgtEl>
+                                          <p:spTgt spid="3"/>
+                                        </p:tgtEl>
+                                        <p:attrNameLst>
+                                          <p:attrName>style.visibility</p:attrName>
+                                        </p:attrNameLst>
+                                      </p:cBhvr>
+                                      <p:to>
+                                        <p:strVal val="visible"/>
+                                      </p:to>
+                                    </p:set>
+                                    <p:animEffect transition="in" filter="fade">
+                                      <p:cBhvr>
+                                        <p:cTn id="6" dur="450"/>
+                                        <p:tgtEl>
+                                          <p:spTgt spid="3"/>
+                                        </p:tgtEl>
+                                      </p:cBhvr>
+                                    </p:animEffect>
+                                    <p:animScale>
+                                      <p:cBhvr>
+                                        <p:cTn id="7" dur="450" fill="hold"/>
+                                        <p:tgtEl>
+                                          <p:spTgt spid="3"/>
+                                        </p:tgtEl>
+                                      </p:cBhvr>
+                                      <p:from x="88000" y="88000"/>
+                                      <p:to x="100000" y="100000"/>
+                                    </p:animScale>
+                                  </p:childTnLst>
+                                </p:cTn>
+                              </p:par>
+                              <p:par>
+                                <p:cTn id="12" presetID="53" presetClass="entr" presetSubtype="16" fill="hold" decel="100000" nodeType="withEffect">
+                                  <p:stCondLst>
+                                    <p:cond delay="100"/>
+                                  </p:stCondLst>
+                                  <p:childTnLst>
+                                    <p:set>
+                                      <p:cBhvr>
+                                        <p:cTn id="9" dur="1" fill="hold">
+                                          <p:stCondLst>
+                                            <p:cond delay="0"/>
+                                          </p:stCondLst>
+                                        </p:cTn>
+                                        <p:tgtEl>
+                                          <p:spTgt spid="5"/>
+                                        </p:tgtEl>
+                                        <p:attrNameLst>
+                                          <p:attrName>style.visibility</p:attrName>
+                                        </p:attrNameLst>
+                                      </p:cBhvr>
+                                      <p:to>
+                                        <p:strVal val="visible"/>
+                                      </p:to>
+                                    </p:set>
+                                    <p:animEffect transition="in" filter="fade">
+                                      <p:cBhvr>
+                                        <p:cTn id="10" dur="450"/>
+                                        <p:tgtEl>
+                                          <p:spTgt spid="5"/>
+                                        </p:tgtEl>
+                                      </p:cBhvr>
+                                    </p:animEffect>
+                                    <p:animScale>
+                                      <p:cBhvr>
+                                        <p:cTn id="11" dur="450" fill="hold"/>
+                                        <p:tgtEl>
+                                          <p:spTgt spid="5"/>
+                                        </p:tgtEl>
+                                      </p:cBhvr>
+                                      <p:from x="88000" y="88000"/>
+                                      <p:to x="100000" y="100000"/>
+                                    </p:animScale>
+                                  </p:childTnLst>
+                                </p:cTn>
+                              </p:par>
+                              <p:par>
+                                <p:cTn id="16" presetID="53" presetClass="entr" presetSubtype="16" fill="hold" decel="100000" grpId="0" nodeType="withEffect">
+                                  <p:stCondLst>
+                                    <p:cond delay="200"/>
+                                  </p:stCondLst>
+                                  <p:childTnLst>
+                                    <p:set>
+                                      <p:cBhvr>
+                                        <p:cTn id="13" dur="1" fill="hold">
+                                          <p:stCondLst>
+                                            <p:cond delay="0"/>
+                                          </p:stCondLst>
+                                        </p:cTn>
+                                        <p:tgtEl>
+                                          <p:spTgt spid="7">
+                                            <p:txEl>
+                                              <p:pRg st="0" end="0"/>
+                                            </p:txEl>
+                                          </p:spTgt>
+                                        </p:tgtEl>
+                                        <p:attrNameLst>
+                                          <p:attrName>style.visibility</p:attrName>
+                                        </p:attrNameLst>
+                                      </p:cBhvr>
+                                      <p:to>
+                                        <p:strVal val="visible"/>
+                                      </p:to>
+                                    </p:set>
+                                    <p:animEffect transition="in" filter="fade">
+                                      <p:cBhvr>
+                                        <p:cTn id="14" dur="450"/>
+                                        <p:tgtEl>
+                                          <p:spTgt spid="7">
+                                            <p:txEl>
+                                              <p:pRg st="0" end="0"/>
+                                            </p:txEl>
+                                          </p:spTgt>
+                                        </p:tgtEl>
+                                      </p:cBhvr>
+                                    </p:animEffect>
+                                    <p:animScale>
+                                      <p:cBhvr>
+                                        <p:cTn id="15" dur="450" fill="hold"/>
+                                        <p:tgtEl>
+                                          <p:spTgt spid="7">
+                                            <p:txEl>
+                                              <p:pRg st="0" end="0"/>
+                                            </p:txEl>
+                                          </p:spTgt>
+                                        </p:tgtEl>
+                                      </p:cBhvr>
+                                      <p:from x="88000" y="88000"/>
+                                      <p:to x="100000" y="100000"/>
+                                    </p:animScale>
+                                  </p:childTnLst>
+                                </p:cTn>
+                              </p:par>
+                              <p:par>
+                                <p:cTn id="20" presetID="53" presetClass="entr" presetSubtype="16" fill="hold" decel="100000" grpId="0" nodeType="withEffect">
+                                  <p:stCondLst>
+                                    <p:cond delay="280"/>
+                                  </p:stCondLst>
+                                  <p:childTnLst>
+                                    <p:set>
+                                      <p:cBhvr>
+                                        <p:cTn id="17" dur="1" fill="hold">
+                                          <p:stCondLst>
+                                            <p:cond delay="0"/>
+                                          </p:stCondLst>
+                                        </p:cTn>
+                                        <p:tgtEl>
+                                          <p:spTgt spid="7">
+                                            <p:txEl>
+                                              <p:pRg st="1" end="1"/>
+                                            </p:txEl>
+                                          </p:spTgt>
+                                        </p:tgtEl>
+                                        <p:attrNameLst>
+                                          <p:attrName>style.visibility</p:attrName>
+                                        </p:attrNameLst>
+                                      </p:cBhvr>
+                                      <p:to>
+                                        <p:strVal val="visible"/>
+                                      </p:to>
+                                    </p:set>
+                                    <p:animEffect transition="in" filter="fade">
+                                      <p:cBhvr>
+                                        <p:cTn id="18" dur="450"/>
+                                        <p:tgtEl>
+                                          <p:spTgt spid="7">
+                                            <p:txEl>
+                                              <p:pRg st="1" end="1"/>
+                                            </p:txEl>
+                                          </p:spTgt>
+                                        </p:tgtEl>
+                                      </p:cBhvr>
+                                    </p:animEffect>
+                                    <p:animScale>
+                                      <p:cBhvr>
+                                        <p:cTn id="19" dur="450" fill="hold"/>
+                                        <p:tgtEl>
+                                          <p:spTgt spid="7">
+                                            <p:txEl>
+                                              <p:pRg st="1" end="1"/>
+                                            </p:txEl>
+                                          </p:spTgt>
+                                        </p:tgtEl>
+                                      </p:cBhvr>
+                                      <p:from x="88000" y="88000"/>
+                                      <p:to x="100000" y="100000"/>
+                                    </p:animScale>
+                                  </p:childTnLst>
+                                </p:cTn>
+                              </p:par>
+                              <p:par>
+                                <p:cTn id="24" presetID="53" presetClass="entr" presetSubtype="16" fill="hold" decel="100000" grpId="0" nodeType="withEffect">
+                                  <p:stCondLst>
+                                    <p:cond delay="360"/>
+                                  </p:stCondLst>
+                                  <p:childTnLst>
+                                    <p:set>
+                                      <p:cBhvr>
+                                        <p:cTn id="21" dur="1" fill="hold">
+                                          <p:stCondLst>
+                                            <p:cond delay="0"/>
+                                          </p:stCondLst>
+                                        </p:cTn>
+                                        <p:tgtEl>
+                                          <p:spTgt spid="7">
+                                            <p:txEl>
+                                              <p:pRg st="2" end="2"/>
+                                            </p:txEl>
+                                          </p:spTgt>
+                                        </p:tgtEl>
+                                        <p:attrNameLst>
+                                          <p:attrName>style.visibility</p:attrName>
+                                        </p:attrNameLst>
+                                      </p:cBhvr>
+                                      <p:to>
+                                        <p:strVal val="visible"/>
+                                      </p:to>
+                                    </p:set>
+                                    <p:animEffect transition="in" filter="fade">
+                                      <p:cBhvr>
+                                        <p:cTn id="22" dur="450"/>
+                                        <p:tgtEl>
+                                          <p:spTgt spid="7">
+                                            <p:txEl>
+                                              <p:pRg st="2" end="2"/>
+                                            </p:txEl>
+                                          </p:spTgt>
+                                        </p:tgtEl>
+                                      </p:cBhvr>
+                                    </p:animEffect>
+                                    <p:animScale>
+                                      <p:cBhvr>
+                                        <p:cTn id="23" dur="450" fill="hold"/>
+                                        <p:tgtEl>
+                                          <p:spTgt spid="7">
+                                            <p:txEl>
+                                              <p:pRg st="2" end="2"/>
+                                            </p:txEl>
+                                          </p:spTgt>
+                                        </p:tgtEl>
+                                      </p:cBhvr>
+                                      <p:from x="88000" y="88000"/>
+                                      <p:to x="100000" y="100000"/>
+                                    </p:animScale>
+                                  </p:childTnLst>
+                                </p:cTn>
+                              </p:par>
+                              <p:par>
+                                <p:cTn id="28" presetID="53" presetClass="entr" presetSubtype="16" fill="hold" decel="100000" nodeType="withEffect">
+                                  <p:stCondLst>
+                                    <p:cond delay="300"/>
+                                  </p:stCondLst>
+                                  <p:childTnLst>
+                                    <p:set>
+                                      <p:cBhvr>
+                                        <p:cTn id="25" dur="1" fill="hold">
+                                          <p:stCondLst>
+                                            <p:cond delay="0"/>
+                                          </p:stCondLst>
+                                        </p:cTn>
+                                        <p:tgtEl>
+                                          <p:spTgt spid="9"/>
+                                        </p:tgtEl>
+                                        <p:attrNameLst>
+                                          <p:attrName>style.visibility</p:attrName>
+                                        </p:attrNameLst>
+                                      </p:cBhvr>
+                                      <p:to>
+                                        <p:strVal val="visible"/>
+                                      </p:to>
+                                    </p:set>
+                                    <p:animEffect transition="in" filter="fade">
+                                      <p:cBhvr>
+                                        <p:cTn id="26" dur="450"/>
+                                        <p:tgtEl>
+                                          <p:spTgt spid="9"/>
+                                        </p:tgtEl>
+                                      </p:cBhvr>
+                                    </p:animEffect>
+                                    <p:animScale>
+                                      <p:cBhvr>
+                                        <p:cTn id="27" dur="450" fill="hold"/>
+                                        <p:tgtEl>
+                                          <p:spTgt spid="9"/>
+                                        </p:tgtEl>
+                                      </p:cBhvr>
+                                      <p:from x="88000" y="88000"/>
+                                      <p:to x="100000" y="100000"/>
+                                    </p:animScale>
+                                  </p:childTnLst>
+                                </p:cTn>
+                              </p:par>
+                              <p:par>
+                                <p:cTn id="32" presetID="53" presetClass="entr" presetSubtype="16" fill="hold" decel="100000" grpId="0" nodeType="withEffect">
+                                  <p:stCondLst>
+                                    <p:cond delay="400"/>
+                                  </p:stCondLst>
+                                  <p:childTnLst>
+                                    <p:set>
+                                      <p:cBhvr>
+                                        <p:cTn id="29" dur="1" fill="hold">
+                                          <p:stCondLst>
+                                            <p:cond delay="0"/>
+                                          </p:stCondLst>
+                                        </p:cTn>
+                                        <p:tgtEl>
+                                          <p:spTgt spid="11">
+                                            <p:txEl>
+                                              <p:pRg st="0" end="0"/>
+                                            </p:txEl>
+                                          </p:spTgt>
+                                        </p:tgtEl>
+                                        <p:attrNameLst>
+                                          <p:attrName>style.visibility</p:attrName>
+                                        </p:attrNameLst>
+                                      </p:cBhvr>
+                                      <p:to>
+                                        <p:strVal val="visible"/>
+                                      </p:to>
+                                    </p:set>
+                                    <p:animEffect transition="in" filter="fade">
+                                      <p:cBhvr>
+                                        <p:cTn id="30" dur="450"/>
+                                        <p:tgtEl>
+                                          <p:spTgt spid="11">
+                                            <p:txEl>
+                                              <p:pRg st="0" end="0"/>
+                                            </p:txEl>
+                                          </p:spTgt>
+                                        </p:tgtEl>
+                                      </p:cBhvr>
+                                    </p:animEffect>
+                                    <p:animScale>
+                                      <p:cBhvr>
+                                        <p:cTn id="31" dur="450" fill="hold"/>
+                                        <p:tgtEl>
+                                          <p:spTgt spid="11">
+                                            <p:txEl>
+                                              <p:pRg st="0" end="0"/>
+                                            </p:txEl>
+                                          </p:spTgt>
+                                        </p:tgtEl>
+                                      </p:cBhvr>
+                                      <p:from x="88000" y="88000"/>
+                                      <p:to x="100000" y="100000"/>
+                                    </p:animScale>
+                                  </p:childTnLst>
+                                </p:cTn>
+                              </p:par>
+                              <p:par>
+                                <p:cTn id="36" presetID="53" presetClass="entr" presetSubtype="16" fill="hold" decel="100000" grpId="0" nodeType="withEffect">
+                                  <p:stCondLst>
+                                    <p:cond delay="480"/>
+                                  </p:stCondLst>
+                                  <p:childTnLst>
+                                    <p:set>
+                                      <p:cBhvr>
+                                        <p:cTn id="33" dur="1" fill="hold">
+                                          <p:stCondLst>
+                                            <p:cond delay="0"/>
+                                          </p:stCondLst>
+                                        </p:cTn>
+                                        <p:tgtEl>
+                                          <p:spTgt spid="11">
+                                            <p:txEl>
+                                              <p:pRg st="1" end="1"/>
+                                            </p:txEl>
+                                          </p:spTgt>
+                                        </p:tgtEl>
+                                        <p:attrNameLst>
+                                          <p:attrName>style.visibility</p:attrName>
+                                        </p:attrNameLst>
+                                      </p:cBhvr>
+                                      <p:to>
+                                        <p:strVal val="visible"/>
+                                      </p:to>
+                                    </p:set>
+                                    <p:animEffect transition="in" filter="fade">
+                                      <p:cBhvr>
+                                        <p:cTn id="34" dur="450"/>
+                                        <p:tgtEl>
+                                          <p:spTgt spid="11">
+                                            <p:txEl>
+                                              <p:pRg st="1" end="1"/>
+                                            </p:txEl>
+                                          </p:spTgt>
+                                        </p:tgtEl>
+                                      </p:cBhvr>
+                                    </p:animEffect>
+                                    <p:animScale>
+                                      <p:cBhvr>
+                                        <p:cTn id="35" dur="450" fill="hold"/>
+                                        <p:tgtEl>
+                                          <p:spTgt spid="11">
+                                            <p:txEl>
+                                              <p:pRg st="1" end="1"/>
+                                            </p:txEl>
+                                          </p:spTgt>
+                                        </p:tgtEl>
+                                      </p:cBhvr>
+                                      <p:from x="88000" y="88000"/>
+                                      <p:to x="100000" y="100000"/>
+                                    </p:animScale>
+                                  </p:childTnLst>
+                                </p:cTn>
+                              </p:par>
+                              <p:par>
+                                <p:cTn id="40" presetID="53" presetClass="entr" presetSubtype="16" fill="hold" decel="100000" grpId="0" nodeType="withEffect">
+                                  <p:stCondLst>
+                                    <p:cond delay="560"/>
+                                  </p:stCondLst>
+                                  <p:childTnLst>
+                                    <p:set>
+                                      <p:cBhvr>
+                                        <p:cTn id="37" dur="1" fill="hold">
+                                          <p:stCondLst>
+                                            <p:cond delay="0"/>
+                                          </p:stCondLst>
+                                        </p:cTn>
+                                        <p:tgtEl>
+                                          <p:spTgt spid="11">
+                                            <p:txEl>
+                                              <p:pRg st="2" end="2"/>
+                                            </p:txEl>
+                                          </p:spTgt>
+                                        </p:tgtEl>
+                                        <p:attrNameLst>
+                                          <p:attrName>style.visibility</p:attrName>
+                                        </p:attrNameLst>
+                                      </p:cBhvr>
+                                      <p:to>
+                                        <p:strVal val="visible"/>
+                                      </p:to>
+                                    </p:set>
+                                    <p:animEffect transition="in" filter="fade">
+                                      <p:cBhvr>
+                                        <p:cTn id="38" dur="450"/>
+                                        <p:tgtEl>
+                                          <p:spTgt spid="11">
+                                            <p:txEl>
+                                              <p:pRg st="2" end="2"/>
+                                            </p:txEl>
+                                          </p:spTgt>
+                                        </p:tgtEl>
+                                      </p:cBhvr>
+                                    </p:animEffect>
+                                    <p:animScale>
+                                      <p:cBhvr>
+                                        <p:cTn id="39" dur="450" fill="hold"/>
+                                        <p:tgtEl>
+                                          <p:spTgt spid="11">
+                                            <p:txEl>
+                                              <p:pRg st="2" end="2"/>
+                                            </p:txEl>
+                                          </p:spTgt>
+                                        </p:tgtEl>
+                                      </p:cBhvr>
+                                      <p:from x="88000" y="88000"/>
+                                      <p:to x="100000" y="100000"/>
+                                    </p:animScale>
+                                  </p:childTnLst>
+                                </p:cTn>
+                              </p:par>
+                            </p:childTnLst>
+                          </p:cTn>
+                        </p:par>
+                      </p:childTnLst>
+                    </p:cTn>
+                  </p:par>
+                </p:childTnLst>
+              </p:cTn>
+              <p:prevCondLst>
+                <p:cond evt="onPrev" delay="0">
+                  <p:tgtEl>
+                    <p:sldTgt/>
+                  </p:tgtEl>
+                </p:cond>
+              </p:prevCondLst>
+              <p:nextCondLst>
+                <p:cond evt="onNext" delay="0">
+                  <p:tgtEl>
+                    <p:sldTgt/>
+                  </p:tgtEl>
+                </p:cond>
+              </p:nextCondLst>
+            </p:seq>
+          </p:childTnLst>
+        </p:cTn>
+      </p:par>
+    </p:tnLst>
+    <p:bldLst>
+      <p:bldP spid="7" grpId="0" build="p"/>
+      <p:bldP spid="11" grpId="0" build="p"/>
+    </p:bldLst>
+  </p:timing>
 </p:sld>
 </file>
 
@@ -6153,7 +8914,7 @@
       </p:grpSpPr>
       <p:sp>
         <p:nvSpPr>
-          <p:cNvPr id="2" name="Shape 0"/>
+          <p:cNvPr id="2" name="pt:aPQviOdXFpoh"/>
           <p:cNvSpPr/>
           <p:nvPr/>
         </p:nvSpPr>
@@ -6173,7 +8934,7 @@
       </p:sp>
       <p:sp>
         <p:nvSpPr>
-          <p:cNvPr id="3" name="Text 1"/>
+          <p:cNvPr id="3" name="pt:smTTVt9M4xGR"/>
           <p:cNvSpPr/>
           <p:nvPr/>
         </p:nvSpPr>
@@ -6232,7 +8993,7 @@
       </p:sp>
       <p:sp>
         <p:nvSpPr>
-          <p:cNvPr id="4" name="Shape 2"/>
+          <p:cNvPr id="4" name="pt:HhvV79Z-C4T6"/>
           <p:cNvSpPr/>
           <p:nvPr/>
         </p:nvSpPr>
@@ -6245,14 +9006,14 @@
             <a:avLst/>
           </a:prstGeom>
           <a:solidFill>
-            <a:srgbClr val="7474F3"/>
+            <a:srgbClr val="404087"/>
           </a:solidFill>
           <a:ln/>
         </p:spPr>
       </p:sp>
       <p:sp>
         <p:nvSpPr>
-          <p:cNvPr id="5" name="Text 3"/>
+          <p:cNvPr id="5" name="pt:aaQlGKiF1CsR"/>
           <p:cNvSpPr/>
           <p:nvPr/>
         </p:nvSpPr>
@@ -6280,7 +9041,7 @@
             <a:r>
               <a:rPr lang="en-US" sz="1500" b="1" dirty="0">
                 <a:solidFill>
-                  <a:srgbClr val="0B0F1A"/>
+                  <a:srgbClr val="FFFFFF"/>
                 </a:solidFill>
                 <a:latin typeface="Space Grotesk" pitchFamily="34" charset="0"/>
                 <a:ea typeface="Space Grotesk" pitchFamily="34" charset="-122"/>
@@ -6294,7 +9055,7 @@
       </p:sp>
       <p:sp>
         <p:nvSpPr>
-          <p:cNvPr id="6" name="Shape 4"/>
+          <p:cNvPr id="6" name="pt:R8t92yZ-S9YO"/>
           <p:cNvSpPr/>
           <p:nvPr/>
         </p:nvSpPr>
@@ -6318,7 +9079,7 @@
       </p:sp>
       <p:sp>
         <p:nvSpPr>
-          <p:cNvPr id="7" name="Shape 5"/>
+          <p:cNvPr id="7" name="pt:-JMNG17gOK2x"/>
           <p:cNvSpPr/>
           <p:nvPr/>
         </p:nvSpPr>
@@ -6345,7 +9106,7 @@
       </p:sp>
       <p:sp>
         <p:nvSpPr>
-          <p:cNvPr id="8" name="Text 6"/>
+          <p:cNvPr id="8" name="pt:qwEKCV12ZkyZ"/>
           <p:cNvSpPr/>
           <p:nvPr/>
         </p:nvSpPr>
@@ -6387,7 +9148,7 @@
       </p:sp>
       <p:sp>
         <p:nvSpPr>
-          <p:cNvPr id="9" name="Text 7"/>
+          <p:cNvPr id="9" name="pt:7MUcYgHsTs2B"/>
           <p:cNvSpPr/>
           <p:nvPr/>
         </p:nvSpPr>
@@ -6454,7 +9215,7 @@
       </p:sp>
       <p:sp>
         <p:nvSpPr>
-          <p:cNvPr id="10" name="Shape 8"/>
+          <p:cNvPr id="10" name="pt:L1R2B42LKYoy"/>
           <p:cNvSpPr/>
           <p:nvPr/>
         </p:nvSpPr>
@@ -6467,14 +9228,14 @@
             <a:avLst/>
           </a:prstGeom>
           <a:solidFill>
-            <a:srgbClr val="5994F1"/>
+            <a:srgbClr val="5151AB"/>
           </a:solidFill>
           <a:ln/>
         </p:spPr>
       </p:sp>
       <p:sp>
         <p:nvSpPr>
-          <p:cNvPr id="11" name="Text 9"/>
+          <p:cNvPr id="11" name="pt:Cm2AYFqsu82b"/>
           <p:cNvSpPr/>
           <p:nvPr/>
         </p:nvSpPr>
@@ -6502,7 +9263,7 @@
             <a:r>
               <a:rPr lang="en-US" sz="1500" b="1" dirty="0">
                 <a:solidFill>
-                  <a:srgbClr val="0B0F1A"/>
+                  <a:srgbClr val="FFFFFF"/>
                 </a:solidFill>
                 <a:latin typeface="Space Grotesk" pitchFamily="34" charset="0"/>
                 <a:ea typeface="Space Grotesk" pitchFamily="34" charset="-122"/>
@@ -6516,7 +9277,7 @@
       </p:sp>
       <p:sp>
         <p:nvSpPr>
-          <p:cNvPr id="12" name="Shape 10"/>
+          <p:cNvPr id="12" name="pt:kv3LcsALyQeM"/>
           <p:cNvSpPr/>
           <p:nvPr/>
         </p:nvSpPr>
@@ -6540,7 +9301,7 @@
       </p:sp>
       <p:sp>
         <p:nvSpPr>
-          <p:cNvPr id="13" name="Shape 11"/>
+          <p:cNvPr id="13" name="pt:NVM0t9kPIdic"/>
           <p:cNvSpPr/>
           <p:nvPr/>
         </p:nvSpPr>
@@ -6567,7 +9328,7 @@
       </p:sp>
       <p:sp>
         <p:nvSpPr>
-          <p:cNvPr id="14" name="Text 12"/>
+          <p:cNvPr id="14" name="pt:sw8ELUZ9QSVT"/>
           <p:cNvSpPr/>
           <p:nvPr/>
         </p:nvSpPr>
@@ -6609,7 +9370,7 @@
       </p:sp>
       <p:sp>
         <p:nvSpPr>
-          <p:cNvPr id="15" name="Text 13"/>
+          <p:cNvPr id="15" name="pt:-JOKWHtt7nAr"/>
           <p:cNvSpPr/>
           <p:nvPr/>
         </p:nvSpPr>
@@ -6676,7 +9437,7 @@
       </p:sp>
       <p:sp>
         <p:nvSpPr>
-          <p:cNvPr id="16" name="Shape 14"/>
+          <p:cNvPr id="16" name="pt:XEBjHHjbw9OZ"/>
           <p:cNvSpPr/>
           <p:nvPr/>
         </p:nvSpPr>
@@ -6689,14 +9450,14 @@
             <a:avLst/>
           </a:prstGeom>
           <a:solidFill>
-            <a:srgbClr val="3DB3F0"/>
+            <a:srgbClr val="6363CF"/>
           </a:solidFill>
           <a:ln/>
         </p:spPr>
       </p:sp>
       <p:sp>
         <p:nvSpPr>
-          <p:cNvPr id="17" name="Text 15"/>
+          <p:cNvPr id="17" name="pt:5ii85dL59q4X"/>
           <p:cNvSpPr/>
           <p:nvPr/>
         </p:nvSpPr>
@@ -6724,7 +9485,7 @@
             <a:r>
               <a:rPr lang="en-US" sz="1500" b="1" dirty="0">
                 <a:solidFill>
-                  <a:srgbClr val="0B0F1A"/>
+                  <a:srgbClr val="FFFFFF"/>
                 </a:solidFill>
                 <a:latin typeface="Space Grotesk" pitchFamily="34" charset="0"/>
                 <a:ea typeface="Space Grotesk" pitchFamily="34" charset="-122"/>
@@ -6738,7 +9499,7 @@
       </p:sp>
       <p:sp>
         <p:nvSpPr>
-          <p:cNvPr id="18" name="Shape 16"/>
+          <p:cNvPr id="18" name="pt:R1Fqq9VB7eXy"/>
           <p:cNvSpPr/>
           <p:nvPr/>
         </p:nvSpPr>
@@ -6762,7 +9523,7 @@
       </p:sp>
       <p:sp>
         <p:nvSpPr>
-          <p:cNvPr id="19" name="Shape 17"/>
+          <p:cNvPr id="19" name="pt:GZz1KeToGcMm"/>
           <p:cNvSpPr/>
           <p:nvPr/>
         </p:nvSpPr>
@@ -6789,7 +9550,7 @@
       </p:sp>
       <p:sp>
         <p:nvSpPr>
-          <p:cNvPr id="20" name="Text 18"/>
+          <p:cNvPr id="20" name="pt:8vbyFWVUGK45"/>
           <p:cNvSpPr/>
           <p:nvPr/>
         </p:nvSpPr>
@@ -6831,7 +9592,7 @@
       </p:sp>
       <p:sp>
         <p:nvSpPr>
-          <p:cNvPr id="21" name="Text 19"/>
+          <p:cNvPr id="21" name="pt:R0709yGfHDm3"/>
           <p:cNvSpPr/>
           <p:nvPr/>
         </p:nvSpPr>
@@ -6898,7 +9659,7 @@
       </p:sp>
       <p:sp>
         <p:nvSpPr>
-          <p:cNvPr id="22" name="Shape 20"/>
+          <p:cNvPr id="22" name="pt:OK5SopXgc-D1"/>
           <p:cNvSpPr/>
           <p:nvPr/>
         </p:nvSpPr>
@@ -6911,14 +9672,14 @@
             <a:avLst/>
           </a:prstGeom>
           <a:solidFill>
-            <a:srgbClr val="22D3EE"/>
+            <a:srgbClr val="7474F3"/>
           </a:solidFill>
           <a:ln/>
         </p:spPr>
       </p:sp>
       <p:sp>
         <p:nvSpPr>
-          <p:cNvPr id="23" name="Text 21"/>
+          <p:cNvPr id="23" name="pt:8Hb0qLljmXsH"/>
           <p:cNvSpPr/>
           <p:nvPr/>
         </p:nvSpPr>
@@ -6960,7 +9721,7 @@
       </p:sp>
       <p:sp>
         <p:nvSpPr>
-          <p:cNvPr id="24" name="Shape 22"/>
+          <p:cNvPr id="24" name="pt:qBcuPkYHeF_J"/>
           <p:cNvSpPr/>
           <p:nvPr/>
         </p:nvSpPr>
@@ -6984,7 +9745,7 @@
       </p:sp>
       <p:sp>
         <p:nvSpPr>
-          <p:cNvPr id="25" name="Shape 23"/>
+          <p:cNvPr id="25" name="pt:FMguB37C1JYY"/>
           <p:cNvSpPr/>
           <p:nvPr/>
         </p:nvSpPr>
@@ -7011,7 +9772,7 @@
       </p:sp>
       <p:sp>
         <p:nvSpPr>
-          <p:cNvPr id="26" name="Text 24"/>
+          <p:cNvPr id="26" name="pt:BEk6UBnVPGUG"/>
           <p:cNvSpPr/>
           <p:nvPr/>
         </p:nvSpPr>
@@ -7053,7 +9814,7 @@
       </p:sp>
       <p:sp>
         <p:nvSpPr>
-          <p:cNvPr id="27" name="Text 25"/>
+          <p:cNvPr id="27" name="pt:YJ7m0Wh5skV1"/>
           <p:cNvSpPr/>
           <p:nvPr/>
         </p:nvSpPr>
@@ -7123,6 +9884,927 @@
   <p:clrMapOvr>
     <a:masterClrMapping/>
   </p:clrMapOvr>
+  <p:transition spd="fast">
+    <p:zoom dir="in"/>
+  </p:transition>
+  <p:timing>
+    <p:tnLst>
+      <p:par>
+        <p:cTn id="1" dur="indefinite" restart="never" nodeType="tmRoot">
+          <p:childTnLst>
+            <p:seq concurrent="1" nextAc="seek">
+              <p:cTn id="2" dur="indefinite" nodeType="mainSeq">
+                <p:childTnLst>
+                  <p:par>
+                    <p:cTn id="3" fill="hold">
+                      <p:stCondLst>
+                        <p:cond delay="indefinite"/>
+                        <p:cond evt="onBegin" delay="0">
+                          <p:tn val="2"/>
+                        </p:cond>
+                      </p:stCondLst>
+                      <p:childTnLst>
+                        <p:par>
+                          <p:cTn id="4" fill="hold">
+                            <p:stCondLst>
+                              <p:cond delay="0"/>
+                            </p:stCondLst>
+                            <p:childTnLst>
+                              <p:par>
+                                <p:cTn id="8" presetID="53" presetClass="entr" presetSubtype="16" fill="hold" decel="100000" nodeType="afterEffect">
+                                  <p:stCondLst>
+                                    <p:cond delay="0"/>
+                                  </p:stCondLst>
+                                  <p:childTnLst>
+                                    <p:set>
+                                      <p:cBhvr>
+                                        <p:cTn id="5" dur="1" fill="hold">
+                                          <p:stCondLst>
+                                            <p:cond delay="0"/>
+                                          </p:stCondLst>
+                                        </p:cTn>
+                                        <p:tgtEl>
+                                          <p:spTgt spid="3"/>
+                                        </p:tgtEl>
+                                        <p:attrNameLst>
+                                          <p:attrName>style.visibility</p:attrName>
+                                        </p:attrNameLst>
+                                      </p:cBhvr>
+                                      <p:to>
+                                        <p:strVal val="visible"/>
+                                      </p:to>
+                                    </p:set>
+                                    <p:animEffect transition="in" filter="fade">
+                                      <p:cBhvr>
+                                        <p:cTn id="6" dur="450"/>
+                                        <p:tgtEl>
+                                          <p:spTgt spid="3"/>
+                                        </p:tgtEl>
+                                      </p:cBhvr>
+                                    </p:animEffect>
+                                    <p:animScale>
+                                      <p:cBhvr>
+                                        <p:cTn id="7" dur="450" fill="hold"/>
+                                        <p:tgtEl>
+                                          <p:spTgt spid="3"/>
+                                        </p:tgtEl>
+                                      </p:cBhvr>
+                                      <p:from x="88000" y="88000"/>
+                                      <p:to x="100000" y="100000"/>
+                                    </p:animScale>
+                                  </p:childTnLst>
+                                </p:cTn>
+                              </p:par>
+                              <p:par>
+                                <p:cTn id="12" presetID="53" presetClass="entr" presetSubtype="16" fill="hold" decel="100000" nodeType="withEffect">
+                                  <p:stCondLst>
+                                    <p:cond delay="55"/>
+                                  </p:stCondLst>
+                                  <p:childTnLst>
+                                    <p:set>
+                                      <p:cBhvr>
+                                        <p:cTn id="9" dur="1" fill="hold">
+                                          <p:stCondLst>
+                                            <p:cond delay="0"/>
+                                          </p:stCondLst>
+                                        </p:cTn>
+                                        <p:tgtEl>
+                                          <p:spTgt spid="4"/>
+                                        </p:tgtEl>
+                                        <p:attrNameLst>
+                                          <p:attrName>style.visibility</p:attrName>
+                                        </p:attrNameLst>
+                                      </p:cBhvr>
+                                      <p:to>
+                                        <p:strVal val="visible"/>
+                                      </p:to>
+                                    </p:set>
+                                    <p:animEffect transition="in" filter="fade">
+                                      <p:cBhvr>
+                                        <p:cTn id="10" dur="450"/>
+                                        <p:tgtEl>
+                                          <p:spTgt spid="4"/>
+                                        </p:tgtEl>
+                                      </p:cBhvr>
+                                    </p:animEffect>
+                                    <p:animScale>
+                                      <p:cBhvr>
+                                        <p:cTn id="11" dur="450" fill="hold"/>
+                                        <p:tgtEl>
+                                          <p:spTgt spid="4"/>
+                                        </p:tgtEl>
+                                      </p:cBhvr>
+                                      <p:from x="88000" y="88000"/>
+                                      <p:to x="100000" y="100000"/>
+                                    </p:animScale>
+                                  </p:childTnLst>
+                                </p:cTn>
+                              </p:par>
+                              <p:par>
+                                <p:cTn id="16" presetID="53" presetClass="entr" presetSubtype="16" fill="hold" decel="100000" nodeType="withEffect">
+                                  <p:stCondLst>
+                                    <p:cond delay="109"/>
+                                  </p:stCondLst>
+                                  <p:childTnLst>
+                                    <p:set>
+                                      <p:cBhvr>
+                                        <p:cTn id="13" dur="1" fill="hold">
+                                          <p:stCondLst>
+                                            <p:cond delay="0"/>
+                                          </p:stCondLst>
+                                        </p:cTn>
+                                        <p:tgtEl>
+                                          <p:spTgt spid="7"/>
+                                        </p:tgtEl>
+                                        <p:attrNameLst>
+                                          <p:attrName>style.visibility</p:attrName>
+                                        </p:attrNameLst>
+                                      </p:cBhvr>
+                                      <p:to>
+                                        <p:strVal val="visible"/>
+                                      </p:to>
+                                    </p:set>
+                                    <p:animEffect transition="in" filter="fade">
+                                      <p:cBhvr>
+                                        <p:cTn id="14" dur="450"/>
+                                        <p:tgtEl>
+                                          <p:spTgt spid="7"/>
+                                        </p:tgtEl>
+                                      </p:cBhvr>
+                                    </p:animEffect>
+                                    <p:animScale>
+                                      <p:cBhvr>
+                                        <p:cTn id="15" dur="450" fill="hold"/>
+                                        <p:tgtEl>
+                                          <p:spTgt spid="7"/>
+                                        </p:tgtEl>
+                                      </p:cBhvr>
+                                      <p:from x="88000" y="88000"/>
+                                      <p:to x="100000" y="100000"/>
+                                    </p:animScale>
+                                  </p:childTnLst>
+                                </p:cTn>
+                              </p:par>
+                              <p:par>
+                                <p:cTn id="20" presetID="53" presetClass="entr" presetSubtype="16" fill="hold" decel="100000" grpId="0" nodeType="withEffect">
+                                  <p:stCondLst>
+                                    <p:cond delay="164"/>
+                                  </p:stCondLst>
+                                  <p:childTnLst>
+                                    <p:set>
+                                      <p:cBhvr>
+                                        <p:cTn id="17" dur="1" fill="hold">
+                                          <p:stCondLst>
+                                            <p:cond delay="0"/>
+                                          </p:stCondLst>
+                                        </p:cTn>
+                                        <p:tgtEl>
+                                          <p:spTgt spid="9">
+                                            <p:txEl>
+                                              <p:pRg st="0" end="0"/>
+                                            </p:txEl>
+                                          </p:spTgt>
+                                        </p:tgtEl>
+                                        <p:attrNameLst>
+                                          <p:attrName>style.visibility</p:attrName>
+                                        </p:attrNameLst>
+                                      </p:cBhvr>
+                                      <p:to>
+                                        <p:strVal val="visible"/>
+                                      </p:to>
+                                    </p:set>
+                                    <p:animEffect transition="in" filter="fade">
+                                      <p:cBhvr>
+                                        <p:cTn id="18" dur="450"/>
+                                        <p:tgtEl>
+                                          <p:spTgt spid="9">
+                                            <p:txEl>
+                                              <p:pRg st="0" end="0"/>
+                                            </p:txEl>
+                                          </p:spTgt>
+                                        </p:tgtEl>
+                                      </p:cBhvr>
+                                    </p:animEffect>
+                                    <p:animScale>
+                                      <p:cBhvr>
+                                        <p:cTn id="19" dur="450" fill="hold"/>
+                                        <p:tgtEl>
+                                          <p:spTgt spid="9">
+                                            <p:txEl>
+                                              <p:pRg st="0" end="0"/>
+                                            </p:txEl>
+                                          </p:spTgt>
+                                        </p:tgtEl>
+                                      </p:cBhvr>
+                                      <p:from x="88000" y="88000"/>
+                                      <p:to x="100000" y="100000"/>
+                                    </p:animScale>
+                                  </p:childTnLst>
+                                </p:cTn>
+                              </p:par>
+                              <p:par>
+                                <p:cTn id="24" presetID="53" presetClass="entr" presetSubtype="16" fill="hold" decel="100000" grpId="0" nodeType="withEffect">
+                                  <p:stCondLst>
+                                    <p:cond delay="208"/>
+                                  </p:stCondLst>
+                                  <p:childTnLst>
+                                    <p:set>
+                                      <p:cBhvr>
+                                        <p:cTn id="21" dur="1" fill="hold">
+                                          <p:stCondLst>
+                                            <p:cond delay="0"/>
+                                          </p:stCondLst>
+                                        </p:cTn>
+                                        <p:tgtEl>
+                                          <p:spTgt spid="9">
+                                            <p:txEl>
+                                              <p:pRg st="1" end="1"/>
+                                            </p:txEl>
+                                          </p:spTgt>
+                                        </p:tgtEl>
+                                        <p:attrNameLst>
+                                          <p:attrName>style.visibility</p:attrName>
+                                        </p:attrNameLst>
+                                      </p:cBhvr>
+                                      <p:to>
+                                        <p:strVal val="visible"/>
+                                      </p:to>
+                                    </p:set>
+                                    <p:animEffect transition="in" filter="fade">
+                                      <p:cBhvr>
+                                        <p:cTn id="22" dur="450"/>
+                                        <p:tgtEl>
+                                          <p:spTgt spid="9">
+                                            <p:txEl>
+                                              <p:pRg st="1" end="1"/>
+                                            </p:txEl>
+                                          </p:spTgt>
+                                        </p:tgtEl>
+                                      </p:cBhvr>
+                                    </p:animEffect>
+                                    <p:animScale>
+                                      <p:cBhvr>
+                                        <p:cTn id="23" dur="450" fill="hold"/>
+                                        <p:tgtEl>
+                                          <p:spTgt spid="9">
+                                            <p:txEl>
+                                              <p:pRg st="1" end="1"/>
+                                            </p:txEl>
+                                          </p:spTgt>
+                                        </p:tgtEl>
+                                      </p:cBhvr>
+                                      <p:from x="88000" y="88000"/>
+                                      <p:to x="100000" y="100000"/>
+                                    </p:animScale>
+                                  </p:childTnLst>
+                                </p:cTn>
+                              </p:par>
+                              <p:par>
+                                <p:cTn id="28" presetID="53" presetClass="entr" presetSubtype="16" fill="hold" decel="100000" nodeType="withEffect">
+                                  <p:stCondLst>
+                                    <p:cond delay="219"/>
+                                  </p:stCondLst>
+                                  <p:childTnLst>
+                                    <p:set>
+                                      <p:cBhvr>
+                                        <p:cTn id="25" dur="1" fill="hold">
+                                          <p:stCondLst>
+                                            <p:cond delay="0"/>
+                                          </p:stCondLst>
+                                        </p:cTn>
+                                        <p:tgtEl>
+                                          <p:spTgt spid="10"/>
+                                        </p:tgtEl>
+                                        <p:attrNameLst>
+                                          <p:attrName>style.visibility</p:attrName>
+                                        </p:attrNameLst>
+                                      </p:cBhvr>
+                                      <p:to>
+                                        <p:strVal val="visible"/>
+                                      </p:to>
+                                    </p:set>
+                                    <p:animEffect transition="in" filter="fade">
+                                      <p:cBhvr>
+                                        <p:cTn id="26" dur="450"/>
+                                        <p:tgtEl>
+                                          <p:spTgt spid="10"/>
+                                        </p:tgtEl>
+                                      </p:cBhvr>
+                                    </p:animEffect>
+                                    <p:animScale>
+                                      <p:cBhvr>
+                                        <p:cTn id="27" dur="450" fill="hold"/>
+                                        <p:tgtEl>
+                                          <p:spTgt spid="10"/>
+                                        </p:tgtEl>
+                                      </p:cBhvr>
+                                      <p:from x="88000" y="88000"/>
+                                      <p:to x="100000" y="100000"/>
+                                    </p:animScale>
+                                  </p:childTnLst>
+                                </p:cTn>
+                              </p:par>
+                              <p:par>
+                                <p:cTn id="32" presetID="53" presetClass="entr" presetSubtype="16" fill="hold" decel="100000" nodeType="withEffect">
+                                  <p:stCondLst>
+                                    <p:cond delay="273"/>
+                                  </p:stCondLst>
+                                  <p:childTnLst>
+                                    <p:set>
+                                      <p:cBhvr>
+                                        <p:cTn id="29" dur="1" fill="hold">
+                                          <p:stCondLst>
+                                            <p:cond delay="0"/>
+                                          </p:stCondLst>
+                                        </p:cTn>
+                                        <p:tgtEl>
+                                          <p:spTgt spid="13"/>
+                                        </p:tgtEl>
+                                        <p:attrNameLst>
+                                          <p:attrName>style.visibility</p:attrName>
+                                        </p:attrNameLst>
+                                      </p:cBhvr>
+                                      <p:to>
+                                        <p:strVal val="visible"/>
+                                      </p:to>
+                                    </p:set>
+                                    <p:animEffect transition="in" filter="fade">
+                                      <p:cBhvr>
+                                        <p:cTn id="30" dur="450"/>
+                                        <p:tgtEl>
+                                          <p:spTgt spid="13"/>
+                                        </p:tgtEl>
+                                      </p:cBhvr>
+                                    </p:animEffect>
+                                    <p:animScale>
+                                      <p:cBhvr>
+                                        <p:cTn id="31" dur="450" fill="hold"/>
+                                        <p:tgtEl>
+                                          <p:spTgt spid="13"/>
+                                        </p:tgtEl>
+                                      </p:cBhvr>
+                                      <p:from x="88000" y="88000"/>
+                                      <p:to x="100000" y="100000"/>
+                                    </p:animScale>
+                                  </p:childTnLst>
+                                </p:cTn>
+                              </p:par>
+                              <p:par>
+                                <p:cTn id="36" presetID="53" presetClass="entr" presetSubtype="16" fill="hold" decel="100000" grpId="0" nodeType="withEffect">
+                                  <p:stCondLst>
+                                    <p:cond delay="328"/>
+                                  </p:stCondLst>
+                                  <p:childTnLst>
+                                    <p:set>
+                                      <p:cBhvr>
+                                        <p:cTn id="33" dur="1" fill="hold">
+                                          <p:stCondLst>
+                                            <p:cond delay="0"/>
+                                          </p:stCondLst>
+                                        </p:cTn>
+                                        <p:tgtEl>
+                                          <p:spTgt spid="15">
+                                            <p:txEl>
+                                              <p:pRg st="0" end="0"/>
+                                            </p:txEl>
+                                          </p:spTgt>
+                                        </p:tgtEl>
+                                        <p:attrNameLst>
+                                          <p:attrName>style.visibility</p:attrName>
+                                        </p:attrNameLst>
+                                      </p:cBhvr>
+                                      <p:to>
+                                        <p:strVal val="visible"/>
+                                      </p:to>
+                                    </p:set>
+                                    <p:animEffect transition="in" filter="fade">
+                                      <p:cBhvr>
+                                        <p:cTn id="34" dur="450"/>
+                                        <p:tgtEl>
+                                          <p:spTgt spid="15">
+                                            <p:txEl>
+                                              <p:pRg st="0" end="0"/>
+                                            </p:txEl>
+                                          </p:spTgt>
+                                        </p:tgtEl>
+                                      </p:cBhvr>
+                                    </p:animEffect>
+                                    <p:animScale>
+                                      <p:cBhvr>
+                                        <p:cTn id="35" dur="450" fill="hold"/>
+                                        <p:tgtEl>
+                                          <p:spTgt spid="15">
+                                            <p:txEl>
+                                              <p:pRg st="0" end="0"/>
+                                            </p:txEl>
+                                          </p:spTgt>
+                                        </p:tgtEl>
+                                      </p:cBhvr>
+                                      <p:from x="88000" y="88000"/>
+                                      <p:to x="100000" y="100000"/>
+                                    </p:animScale>
+                                  </p:childTnLst>
+                                </p:cTn>
+                              </p:par>
+                              <p:par>
+                                <p:cTn id="40" presetID="53" presetClass="entr" presetSubtype="16" fill="hold" decel="100000" grpId="0" nodeType="withEffect">
+                                  <p:stCondLst>
+                                    <p:cond delay="372"/>
+                                  </p:stCondLst>
+                                  <p:childTnLst>
+                                    <p:set>
+                                      <p:cBhvr>
+                                        <p:cTn id="37" dur="1" fill="hold">
+                                          <p:stCondLst>
+                                            <p:cond delay="0"/>
+                                          </p:stCondLst>
+                                        </p:cTn>
+                                        <p:tgtEl>
+                                          <p:spTgt spid="15">
+                                            <p:txEl>
+                                              <p:pRg st="1" end="1"/>
+                                            </p:txEl>
+                                          </p:spTgt>
+                                        </p:tgtEl>
+                                        <p:attrNameLst>
+                                          <p:attrName>style.visibility</p:attrName>
+                                        </p:attrNameLst>
+                                      </p:cBhvr>
+                                      <p:to>
+                                        <p:strVal val="visible"/>
+                                      </p:to>
+                                    </p:set>
+                                    <p:animEffect transition="in" filter="fade">
+                                      <p:cBhvr>
+                                        <p:cTn id="38" dur="450"/>
+                                        <p:tgtEl>
+                                          <p:spTgt spid="15">
+                                            <p:txEl>
+                                              <p:pRg st="1" end="1"/>
+                                            </p:txEl>
+                                          </p:spTgt>
+                                        </p:tgtEl>
+                                      </p:cBhvr>
+                                    </p:animEffect>
+                                    <p:animScale>
+                                      <p:cBhvr>
+                                        <p:cTn id="39" dur="450" fill="hold"/>
+                                        <p:tgtEl>
+                                          <p:spTgt spid="15">
+                                            <p:txEl>
+                                              <p:pRg st="1" end="1"/>
+                                            </p:txEl>
+                                          </p:spTgt>
+                                        </p:tgtEl>
+                                      </p:cBhvr>
+                                      <p:from x="88000" y="88000"/>
+                                      <p:to x="100000" y="100000"/>
+                                    </p:animScale>
+                                  </p:childTnLst>
+                                </p:cTn>
+                              </p:par>
+                              <p:par>
+                                <p:cTn id="44" presetID="53" presetClass="entr" presetSubtype="16" fill="hold" decel="100000" nodeType="withEffect">
+                                  <p:stCondLst>
+                                    <p:cond delay="383"/>
+                                  </p:stCondLst>
+                                  <p:childTnLst>
+                                    <p:set>
+                                      <p:cBhvr>
+                                        <p:cTn id="41" dur="1" fill="hold">
+                                          <p:stCondLst>
+                                            <p:cond delay="0"/>
+                                          </p:stCondLst>
+                                        </p:cTn>
+                                        <p:tgtEl>
+                                          <p:spTgt spid="16"/>
+                                        </p:tgtEl>
+                                        <p:attrNameLst>
+                                          <p:attrName>style.visibility</p:attrName>
+                                        </p:attrNameLst>
+                                      </p:cBhvr>
+                                      <p:to>
+                                        <p:strVal val="visible"/>
+                                      </p:to>
+                                    </p:set>
+                                    <p:animEffect transition="in" filter="fade">
+                                      <p:cBhvr>
+                                        <p:cTn id="42" dur="450"/>
+                                        <p:tgtEl>
+                                          <p:spTgt spid="16"/>
+                                        </p:tgtEl>
+                                      </p:cBhvr>
+                                    </p:animEffect>
+                                    <p:animScale>
+                                      <p:cBhvr>
+                                        <p:cTn id="43" dur="450" fill="hold"/>
+                                        <p:tgtEl>
+                                          <p:spTgt spid="16"/>
+                                        </p:tgtEl>
+                                      </p:cBhvr>
+                                      <p:from x="88000" y="88000"/>
+                                      <p:to x="100000" y="100000"/>
+                                    </p:animScale>
+                                  </p:childTnLst>
+                                </p:cTn>
+                              </p:par>
+                              <p:par>
+                                <p:cTn id="48" presetID="53" presetClass="entr" presetSubtype="16" fill="hold" decel="100000" nodeType="withEffect">
+                                  <p:stCondLst>
+                                    <p:cond delay="438"/>
+                                  </p:stCondLst>
+                                  <p:childTnLst>
+                                    <p:set>
+                                      <p:cBhvr>
+                                        <p:cTn id="45" dur="1" fill="hold">
+                                          <p:stCondLst>
+                                            <p:cond delay="0"/>
+                                          </p:stCondLst>
+                                        </p:cTn>
+                                        <p:tgtEl>
+                                          <p:spTgt spid="19"/>
+                                        </p:tgtEl>
+                                        <p:attrNameLst>
+                                          <p:attrName>style.visibility</p:attrName>
+                                        </p:attrNameLst>
+                                      </p:cBhvr>
+                                      <p:to>
+                                        <p:strVal val="visible"/>
+                                      </p:to>
+                                    </p:set>
+                                    <p:animEffect transition="in" filter="fade">
+                                      <p:cBhvr>
+                                        <p:cTn id="46" dur="450"/>
+                                        <p:tgtEl>
+                                          <p:spTgt spid="19"/>
+                                        </p:tgtEl>
+                                      </p:cBhvr>
+                                    </p:animEffect>
+                                    <p:animScale>
+                                      <p:cBhvr>
+                                        <p:cTn id="47" dur="450" fill="hold"/>
+                                        <p:tgtEl>
+                                          <p:spTgt spid="19"/>
+                                        </p:tgtEl>
+                                      </p:cBhvr>
+                                      <p:from x="88000" y="88000"/>
+                                      <p:to x="100000" y="100000"/>
+                                    </p:animScale>
+                                  </p:childTnLst>
+                                </p:cTn>
+                              </p:par>
+                              <p:par>
+                                <p:cTn id="52" presetID="53" presetClass="entr" presetSubtype="16" fill="hold" decel="100000" grpId="0" nodeType="withEffect">
+                                  <p:stCondLst>
+                                    <p:cond delay="492"/>
+                                  </p:stCondLst>
+                                  <p:childTnLst>
+                                    <p:set>
+                                      <p:cBhvr>
+                                        <p:cTn id="49" dur="1" fill="hold">
+                                          <p:stCondLst>
+                                            <p:cond delay="0"/>
+                                          </p:stCondLst>
+                                        </p:cTn>
+                                        <p:tgtEl>
+                                          <p:spTgt spid="21">
+                                            <p:txEl>
+                                              <p:pRg st="0" end="0"/>
+                                            </p:txEl>
+                                          </p:spTgt>
+                                        </p:tgtEl>
+                                        <p:attrNameLst>
+                                          <p:attrName>style.visibility</p:attrName>
+                                        </p:attrNameLst>
+                                      </p:cBhvr>
+                                      <p:to>
+                                        <p:strVal val="visible"/>
+                                      </p:to>
+                                    </p:set>
+                                    <p:animEffect transition="in" filter="fade">
+                                      <p:cBhvr>
+                                        <p:cTn id="50" dur="450"/>
+                                        <p:tgtEl>
+                                          <p:spTgt spid="21">
+                                            <p:txEl>
+                                              <p:pRg st="0" end="0"/>
+                                            </p:txEl>
+                                          </p:spTgt>
+                                        </p:tgtEl>
+                                      </p:cBhvr>
+                                    </p:animEffect>
+                                    <p:animScale>
+                                      <p:cBhvr>
+                                        <p:cTn id="51" dur="450" fill="hold"/>
+                                        <p:tgtEl>
+                                          <p:spTgt spid="21">
+                                            <p:txEl>
+                                              <p:pRg st="0" end="0"/>
+                                            </p:txEl>
+                                          </p:spTgt>
+                                        </p:tgtEl>
+                                      </p:cBhvr>
+                                      <p:from x="88000" y="88000"/>
+                                      <p:to x="100000" y="100000"/>
+                                    </p:animScale>
+                                  </p:childTnLst>
+                                </p:cTn>
+                              </p:par>
+                              <p:par>
+                                <p:cTn id="56" presetID="53" presetClass="entr" presetSubtype="16" fill="hold" decel="100000" grpId="0" nodeType="withEffect">
+                                  <p:stCondLst>
+                                    <p:cond delay="536"/>
+                                  </p:stCondLst>
+                                  <p:childTnLst>
+                                    <p:set>
+                                      <p:cBhvr>
+                                        <p:cTn id="53" dur="1" fill="hold">
+                                          <p:stCondLst>
+                                            <p:cond delay="0"/>
+                                          </p:stCondLst>
+                                        </p:cTn>
+                                        <p:tgtEl>
+                                          <p:spTgt spid="21">
+                                            <p:txEl>
+                                              <p:pRg st="1" end="1"/>
+                                            </p:txEl>
+                                          </p:spTgt>
+                                        </p:tgtEl>
+                                        <p:attrNameLst>
+                                          <p:attrName>style.visibility</p:attrName>
+                                        </p:attrNameLst>
+                                      </p:cBhvr>
+                                      <p:to>
+                                        <p:strVal val="visible"/>
+                                      </p:to>
+                                    </p:set>
+                                    <p:animEffect transition="in" filter="fade">
+                                      <p:cBhvr>
+                                        <p:cTn id="54" dur="450"/>
+                                        <p:tgtEl>
+                                          <p:spTgt spid="21">
+                                            <p:txEl>
+                                              <p:pRg st="1" end="1"/>
+                                            </p:txEl>
+                                          </p:spTgt>
+                                        </p:tgtEl>
+                                      </p:cBhvr>
+                                    </p:animEffect>
+                                    <p:animScale>
+                                      <p:cBhvr>
+                                        <p:cTn id="55" dur="450" fill="hold"/>
+                                        <p:tgtEl>
+                                          <p:spTgt spid="21">
+                                            <p:txEl>
+                                              <p:pRg st="1" end="1"/>
+                                            </p:txEl>
+                                          </p:spTgt>
+                                        </p:tgtEl>
+                                      </p:cBhvr>
+                                      <p:from x="88000" y="88000"/>
+                                      <p:to x="100000" y="100000"/>
+                                    </p:animScale>
+                                  </p:childTnLst>
+                                </p:cTn>
+                              </p:par>
+                              <p:par>
+                                <p:cTn id="60" presetID="53" presetClass="entr" presetSubtype="16" fill="hold" decel="100000" nodeType="withEffect">
+                                  <p:stCondLst>
+                                    <p:cond delay="547"/>
+                                  </p:stCondLst>
+                                  <p:childTnLst>
+                                    <p:set>
+                                      <p:cBhvr>
+                                        <p:cTn id="57" dur="1" fill="hold">
+                                          <p:stCondLst>
+                                            <p:cond delay="0"/>
+                                          </p:stCondLst>
+                                        </p:cTn>
+                                        <p:tgtEl>
+                                          <p:spTgt spid="22"/>
+                                        </p:tgtEl>
+                                        <p:attrNameLst>
+                                          <p:attrName>style.visibility</p:attrName>
+                                        </p:attrNameLst>
+                                      </p:cBhvr>
+                                      <p:to>
+                                        <p:strVal val="visible"/>
+                                      </p:to>
+                                    </p:set>
+                                    <p:animEffect transition="in" filter="fade">
+                                      <p:cBhvr>
+                                        <p:cTn id="58" dur="450"/>
+                                        <p:tgtEl>
+                                          <p:spTgt spid="22"/>
+                                        </p:tgtEl>
+                                      </p:cBhvr>
+                                    </p:animEffect>
+                                    <p:animScale>
+                                      <p:cBhvr>
+                                        <p:cTn id="59" dur="450" fill="hold"/>
+                                        <p:tgtEl>
+                                          <p:spTgt spid="22"/>
+                                        </p:tgtEl>
+                                      </p:cBhvr>
+                                      <p:from x="88000" y="88000"/>
+                                      <p:to x="100000" y="100000"/>
+                                    </p:animScale>
+                                  </p:childTnLst>
+                                </p:cTn>
+                              </p:par>
+                              <p:par>
+                                <p:cTn id="64" presetID="53" presetClass="entr" presetSubtype="16" fill="hold" decel="100000" nodeType="withEffect">
+                                  <p:stCondLst>
+                                    <p:cond delay="602"/>
+                                  </p:stCondLst>
+                                  <p:childTnLst>
+                                    <p:set>
+                                      <p:cBhvr>
+                                        <p:cTn id="61" dur="1" fill="hold">
+                                          <p:stCondLst>
+                                            <p:cond delay="0"/>
+                                          </p:stCondLst>
+                                        </p:cTn>
+                                        <p:tgtEl>
+                                          <p:spTgt spid="25"/>
+                                        </p:tgtEl>
+                                        <p:attrNameLst>
+                                          <p:attrName>style.visibility</p:attrName>
+                                        </p:attrNameLst>
+                                      </p:cBhvr>
+                                      <p:to>
+                                        <p:strVal val="visible"/>
+                                      </p:to>
+                                    </p:set>
+                                    <p:animEffect transition="in" filter="fade">
+                                      <p:cBhvr>
+                                        <p:cTn id="62" dur="450"/>
+                                        <p:tgtEl>
+                                          <p:spTgt spid="25"/>
+                                        </p:tgtEl>
+                                      </p:cBhvr>
+                                    </p:animEffect>
+                                    <p:animScale>
+                                      <p:cBhvr>
+                                        <p:cTn id="63" dur="450" fill="hold"/>
+                                        <p:tgtEl>
+                                          <p:spTgt spid="25"/>
+                                        </p:tgtEl>
+                                      </p:cBhvr>
+                                      <p:from x="88000" y="88000"/>
+                                      <p:to x="100000" y="100000"/>
+                                    </p:animScale>
+                                  </p:childTnLst>
+                                </p:cTn>
+                              </p:par>
+                              <p:par>
+                                <p:cTn id="68" presetID="53" presetClass="entr" presetSubtype="16" fill="hold" decel="100000" grpId="0" nodeType="withEffect">
+                                  <p:stCondLst>
+                                    <p:cond delay="656"/>
+                                  </p:stCondLst>
+                                  <p:childTnLst>
+                                    <p:set>
+                                      <p:cBhvr>
+                                        <p:cTn id="65" dur="1" fill="hold">
+                                          <p:stCondLst>
+                                            <p:cond delay="0"/>
+                                          </p:stCondLst>
+                                        </p:cTn>
+                                        <p:tgtEl>
+                                          <p:spTgt spid="27">
+                                            <p:txEl>
+                                              <p:pRg st="0" end="0"/>
+                                            </p:txEl>
+                                          </p:spTgt>
+                                        </p:tgtEl>
+                                        <p:attrNameLst>
+                                          <p:attrName>style.visibility</p:attrName>
+                                        </p:attrNameLst>
+                                      </p:cBhvr>
+                                      <p:to>
+                                        <p:strVal val="visible"/>
+                                      </p:to>
+                                    </p:set>
+                                    <p:animEffect transition="in" filter="fade">
+                                      <p:cBhvr>
+                                        <p:cTn id="66" dur="450"/>
+                                        <p:tgtEl>
+                                          <p:spTgt spid="27">
+                                            <p:txEl>
+                                              <p:pRg st="0" end="0"/>
+                                            </p:txEl>
+                                          </p:spTgt>
+                                        </p:tgtEl>
+                                      </p:cBhvr>
+                                    </p:animEffect>
+                                    <p:animScale>
+                                      <p:cBhvr>
+                                        <p:cTn id="67" dur="450" fill="hold"/>
+                                        <p:tgtEl>
+                                          <p:spTgt spid="27">
+                                            <p:txEl>
+                                              <p:pRg st="0" end="0"/>
+                                            </p:txEl>
+                                          </p:spTgt>
+                                        </p:tgtEl>
+                                      </p:cBhvr>
+                                      <p:from x="88000" y="88000"/>
+                                      <p:to x="100000" y="100000"/>
+                                    </p:animScale>
+                                  </p:childTnLst>
+                                </p:cTn>
+                              </p:par>
+                              <p:par>
+                                <p:cTn id="72" presetID="53" presetClass="entr" presetSubtype="16" fill="hold" decel="100000" grpId="0" nodeType="withEffect">
+                                  <p:stCondLst>
+                                    <p:cond delay="700"/>
+                                  </p:stCondLst>
+                                  <p:childTnLst>
+                                    <p:set>
+                                      <p:cBhvr>
+                                        <p:cTn id="69" dur="1" fill="hold">
+                                          <p:stCondLst>
+                                            <p:cond delay="0"/>
+                                          </p:stCondLst>
+                                        </p:cTn>
+                                        <p:tgtEl>
+                                          <p:spTgt spid="27">
+                                            <p:txEl>
+                                              <p:pRg st="1" end="1"/>
+                                            </p:txEl>
+                                          </p:spTgt>
+                                        </p:tgtEl>
+                                        <p:attrNameLst>
+                                          <p:attrName>style.visibility</p:attrName>
+                                        </p:attrNameLst>
+                                      </p:cBhvr>
+                                      <p:to>
+                                        <p:strVal val="visible"/>
+                                      </p:to>
+                                    </p:set>
+                                    <p:animEffect transition="in" filter="fade">
+                                      <p:cBhvr>
+                                        <p:cTn id="70" dur="450"/>
+                                        <p:tgtEl>
+                                          <p:spTgt spid="27">
+                                            <p:txEl>
+                                              <p:pRg st="1" end="1"/>
+                                            </p:txEl>
+                                          </p:spTgt>
+                                        </p:tgtEl>
+                                      </p:cBhvr>
+                                    </p:animEffect>
+                                    <p:animScale>
+                                      <p:cBhvr>
+                                        <p:cTn id="71" dur="450" fill="hold"/>
+                                        <p:tgtEl>
+                                          <p:spTgt spid="27">
+                                            <p:txEl>
+                                              <p:pRg st="1" end="1"/>
+                                            </p:txEl>
+                                          </p:spTgt>
+                                        </p:tgtEl>
+                                      </p:cBhvr>
+                                      <p:from x="88000" y="88000"/>
+                                      <p:to x="100000" y="100000"/>
+                                    </p:animScale>
+                                  </p:childTnLst>
+                                </p:cTn>
+                              </p:par>
+                            </p:childTnLst>
+                          </p:cTn>
+                        </p:par>
+                      </p:childTnLst>
+                    </p:cTn>
+                  </p:par>
+                </p:childTnLst>
+              </p:cTn>
+              <p:prevCondLst>
+                <p:cond evt="onPrev" delay="0">
+                  <p:tgtEl>
+                    <p:sldTgt/>
+                  </p:tgtEl>
+                </p:cond>
+              </p:prevCondLst>
+              <p:nextCondLst>
+                <p:cond evt="onNext" delay="0">
+                  <p:tgtEl>
+                    <p:sldTgt/>
+                  </p:tgtEl>
+                </p:cond>
+              </p:nextCondLst>
+            </p:seq>
+          </p:childTnLst>
+        </p:cTn>
+      </p:par>
+    </p:tnLst>
+    <p:bldLst>
+      <p:bldP spid="9" grpId="0" build="p"/>
+      <p:bldP spid="15" grpId="0" build="p"/>
+      <p:bldP spid="21" grpId="0" build="p"/>
+      <p:bldP spid="27" grpId="0" build="p"/>
+    </p:bldLst>
+  </p:timing>
 </p:sld>
 </file>
 
@@ -7152,7 +10834,7 @@
       </p:grpSpPr>
       <p:sp>
         <p:nvSpPr>
-          <p:cNvPr id="2" name="Shape 0"/>
+          <p:cNvPr id="2" name="pt:BeKu0IT5ZrR4"/>
           <p:cNvSpPr/>
           <p:nvPr/>
         </p:nvSpPr>
@@ -7172,7 +10854,7 @@
       </p:sp>
       <p:sp>
         <p:nvSpPr>
-          <p:cNvPr id="3" name="Text 1"/>
+          <p:cNvPr id="3" name="pt:JfifduNVYelc"/>
           <p:cNvSpPr/>
           <p:nvPr/>
         </p:nvSpPr>
@@ -7214,7 +10896,7 @@
       </p:sp>
       <p:sp>
         <p:nvSpPr>
-          <p:cNvPr id="4" name="Shape 2"/>
+          <p:cNvPr id="4" name="pt:Ezx2kI56UXms"/>
           <p:cNvSpPr/>
           <p:nvPr/>
         </p:nvSpPr>
@@ -7238,7 +10920,7 @@
       </p:sp>
       <p:sp>
         <p:nvSpPr>
-          <p:cNvPr id="5" name="Shape 3"/>
+          <p:cNvPr id="5" name="pt:G2yQyrYQbnlS"/>
           <p:cNvSpPr/>
           <p:nvPr/>
         </p:nvSpPr>
@@ -7265,7 +10947,7 @@
       </p:sp>
       <p:sp>
         <p:nvSpPr>
-          <p:cNvPr id="6" name="Shape 4"/>
+          <p:cNvPr id="6" name="pt:WbhgyYGTQEJJ"/>
           <p:cNvSpPr/>
           <p:nvPr/>
         </p:nvSpPr>
@@ -7285,7 +10967,7 @@
       </p:sp>
       <p:sp>
         <p:nvSpPr>
-          <p:cNvPr id="7" name="Text 5"/>
+          <p:cNvPr id="7" name="pt:r41BmEHMFPd8"/>
           <p:cNvSpPr/>
           <p:nvPr/>
         </p:nvSpPr>
@@ -7327,7 +11009,7 @@
       </p:sp>
       <p:sp>
         <p:nvSpPr>
-          <p:cNvPr id="8" name="Text 6"/>
+          <p:cNvPr id="8" name="pt:Cat-Ld-q24lL"/>
           <p:cNvSpPr/>
           <p:nvPr/>
         </p:nvSpPr>
@@ -7369,7 +11051,7 @@
       </p:sp>
       <p:sp>
         <p:nvSpPr>
-          <p:cNvPr id="9" name="Text 7"/>
+          <p:cNvPr id="9" name="pt:yeJZrizyj_w5"/>
           <p:cNvSpPr/>
           <p:nvPr/>
         </p:nvSpPr>
@@ -7411,7 +11093,7 @@
       </p:sp>
       <p:sp>
         <p:nvSpPr>
-          <p:cNvPr id="10" name="Text 8"/>
+          <p:cNvPr id="10" name="pt:tWab8tpU3w9a"/>
           <p:cNvSpPr/>
           <p:nvPr/>
         </p:nvSpPr>
@@ -7453,7 +11135,7 @@
       </p:sp>
       <p:sp>
         <p:nvSpPr>
-          <p:cNvPr id="11" name="Shape 9"/>
+          <p:cNvPr id="11" name="pt:5lcE_N0VXZqZ"/>
           <p:cNvSpPr/>
           <p:nvPr/>
         </p:nvSpPr>
@@ -7477,7 +11159,7 @@
       </p:sp>
       <p:sp>
         <p:nvSpPr>
-          <p:cNvPr id="12" name="Shape 10"/>
+          <p:cNvPr id="12" name="pt:5QrpBsjqgLhh"/>
           <p:cNvSpPr/>
           <p:nvPr/>
         </p:nvSpPr>
@@ -7504,7 +11186,7 @@
       </p:sp>
       <p:sp>
         <p:nvSpPr>
-          <p:cNvPr id="13" name="Shape 11"/>
+          <p:cNvPr id="13" name="pt:UD14rjftBZ2i"/>
           <p:cNvSpPr/>
           <p:nvPr/>
         </p:nvSpPr>
@@ -7524,7 +11206,7 @@
       </p:sp>
       <p:sp>
         <p:nvSpPr>
-          <p:cNvPr id="14" name="Text 12"/>
+          <p:cNvPr id="14" name="pt:hfznqEOmlbSl"/>
           <p:cNvSpPr/>
           <p:nvPr/>
         </p:nvSpPr>
@@ -7566,7 +11248,7 @@
       </p:sp>
       <p:sp>
         <p:nvSpPr>
-          <p:cNvPr id="15" name="Text 13"/>
+          <p:cNvPr id="15" name="pt:Lnl8a40i1N9Q"/>
           <p:cNvSpPr/>
           <p:nvPr/>
         </p:nvSpPr>
@@ -7608,7 +11290,7 @@
       </p:sp>
       <p:sp>
         <p:nvSpPr>
-          <p:cNvPr id="16" name="Text 14"/>
+          <p:cNvPr id="16" name="pt:LCWoazcmebc9"/>
           <p:cNvSpPr/>
           <p:nvPr/>
         </p:nvSpPr>
@@ -7650,7 +11332,7 @@
       </p:sp>
       <p:sp>
         <p:nvSpPr>
-          <p:cNvPr id="17" name="Text 15"/>
+          <p:cNvPr id="17" name="pt:I2miPRJY5AzD"/>
           <p:cNvSpPr/>
           <p:nvPr/>
         </p:nvSpPr>
@@ -7692,7 +11374,7 @@
       </p:sp>
       <p:sp>
         <p:nvSpPr>
-          <p:cNvPr id="18" name="Shape 16"/>
+          <p:cNvPr id="18" name="pt:Sf7c9wnpP9o-"/>
           <p:cNvSpPr/>
           <p:nvPr/>
         </p:nvSpPr>
@@ -7716,7 +11398,7 @@
       </p:sp>
       <p:sp>
         <p:nvSpPr>
-          <p:cNvPr id="19" name="Shape 17"/>
+          <p:cNvPr id="19" name="pt:4DG49W0eXG8D"/>
           <p:cNvSpPr/>
           <p:nvPr/>
         </p:nvSpPr>
@@ -7743,7 +11425,7 @@
       </p:sp>
       <p:sp>
         <p:nvSpPr>
-          <p:cNvPr id="20" name="Shape 18"/>
+          <p:cNvPr id="20" name="pt:mKTlMm0GUYlF"/>
           <p:cNvSpPr/>
           <p:nvPr/>
         </p:nvSpPr>
@@ -7763,7 +11445,7 @@
       </p:sp>
       <p:sp>
         <p:nvSpPr>
-          <p:cNvPr id="21" name="Text 19"/>
+          <p:cNvPr id="21" name="pt:BemNERCgOZsS"/>
           <p:cNvSpPr/>
           <p:nvPr/>
         </p:nvSpPr>
@@ -7805,7 +11487,7 @@
       </p:sp>
       <p:sp>
         <p:nvSpPr>
-          <p:cNvPr id="22" name="Text 20"/>
+          <p:cNvPr id="22" name="pt:m_rrovcBwlAT"/>
           <p:cNvSpPr/>
           <p:nvPr/>
         </p:nvSpPr>
@@ -7847,7 +11529,7 @@
       </p:sp>
       <p:sp>
         <p:nvSpPr>
-          <p:cNvPr id="23" name="Text 21"/>
+          <p:cNvPr id="23" name="pt:pniBus0CugYb"/>
           <p:cNvSpPr/>
           <p:nvPr/>
         </p:nvSpPr>
@@ -7889,7 +11571,7 @@
       </p:sp>
       <p:sp>
         <p:nvSpPr>
-          <p:cNvPr id="24" name="Text 22"/>
+          <p:cNvPr id="24" name="pt:PpGaGo3VRdH5"/>
           <p:cNvSpPr/>
           <p:nvPr/>
         </p:nvSpPr>
@@ -7934,6 +11616,510 @@
   <p:clrMapOvr>
     <a:masterClrMapping/>
   </p:clrMapOvr>
+  <p:transition spd="fast">
+    <p:zoom dir="in"/>
+  </p:transition>
+  <p:timing>
+    <p:tnLst>
+      <p:par>
+        <p:cTn id="1" dur="indefinite" restart="never" nodeType="tmRoot">
+          <p:childTnLst>
+            <p:seq concurrent="1" nextAc="seek">
+              <p:cTn id="2" dur="indefinite" nodeType="mainSeq">
+                <p:childTnLst>
+                  <p:par>
+                    <p:cTn id="3" fill="hold">
+                      <p:stCondLst>
+                        <p:cond delay="indefinite"/>
+                        <p:cond evt="onBegin" delay="0">
+                          <p:tn val="2"/>
+                        </p:cond>
+                      </p:stCondLst>
+                      <p:childTnLst>
+                        <p:par>
+                          <p:cTn id="4" fill="hold">
+                            <p:stCondLst>
+                              <p:cond delay="0"/>
+                            </p:stCondLst>
+                            <p:childTnLst>
+                              <p:par>
+                                <p:cTn id="8" presetID="53" presetClass="entr" presetSubtype="16" fill="hold" decel="100000" nodeType="afterEffect">
+                                  <p:stCondLst>
+                                    <p:cond delay="0"/>
+                                  </p:stCondLst>
+                                  <p:childTnLst>
+                                    <p:set>
+                                      <p:cBhvr>
+                                        <p:cTn id="5" dur="1" fill="hold">
+                                          <p:stCondLst>
+                                            <p:cond delay="0"/>
+                                          </p:stCondLst>
+                                        </p:cTn>
+                                        <p:tgtEl>
+                                          <p:spTgt spid="3"/>
+                                        </p:tgtEl>
+                                        <p:attrNameLst>
+                                          <p:attrName>style.visibility</p:attrName>
+                                        </p:attrNameLst>
+                                      </p:cBhvr>
+                                      <p:to>
+                                        <p:strVal val="visible"/>
+                                      </p:to>
+                                    </p:set>
+                                    <p:animEffect transition="in" filter="fade">
+                                      <p:cBhvr>
+                                        <p:cTn id="6" dur="450"/>
+                                        <p:tgtEl>
+                                          <p:spTgt spid="3"/>
+                                        </p:tgtEl>
+                                      </p:cBhvr>
+                                    </p:animEffect>
+                                    <p:animScale>
+                                      <p:cBhvr>
+                                        <p:cTn id="7" dur="450" fill="hold"/>
+                                        <p:tgtEl>
+                                          <p:spTgt spid="3"/>
+                                        </p:tgtEl>
+                                      </p:cBhvr>
+                                      <p:from x="88000" y="88000"/>
+                                      <p:to x="100000" y="100000"/>
+                                    </p:animScale>
+                                  </p:childTnLst>
+                                </p:cTn>
+                              </p:par>
+                              <p:par>
+                                <p:cTn id="12" presetID="53" presetClass="entr" presetSubtype="16" fill="hold" decel="100000" nodeType="withEffect">
+                                  <p:stCondLst>
+                                    <p:cond delay="78"/>
+                                  </p:stCondLst>
+                                  <p:childTnLst>
+                                    <p:set>
+                                      <p:cBhvr>
+                                        <p:cTn id="9" dur="1" fill="hold">
+                                          <p:stCondLst>
+                                            <p:cond delay="0"/>
+                                          </p:stCondLst>
+                                        </p:cTn>
+                                        <p:tgtEl>
+                                          <p:spTgt spid="5"/>
+                                        </p:tgtEl>
+                                        <p:attrNameLst>
+                                          <p:attrName>style.visibility</p:attrName>
+                                        </p:attrNameLst>
+                                      </p:cBhvr>
+                                      <p:to>
+                                        <p:strVal val="visible"/>
+                                      </p:to>
+                                    </p:set>
+                                    <p:animEffect transition="in" filter="fade">
+                                      <p:cBhvr>
+                                        <p:cTn id="10" dur="450"/>
+                                        <p:tgtEl>
+                                          <p:spTgt spid="5"/>
+                                        </p:tgtEl>
+                                      </p:cBhvr>
+                                    </p:animEffect>
+                                    <p:animScale>
+                                      <p:cBhvr>
+                                        <p:cTn id="11" dur="450" fill="hold"/>
+                                        <p:tgtEl>
+                                          <p:spTgt spid="5"/>
+                                        </p:tgtEl>
+                                      </p:cBhvr>
+                                      <p:from x="88000" y="88000"/>
+                                      <p:to x="100000" y="100000"/>
+                                    </p:animScale>
+                                  </p:childTnLst>
+                                </p:cTn>
+                              </p:par>
+                              <p:par>
+                                <p:cTn id="16" presetID="53" presetClass="entr" presetSubtype="16" fill="hold" decel="100000" nodeType="withEffect">
+                                  <p:stCondLst>
+                                    <p:cond delay="156"/>
+                                  </p:stCondLst>
+                                  <p:childTnLst>
+                                    <p:set>
+                                      <p:cBhvr>
+                                        <p:cTn id="13" dur="1" fill="hold">
+                                          <p:stCondLst>
+                                            <p:cond delay="0"/>
+                                          </p:stCondLst>
+                                        </p:cTn>
+                                        <p:tgtEl>
+                                          <p:spTgt spid="6"/>
+                                        </p:tgtEl>
+                                        <p:attrNameLst>
+                                          <p:attrName>style.visibility</p:attrName>
+                                        </p:attrNameLst>
+                                      </p:cBhvr>
+                                      <p:to>
+                                        <p:strVal val="visible"/>
+                                      </p:to>
+                                    </p:set>
+                                    <p:animEffect transition="in" filter="fade">
+                                      <p:cBhvr>
+                                        <p:cTn id="14" dur="450"/>
+                                        <p:tgtEl>
+                                          <p:spTgt spid="6"/>
+                                        </p:tgtEl>
+                                      </p:cBhvr>
+                                    </p:animEffect>
+                                    <p:animScale>
+                                      <p:cBhvr>
+                                        <p:cTn id="15" dur="450" fill="hold"/>
+                                        <p:tgtEl>
+                                          <p:spTgt spid="6"/>
+                                        </p:tgtEl>
+                                      </p:cBhvr>
+                                      <p:from x="88000" y="88000"/>
+                                      <p:to x="100000" y="100000"/>
+                                    </p:animScale>
+                                  </p:childTnLst>
+                                </p:cTn>
+                              </p:par>
+                              <p:par>
+                                <p:cTn id="20" presetID="53" presetClass="entr" presetSubtype="16" fill="hold" decel="100000" nodeType="withEffect">
+                                  <p:stCondLst>
+                                    <p:cond delay="233"/>
+                                  </p:stCondLst>
+                                  <p:childTnLst>
+                                    <p:set>
+                                      <p:cBhvr>
+                                        <p:cTn id="17" dur="1" fill="hold">
+                                          <p:stCondLst>
+                                            <p:cond delay="0"/>
+                                          </p:stCondLst>
+                                        </p:cTn>
+                                        <p:tgtEl>
+                                          <p:spTgt spid="8"/>
+                                        </p:tgtEl>
+                                        <p:attrNameLst>
+                                          <p:attrName>style.visibility</p:attrName>
+                                        </p:attrNameLst>
+                                      </p:cBhvr>
+                                      <p:to>
+                                        <p:strVal val="visible"/>
+                                      </p:to>
+                                    </p:set>
+                                    <p:animEffect transition="in" filter="fade">
+                                      <p:cBhvr>
+                                        <p:cTn id="18" dur="450"/>
+                                        <p:tgtEl>
+                                          <p:spTgt spid="8"/>
+                                        </p:tgtEl>
+                                      </p:cBhvr>
+                                    </p:animEffect>
+                                    <p:animScale>
+                                      <p:cBhvr>
+                                        <p:cTn id="19" dur="450" fill="hold"/>
+                                        <p:tgtEl>
+                                          <p:spTgt spid="8"/>
+                                        </p:tgtEl>
+                                      </p:cBhvr>
+                                      <p:from x="88000" y="88000"/>
+                                      <p:to x="100000" y="100000"/>
+                                    </p:animScale>
+                                  </p:childTnLst>
+                                </p:cTn>
+                              </p:par>
+                              <p:par>
+                                <p:cTn id="24" presetID="53" presetClass="entr" presetSubtype="16" fill="hold" decel="100000" nodeType="withEffect">
+                                  <p:stCondLst>
+                                    <p:cond delay="311"/>
+                                  </p:stCondLst>
+                                  <p:childTnLst>
+                                    <p:set>
+                                      <p:cBhvr>
+                                        <p:cTn id="21" dur="1" fill="hold">
+                                          <p:stCondLst>
+                                            <p:cond delay="0"/>
+                                          </p:stCondLst>
+                                        </p:cTn>
+                                        <p:tgtEl>
+                                          <p:spTgt spid="12"/>
+                                        </p:tgtEl>
+                                        <p:attrNameLst>
+                                          <p:attrName>style.visibility</p:attrName>
+                                        </p:attrNameLst>
+                                      </p:cBhvr>
+                                      <p:to>
+                                        <p:strVal val="visible"/>
+                                      </p:to>
+                                    </p:set>
+                                    <p:animEffect transition="in" filter="fade">
+                                      <p:cBhvr>
+                                        <p:cTn id="22" dur="450"/>
+                                        <p:tgtEl>
+                                          <p:spTgt spid="12"/>
+                                        </p:tgtEl>
+                                      </p:cBhvr>
+                                    </p:animEffect>
+                                    <p:animScale>
+                                      <p:cBhvr>
+                                        <p:cTn id="23" dur="450" fill="hold"/>
+                                        <p:tgtEl>
+                                          <p:spTgt spid="12"/>
+                                        </p:tgtEl>
+                                      </p:cBhvr>
+                                      <p:from x="88000" y="88000"/>
+                                      <p:to x="100000" y="100000"/>
+                                    </p:animScale>
+                                  </p:childTnLst>
+                                </p:cTn>
+                              </p:par>
+                              <p:par>
+                                <p:cTn id="28" presetID="53" presetClass="entr" presetSubtype="16" fill="hold" decel="100000" nodeType="withEffect">
+                                  <p:stCondLst>
+                                    <p:cond delay="389"/>
+                                  </p:stCondLst>
+                                  <p:childTnLst>
+                                    <p:set>
+                                      <p:cBhvr>
+                                        <p:cTn id="25" dur="1" fill="hold">
+                                          <p:stCondLst>
+                                            <p:cond delay="0"/>
+                                          </p:stCondLst>
+                                        </p:cTn>
+                                        <p:tgtEl>
+                                          <p:spTgt spid="13"/>
+                                        </p:tgtEl>
+                                        <p:attrNameLst>
+                                          <p:attrName>style.visibility</p:attrName>
+                                        </p:attrNameLst>
+                                      </p:cBhvr>
+                                      <p:to>
+                                        <p:strVal val="visible"/>
+                                      </p:to>
+                                    </p:set>
+                                    <p:animEffect transition="in" filter="fade">
+                                      <p:cBhvr>
+                                        <p:cTn id="26" dur="450"/>
+                                        <p:tgtEl>
+                                          <p:spTgt spid="13"/>
+                                        </p:tgtEl>
+                                      </p:cBhvr>
+                                    </p:animEffect>
+                                    <p:animScale>
+                                      <p:cBhvr>
+                                        <p:cTn id="27" dur="450" fill="hold"/>
+                                        <p:tgtEl>
+                                          <p:spTgt spid="13"/>
+                                        </p:tgtEl>
+                                      </p:cBhvr>
+                                      <p:from x="88000" y="88000"/>
+                                      <p:to x="100000" y="100000"/>
+                                    </p:animScale>
+                                  </p:childTnLst>
+                                </p:cTn>
+                              </p:par>
+                              <p:par>
+                                <p:cTn id="32" presetID="53" presetClass="entr" presetSubtype="16" fill="hold" decel="100000" nodeType="withEffect">
+                                  <p:stCondLst>
+                                    <p:cond delay="467"/>
+                                  </p:stCondLst>
+                                  <p:childTnLst>
+                                    <p:set>
+                                      <p:cBhvr>
+                                        <p:cTn id="29" dur="1" fill="hold">
+                                          <p:stCondLst>
+                                            <p:cond delay="0"/>
+                                          </p:stCondLst>
+                                        </p:cTn>
+                                        <p:tgtEl>
+                                          <p:spTgt spid="15"/>
+                                        </p:tgtEl>
+                                        <p:attrNameLst>
+                                          <p:attrName>style.visibility</p:attrName>
+                                        </p:attrNameLst>
+                                      </p:cBhvr>
+                                      <p:to>
+                                        <p:strVal val="visible"/>
+                                      </p:to>
+                                    </p:set>
+                                    <p:animEffect transition="in" filter="fade">
+                                      <p:cBhvr>
+                                        <p:cTn id="30" dur="450"/>
+                                        <p:tgtEl>
+                                          <p:spTgt spid="15"/>
+                                        </p:tgtEl>
+                                      </p:cBhvr>
+                                    </p:animEffect>
+                                    <p:animScale>
+                                      <p:cBhvr>
+                                        <p:cTn id="31" dur="450" fill="hold"/>
+                                        <p:tgtEl>
+                                          <p:spTgt spid="15"/>
+                                        </p:tgtEl>
+                                      </p:cBhvr>
+                                      <p:from x="88000" y="88000"/>
+                                      <p:to x="100000" y="100000"/>
+                                    </p:animScale>
+                                  </p:childTnLst>
+                                </p:cTn>
+                              </p:par>
+                              <p:par>
+                                <p:cTn id="36" presetID="53" presetClass="entr" presetSubtype="16" fill="hold" decel="100000" nodeType="withEffect">
+                                  <p:stCondLst>
+                                    <p:cond delay="544"/>
+                                  </p:stCondLst>
+                                  <p:childTnLst>
+                                    <p:set>
+                                      <p:cBhvr>
+                                        <p:cTn id="33" dur="1" fill="hold">
+                                          <p:stCondLst>
+                                            <p:cond delay="0"/>
+                                          </p:stCondLst>
+                                        </p:cTn>
+                                        <p:tgtEl>
+                                          <p:spTgt spid="19"/>
+                                        </p:tgtEl>
+                                        <p:attrNameLst>
+                                          <p:attrName>style.visibility</p:attrName>
+                                        </p:attrNameLst>
+                                      </p:cBhvr>
+                                      <p:to>
+                                        <p:strVal val="visible"/>
+                                      </p:to>
+                                    </p:set>
+                                    <p:animEffect transition="in" filter="fade">
+                                      <p:cBhvr>
+                                        <p:cTn id="34" dur="450"/>
+                                        <p:tgtEl>
+                                          <p:spTgt spid="19"/>
+                                        </p:tgtEl>
+                                      </p:cBhvr>
+                                    </p:animEffect>
+                                    <p:animScale>
+                                      <p:cBhvr>
+                                        <p:cTn id="35" dur="450" fill="hold"/>
+                                        <p:tgtEl>
+                                          <p:spTgt spid="19"/>
+                                        </p:tgtEl>
+                                      </p:cBhvr>
+                                      <p:from x="88000" y="88000"/>
+                                      <p:to x="100000" y="100000"/>
+                                    </p:animScale>
+                                  </p:childTnLst>
+                                </p:cTn>
+                              </p:par>
+                              <p:par>
+                                <p:cTn id="40" presetID="53" presetClass="entr" presetSubtype="16" fill="hold" decel="100000" nodeType="withEffect">
+                                  <p:stCondLst>
+                                    <p:cond delay="622"/>
+                                  </p:stCondLst>
+                                  <p:childTnLst>
+                                    <p:set>
+                                      <p:cBhvr>
+                                        <p:cTn id="37" dur="1" fill="hold">
+                                          <p:stCondLst>
+                                            <p:cond delay="0"/>
+                                          </p:stCondLst>
+                                        </p:cTn>
+                                        <p:tgtEl>
+                                          <p:spTgt spid="20"/>
+                                        </p:tgtEl>
+                                        <p:attrNameLst>
+                                          <p:attrName>style.visibility</p:attrName>
+                                        </p:attrNameLst>
+                                      </p:cBhvr>
+                                      <p:to>
+                                        <p:strVal val="visible"/>
+                                      </p:to>
+                                    </p:set>
+                                    <p:animEffect transition="in" filter="fade">
+                                      <p:cBhvr>
+                                        <p:cTn id="38" dur="450"/>
+                                        <p:tgtEl>
+                                          <p:spTgt spid="20"/>
+                                        </p:tgtEl>
+                                      </p:cBhvr>
+                                    </p:animEffect>
+                                    <p:animScale>
+                                      <p:cBhvr>
+                                        <p:cTn id="39" dur="450" fill="hold"/>
+                                        <p:tgtEl>
+                                          <p:spTgt spid="20"/>
+                                        </p:tgtEl>
+                                      </p:cBhvr>
+                                      <p:from x="88000" y="88000"/>
+                                      <p:to x="100000" y="100000"/>
+                                    </p:animScale>
+                                  </p:childTnLst>
+                                </p:cTn>
+                              </p:par>
+                              <p:par>
+                                <p:cTn id="44" presetID="53" presetClass="entr" presetSubtype="16" fill="hold" decel="100000" nodeType="withEffect">
+                                  <p:stCondLst>
+                                    <p:cond delay="700"/>
+                                  </p:stCondLst>
+                                  <p:childTnLst>
+                                    <p:set>
+                                      <p:cBhvr>
+                                        <p:cTn id="41" dur="1" fill="hold">
+                                          <p:stCondLst>
+                                            <p:cond delay="0"/>
+                                          </p:stCondLst>
+                                        </p:cTn>
+                                        <p:tgtEl>
+                                          <p:spTgt spid="22"/>
+                                        </p:tgtEl>
+                                        <p:attrNameLst>
+                                          <p:attrName>style.visibility</p:attrName>
+                                        </p:attrNameLst>
+                                      </p:cBhvr>
+                                      <p:to>
+                                        <p:strVal val="visible"/>
+                                      </p:to>
+                                    </p:set>
+                                    <p:animEffect transition="in" filter="fade">
+                                      <p:cBhvr>
+                                        <p:cTn id="42" dur="450"/>
+                                        <p:tgtEl>
+                                          <p:spTgt spid="22"/>
+                                        </p:tgtEl>
+                                      </p:cBhvr>
+                                    </p:animEffect>
+                                    <p:animScale>
+                                      <p:cBhvr>
+                                        <p:cTn id="43" dur="450" fill="hold"/>
+                                        <p:tgtEl>
+                                          <p:spTgt spid="22"/>
+                                        </p:tgtEl>
+                                      </p:cBhvr>
+                                      <p:from x="88000" y="88000"/>
+                                      <p:to x="100000" y="100000"/>
+                                    </p:animScale>
+                                  </p:childTnLst>
+                                </p:cTn>
+                              </p:par>
+                            </p:childTnLst>
+                          </p:cTn>
+                        </p:par>
+                      </p:childTnLst>
+                    </p:cTn>
+                  </p:par>
+                </p:childTnLst>
+              </p:cTn>
+              <p:prevCondLst>
+                <p:cond evt="onPrev" delay="0">
+                  <p:tgtEl>
+                    <p:sldTgt/>
+                  </p:tgtEl>
+                </p:cond>
+              </p:prevCondLst>
+              <p:nextCondLst>
+                <p:cond evt="onNext" delay="0">
+                  <p:tgtEl>
+                    <p:sldTgt/>
+                  </p:tgtEl>
+                </p:cond>
+              </p:nextCondLst>
+            </p:seq>
+          </p:childTnLst>
+        </p:cTn>
+      </p:par>
+    </p:tnLst>
+  </p:timing>
 </p:sld>
 </file>
 
